--- a/presentations/participant-briefing.pptx
+++ b/presentations/participant-briefing.pptx
@@ -529,7 +529,7 @@
           <a:p/>
           <a:p>
             <a:r>
-              <a:t>Implementation references: README.md, plan.md sections 1, 9</a:t>
+              <a:t>Implementation references: README.md</a:t>
             </a:r>
           </a:p>
         </p:txBody>
@@ -605,7 +605,7 @@
           <a:p/>
           <a:p>
             <a:r>
-              <a:t>Implementation references: src/vending/scoring.py, src/vending/models.py: FIFO transfer, src/vending/engine.py</a:t>
+              <a:t>Implementation references: src/vending/scoring.py, src/vending/models.py, src/vending/engine.py</a:t>
             </a:r>
           </a:p>
         </p:txBody>
@@ -681,7 +681,7 @@
           <a:p/>
           <a:p>
             <a:r>
-              <a:t>Implementation references: src/vending/config.py: DURATIONS, src/vending/models.py: ACTIONS, src/vending/engine.py</a:t>
+              <a:t>Implementation references: src/vending/config.py, src/vending/models.py, src/vending/engine.py</a:t>
             </a:r>
           </a:p>
         </p:txBody>
@@ -751,13 +751,13 @@
           <a:lstStyle/>
           <a:p>
             <a:r>
-              <a:t>The starter provides an HTTP client, three scripted policies, bounded deterministic context summaries, isolated Markdown memory, a runner, and an optional model adapter. Teams can redesign the harness rather than inherit every starter choice. Keep at most one environment action in flight. If a provider returns multiple tool calls, process them serially and stop on termination. A local memory write uses model tokens but no simulated minutes. Remember the model is a policy component inside a controlled execution loop.</a:t>
+              <a:t>Targets round up and machine targets cannot exceed allocated capacity. Before enough history exists, target one slot and no storage reserve. Purchases cover only the shortfall after subtracting both machine and storage stock. Sellout quantities are lower bounds on demand. Price trials require three comparable, fully stocked days; hold for three comparable days and keep only improved average daily gross profit, otherwise revert. Exclude stockout days and restart comparisons after a supplier reshuffle. Negotiation permits two offers per supplier/product/day: 90% of listed price, then the returned counteroffer or listed price after no reply, subject to affordability and retail margin. Decisions should state quantities, expected margin, and reason. These are controller policy defaults, not universal engine rules.</a:t>
             </a:r>
           </a:p>
           <a:p/>
           <a:p>
             <a:r>
-              <a:t>Implementation references: src/harness/runner.py, src/harness/context.py, src/harness/agents.py</a:t>
+              <a:t>Implementation references: .pi/lib/vending-controller.mjs, .pi/skills/vending-machine/SKILL.md</a:t>
             </a:r>
           </a:p>
         </p:txBody>
@@ -827,13 +827,13 @@
           <a:lstStyle/>
           <a:p>
             <a:r>
-              <a:t>The starting skill is the authoritative participant entry point. The launcher loads only the vending skill and shell tools, while the runtime graph guard blocks illegal ordering with explicit reasons. This slide gives the at-a-glance control flow; the skill documents the public contract, and the extension enforces the critical transitions. Keep the diagram aligned with the current launcher and guard files if either changes.</a:t>
+              <a:t>The extension owns the API URL and returned environment ID. The model has only the structured vending tool, with shell and file tools disabled. Create and observe are separate calls; initial selection and pricing precede replenishment. After settlement, collect positive machine cash, read machine and storage snapshots, refresh stale quotes, review pricing, then replenish or end the day. Crossed midnights and lifecycle changes are processed after every response. Rejected stocking does not advance the controller phase or alter stock. End-day remains possible when no valid affordable replenishment remains. On termination retrieve and record GET /result before deleting, without automatically creating another episode. Checkpoints are stored in Pi session entries; resume checks status and reconciles public snapshots.</a:t>
             </a:r>
           </a:p>
           <a:p/>
           <a:p>
             <a:r>
-              <a:t>Implementation references: scripts/run_pi_agent.sh, .pi/skills/vending-machine/SKILL.md, .pi/extensions/vending-guard.js</a:t>
+              <a:t>Implementation references: .pi/extensions/vending-extension.js, .pi/lib/vending-controller.mjs, scripts/run_pi_agent.sh</a:t>
             </a:r>
           </a:p>
         </p:txBody>
@@ -903,13 +903,13 @@
           <a:lstStyle/>
           <a:p>
             <a:r>
-              <a:t>An identical action and payload with the same idempotency key replays while the environment is running, without a second purchase or time advance. A changed payload conflicts. After termination, known actions are rejected even for a replay key. Unknown actions remain 404. For 409, distinguish idempotency conflicts from unavailable lifecycle state by inspecting the error code and status. The current client retries transport errors at most twice; creation has no idempotency contract and should not be blindly retried. Timeout/expiry can occur during inference, so do not assume a tool call remains eligible after a long model response.</a:t>
+              <a:t>The client retries an uncertain business request once with the same idempotency key (two attempts total), with a 15-second HTTP timeout. It never blindly repeats environment creation. Reusing a key with a changed payload conflicts. A terminal environment rejects later actions, including replays; retrieve its result instead. Persisted controller checkpoints support resume and snapshot reconciliation. Automatic follow-up continues normal completed turns while work remains; cancellation, provider errors, and repeated lack of progress can pause it. A resumed legacy trace without a checkpoint cannot safely reconstruct controller ownership.</a:t>
             </a:r>
           </a:p>
           <a:p/>
           <a:p>
             <a:r>
-              <a:t>Implementation references: src/harness/client.py, src/harness/watchdog.py, src/vending/registry.py</a:t>
+              <a:t>Implementation references: .pi/lib/vending-client.mjs, .pi/extensions/vending-extension.js, src/vending/registry.py</a:t>
             </a:r>
           </a:p>
         </p:txBody>
@@ -979,13 +979,13 @@
           <a:lstStyle/>
           <a:p>
             <a:r>
-              <a:t>The starter uses a conservative UTF-8 byte-based input reservation plus overhead. It can stop early instead of knowingly exceeding the budget. The 1,000 ceiling counts policy calls, not necessarily environment actions; the initialization observe is separate. The 100,000 target and two-hour duration have not been calibrated through a paid full-duration model run. Do not present them as a measured performance guarantee or a finalized event rule. Full-run score and incomplete/truncated diagnostics should remain distinguishable.</a:t>
+              <a:t>These values describe configs/environment.json and the current Pi starter. There is no implemented 100,000-token budget or 1,000-policy-call ceiling. A model context window is not an episode token budget. max_days is configurable and can be null; real expiry or fee failure can end an episode earlier. Organizers must define, implement, and calibrate any additional compute policy before evaluation.</a:t>
             </a:r>
           </a:p>
           <a:p/>
           <a:p>
             <a:r>
-              <a:t>Implementation references: src/harness/runner.py: RunConfig and run, docs/calibration.md</a:t>
+              <a:t>Implementation references: configs/environment.json, scripts/run_pi_agent.sh, .pi/extensions/vending-extension.js</a:t>
             </a:r>
           </a:p>
         </p:txBody>
@@ -1055,13 +1055,13 @@
           <a:lstStyle/>
           <a:p>
             <a:r>
-              <a:t>An action that crosses midnight retains its model cost on the day inference began. Invalid/empty responses, local memory writes, and failures still count toward token usage. A call which is never executed after a stop is logged as a no-action record so totals reconcile. The new action fields are start_sim_time and token_usage, with model_call and attribution. Usage records carry simulated decision time; summary.usage.tokens_by_day stores daily totals. Input token usage includes provider-reported cached input where available.</a:t>
+              <a:t>Pi JSONL traces preserve provider usage in model messages. The viewer aggregates input and output tokens and model-call counts, but does not attribute Pi usage to individual business actions or simulated days. Some legacy artifacts include those fields. Missing attribution should remain unavailable, not silently zero. Do not claim that current Pi implements token reservations or token-budget termination.</a:t>
             </a:r>
           </a:p>
           <a:p/>
           <a:p>
             <a:r>
-              <a:t>Implementation references: src/harness/usage.py, src/harness/runner.py, src/viewer/tokens.py</a:t>
+              <a:t>Implementation references: src/viewer/store.py, src/viewer/tokens.py</a:t>
             </a:r>
           </a:p>
         </p:txBody>
@@ -1131,13 +1131,13 @@
           <a:lstStyle/>
           <a:p>
             <a:r>
-              <a:t>Run these commands from the repository root with a Python environment activated. Use python3 -m venv .venv first if appropriate. The test extra contains pytest, not the optional model SDK. Idle, listed, and negotiating policies need no model credentials. Teams implementing their own harness can reuse typed action schemas and the HTTP client. Private test definitions should remain with the evaluator; the saved-environment convenience command reads local definition files and is a development workflow, not an isolated grading boundary.</a:t>
+              <a:t>Prepare the Python environment with python3 -m pip install -e '.[test]' and install the Pi CLI with scripts/install_pi.sh. Start the service, model server, agent, and viewer in separate terminals in that order. The serving script requires locally downloaded weights and suitable GPU resources; inspect its configuration for your machine. For a shorter smoke episode, start the service with environments/smoke.json instead. The extension loads the skill and exposes only vending. Stop local service/model/viewer processes when finished. These commands are local development, not a private grading boundary.</a:t>
             </a:r>
           </a:p>
           <a:p/>
           <a:p>
             <a:r>
-              <a:t>Implementation references: README.md, scripts/run_environment.sh, scripts/view_runs.sh, pyproject.toml</a:t>
+              <a:t>Implementation references: README.md, start_env.sh, scripts/install_pi.sh, scripts/serve_qwen_vllm.sh, scripts/run_pi_agent.sh, scripts/view_runs.sh</a:t>
             </a:r>
           </a:p>
         </p:txBody>
@@ -1207,7 +1207,7 @@
           <a:lstStyle/>
           <a:p>
             <a:r>
-              <a:t>Use the dashboard to find one concrete failure mode: redundant observations, unfunded purchases, too little fee liquidity, slow decisions, or context growing faster than useful progress. The machine display is the last observed snapshot, not a reconstructed final inventory. Unfinished means no final summary was written and does not prove the process is still alive. Truncated scores can come from trusted pre-deletion snapshots and remain explicitly incomplete. A human may inspect practice configuration, but the test evaluator view is not an extra tool for participant policies.</a:t>
+              <a:t>The viewer normalizes legacy curl records and structured vending results. Daily activity records purchases, costs, sales, and cash collection. Machine and storage displays are the last observed snapshots, with their timestamps, not guaranteed final inventory. Live profit requires enough trace history; terminal GET /result is authoritative. Unfinished means no final result was recorded and does not prove the process is alive. Pi per-action and per-day token attribution is unavailable. Use the viewer to diagnose redundant requests, fee liquidity, stockouts, and local blocks. Private evaluator data is not an additional policy tool.</a:t>
             </a:r>
           </a:p>
           <a:p/>
@@ -1283,13 +1283,13 @@
           <a:lstStyle/>
           <a:p>
             <a:r>
-              <a:t>This is a recommended readiness checklist, not a finalized submission contract. Organizers must announce the invocation protocol, lifecycle ownership, model allowance, runtime/token enforcement, test repeats, deadline, and treatment of truncated or infrastructure-failed runs. The supplied runner writes config.json, actions.jsonl, usage.jsonl, memory.md, and summary.json; participant harnesses should preserve equivalent auditability under the final contract. Close the core briefing by inviting questions about the environment interface and the harness boundary.</a:t>
+              <a:t>This is a readiness checklist, not a finalized submission contract. Organizers must announce invocation, lifecycle ownership, model allowance, runtime/token policy, repeats, deadlines, and treatment of incomplete or infrastructure-failed runs. Preserve the Pi session JSONL, configuration, and policy version for auditability. Record terminal result retrieval and cleanup. Compare profitability across multiple seeds with equal wall-time budgets before claiming improvement.</a:t>
             </a:r>
           </a:p>
           <a:p/>
           <a:p>
             <a:r>
-              <a:t>Implementation references: plan.md section 9, src/harness/runner.py, README.md</a:t>
+              <a:t>Implementation references: README.md</a:t>
             </a:r>
           </a:p>
         </p:txBody>
@@ -1365,7 +1365,7 @@
           <a:p/>
           <a:p>
             <a:r>
-              <a:t>Implementation references: src/harness/runner.py, src/vending/environments.py</a:t>
+              <a:t>Implementation references: src/vending/environments.py</a:t>
             </a:r>
           </a:p>
         </p:txBody>
@@ -1435,7 +1435,7 @@
           <a:lstStyle/>
           <a:p>
             <a:r>
-              <a:t>Known actions return 410 on ended environments and 409 on unavailable ones. Unknown IDs/actions are 404. Invalid JSON is 400; schema/identifier errors are 422. Domain refusals are ordinary 200 results. Status contains only state; it does not contain a score. Retrieve result before deletion. If the harness stops while running, a trusted service-side deletion snapshot supports truncated accounting; there is no post-delete result endpoint. Exactly who owns creation and deletion during the event must be specified in the organizer's test handoff.</a:t>
+              <a:t>Known actions return 410 on ended environments and 409 on unavailable ones. Unknown IDs/actions are 404. Invalid JSON is 400; schema/identifier errors are 422. Domain refusals are ordinary 200 results. Status contains only state; it does not contain a score. Retrieve result before deletion. If the harness stops while running, a trusted service-side deletion snapshot supports truncated accounting; there is no post-delete result endpoint. Exactly who owns creation and deletion during the event must be specified in the organizer's test handoff. In the Pi starter, the extension owns this lifecycle and the environment ID; model calls use the vending tool rather than raw HTTP.</a:t>
             </a:r>
           </a:p>
           <a:p/>
@@ -1511,13 +1511,13 @@
           <a:lstStyle/>
           <a:p>
             <a:r>
-              <a:t>Refer to src/vending/models.py for the shared typed schemas. Quantities and offer prices must be positive integers, and the configured quantity cap applies. Selling prices must respect the product's public bounds. Boolean values are not valid integer amounts. A 200 response includes action_id, state, sim_time, elapsed_minutes, result, events, metrics, and termination_reason, with score on terminal accepted actions. There is no arbitrary Python method dispatch or hidden evaluator action available to the policy.</a:t>
+              <a:t>Refer to src/vending/models.py for the shared typed schemas. Quantities and offer prices must be positive integers, and the configured quantity cap applies. Selling prices must respect the product's public bounds. Boolean values are not valid integer amounts. A 200 response includes action_id, state, sim_time, elapsed_minutes, result, events, metrics, and termination_reason, with score on terminal accepted actions. There is no arbitrary Python method dispatch or hidden evaluator action available to the policy. This table describes REST schemas. The Pi tool exposes a constrained subset with an action and typed payload; consult its returned permitted actions. unstock_items and wait are not exposed by the starter controller.</a:t>
             </a:r>
           </a:p>
           <a:p/>
           <a:p>
             <a:r>
-              <a:t>Implementation references: src/vending/models.py, src/vending/engine.py: validate</a:t>
+              <a:t>Implementation references: src/vending/models.py, src/vending/engine.py</a:t>
             </a:r>
           </a:p>
         </p:txBody>
@@ -1593,7 +1593,7 @@
           <a:p/>
           <a:p>
             <a:r>
-              <a:t>Implementation references: src/vending/models.py, src/vending/engine.py, src/harness/client.py</a:t>
+              <a:t>Implementation references: src/vending/models.py, src/vending/engine.py, .pi/lib/vending-client.mjs</a:t>
             </a:r>
           </a:p>
         </p:txBody>
@@ -1745,7 +1745,7 @@
           <a:p/>
           <a:p>
             <a:r>
-              <a:t>Implementation references: src/vending/engine.py: catalog and observe, plan.md sections 3, 9</a:t>
+              <a:t>Implementation references: src/vending/engine.py</a:t>
             </a:r>
           </a:p>
         </p:txBody>
@@ -1815,13 +1815,13 @@
           <a:lstStyle/>
           <a:p>
             <a:r>
-              <a:t>All numeric settings here are current defaults, not guaranteed hidden-test settings. Catalog size, fees, machine shape, capacity, and action costs are configurable. The engine requires a positive selling price before stocking. There is no separate logistics pipeline. Purchases and inventory transfers are all-or-nothing.</a:t>
+              <a:t>All numeric settings here are settings in configs/environment.json, not guaranteed hidden-test settings. Catalog size, fees, machine shape, capacity, and action costs are configurable. The engine requires a positive selling price before stocking. There is no separate logistics pipeline. Purchases and inventory transfers are all-or-nothing.</a:t>
             </a:r>
           </a:p>
           <a:p/>
           <a:p>
             <a:r>
-              <a:t>Implementation references: src/vending/config.py, src/vending/engine.py</a:t>
+              <a:t>Implementation references: src/vending/config.py, src/vending/engine.py, configs/environment.json</a:t>
             </a:r>
           </a:p>
         </p:txBody>
@@ -1891,13 +1891,13 @@
           <a:lstStyle/>
           <a:p>
             <a:r>
-              <a:t>The default demand tick is five minutes. An action applies its immediate effects first, then advances time and resolves sales. Status/result reads do not advance business time. The separate harness watchdog is slightly longer than the environment runtime to allow cleanup. Do not confuse that grace period with extra business time. The environment may terminate earlier after repeated fee failures.</a:t>
+              <a:t>The practice file configures runtime_seconds=3600 and max_days=365. These are configurable, and max_days can be null. Actions apply immediate effects before advancing time; sales settle only at midnight. Status and result reads do not advance business time. The service checks a monotonic deadline and expires idle environments in a background sweep. Late actions cannot extend business time. Repeated fee failures can end the episode earlier.</a:t>
             </a:r>
           </a:p>
           <a:p/>
           <a:p>
             <a:r>
-              <a:t>Implementation references: src/vending/engine.py: execute and advance, src/vending/registry.py, src/harness/runner.py</a:t>
+              <a:t>Implementation references: configs/environment.json, src/vending/engine.py, src/vending/registry.py</a:t>
             </a:r>
           </a:p>
         </p:txBody>
@@ -1973,7 +1973,7 @@
           <a:p/>
           <a:p>
             <a:r>
-              <a:t>Implementation references: src/vending/engine.py: apply and advance</a:t>
+              <a:t>Implementation references: src/vending/engine.py</a:t>
             </a:r>
           </a:p>
         </p:txBody>
@@ -2043,13 +2043,13 @@
           <a:lstStyle/>
           <a:p>
             <a:r>
-              <a:t>Suppliers follow deterministic policies. Patient suppliers counter out-of-range offers, impatient suppliers can return no_reply, and pushy-patient suppliers may add an upsell. This deck does not disclose particular supplier types, pair minimums, or category assignments in the test. Supplier stock is unlimited, but the quantity cap and spendable cash limit purchases. A no_reply outcome is not a network timeout.</a:t>
+              <a:t>Suppliers follow deterministic policies. Patient suppliers counter out-of-range offers, impatient suppliers can return no_reply, and pushy-patient suppliers may add an upsell. This deck does not disclose particular supplier types, pair minimums, or category assignments in the test. Supplier stock is unlimited, but the quantity cap and spendable cash limit purchases. A no_reply outcome is not a network timeout. Winner, loser, and balanced pair assignments and their quotes reshuffle at days 31, 61, and so on under the default 30-day interval. Supplier behavior types stay fixed. Public supplier_reshuffle events invalidate cached quotes; the controller requires search_products before buying again. Existing inventory keeps its acquisition cost.</a:t>
             </a:r>
           </a:p>
           <a:p/>
           <a:p>
             <a:r>
-              <a:t>Implementation references: src/vending/suppliers.py, src/vending/engine.py: make_offer</a:t>
+              <a:t>Implementation references: src/vending/suppliers.py, src/vending/engine.py</a:t>
             </a:r>
           </a:p>
         </p:txBody>
@@ -2125,7 +2125,7 @@
           <a:p/>
           <a:p>
             <a:r>
-              <a:t>Implementation references: src/vending/demand.py, src/vending/engine.py: bounds and advance</a:t>
+              <a:t>Implementation references: src/vending/demand.py, src/vending/engine.py</a:t>
             </a:r>
           </a:p>
         </p:txBody>
@@ -8172,7 +8172,7 @@
               </a:defRPr>
             </a:pPr>
             <a:r>
-              <a:t>Every tool call has an operating cost.</a:t>
+              <a:t>Business actions advance simulated time.</a:t>
             </a:r>
           </a:p>
         </p:txBody>
@@ -9354,7 +9354,7 @@
               </a:defRPr>
             </a:pPr>
             <a:r>
-              <a:t>Business refusals consume action time. Malformed requests do not.</a:t>
+              <a:t>Service-level business refusals consume time. Controller blocks and schema errors do not.</a:t>
             </a:r>
           </a:p>
         </p:txBody>
@@ -9630,7 +9630,7 @@
               </a:defRPr>
             </a:pPr>
             <a:r>
-              <a:t>Build a loop that stays useful under pressure.</a:t>
+              <a:t>Replenish from stock. Adapt from evidence.</a:t>
             </a:r>
           </a:p>
         </p:txBody>
@@ -9643,12 +9643,12 @@
         </p:nvSpPr>
         <p:spPr>
           <a:xfrm>
-            <a:off x="660400" y="2349500"/>
-            <a:ext cx="2001520" cy="2565400"/>
+            <a:off x="660400" y="2209800"/>
+            <a:ext cx="5308600" cy="3352800"/>
           </a:xfrm>
           <a:prstGeom prst="roundRect">
             <a:avLst>
-              <a:gd name="adj" fmla="val 6345"/>
+              <a:gd name="adj" fmla="val 3787"/>
             </a:avLst>
           </a:prstGeom>
           <a:solidFill>
@@ -9682,14 +9682,999 @@
       </p:sp>
       <p:sp>
         <p:nvSpPr>
-          <p:cNvPr id="6" name="Rounded Rectangle 5"/>
+          <p:cNvPr id="6" name="Rectangle 5"/>
           <p:cNvSpPr/>
           <p:nvPr/>
         </p:nvSpPr>
         <p:spPr>
           <a:xfrm>
-            <a:off x="889000" y="2603500"/>
-            <a:ext cx="431800" cy="381000"/>
+            <a:off x="660400" y="2209800"/>
+            <a:ext cx="5308600" cy="50800"/>
+          </a:xfrm>
+          <a:prstGeom prst="rect">
+            <a:avLst/>
+          </a:prstGeom>
+          <a:solidFill>
+            <a:srgbClr val="008C7B"/>
+          </a:solidFill>
+          <a:ln>
+            <a:noFill/>
+          </a:ln>
+        </p:spPr>
+        <p:style>
+          <a:lnRef idx="1">
+            <a:schemeClr val="accent1"/>
+          </a:lnRef>
+          <a:fillRef idx="3">
+            <a:schemeClr val="accent1"/>
+          </a:fillRef>
+          <a:effectRef idx="2">
+            <a:schemeClr val="accent1"/>
+          </a:effectRef>
+          <a:fontRef idx="minor">
+            <a:schemeClr val="lt1"/>
+          </a:fontRef>
+        </p:style>
+        <p:txBody>
+          <a:bodyPr rtlCol="0" anchor="ctr"/>
+          <a:lstStyle/>
+          <a:p>
+            <a:pPr algn="ctr"/>
+          </a:p>
+        </p:txBody>
+      </p:sp>
+      <p:sp>
+        <p:nvSpPr>
+          <p:cNvPr id="7" name="TextBox 6"/>
+          <p:cNvSpPr txBox="1"/>
+          <p:nvPr/>
+        </p:nvSpPr>
+        <p:spPr>
+          <a:xfrm>
+            <a:off x="939800" y="2489200"/>
+            <a:ext cx="4749800" cy="444500"/>
+          </a:xfrm>
+          <a:prstGeom prst="rect">
+            <a:avLst/>
+          </a:prstGeom>
+          <a:noFill/>
+        </p:spPr>
+        <p:txBody>
+          <a:bodyPr wrap="none" lIns="0" rIns="0" tIns="0" bIns="0">
+            <a:spAutoFit/>
+          </a:bodyPr>
+          <a:lstStyle/>
+          <a:p>
+            <a:pPr>
+              <a:lnSpc>
+                <a:spcPts val="1524"/>
+              </a:lnSpc>
+              <a:spcBef>
+                <a:spcPts val="0"/>
+              </a:spcBef>
+              <a:spcAft>
+                <a:spcPts val="0"/>
+              </a:spcAft>
+              <a:defRPr sz="1200" b="1">
+                <a:solidFill>
+                  <a:srgbClr val="008C7B"/>
+                </a:solidFill>
+                <a:latin typeface="DejaVu Sans"/>
+              </a:defRPr>
+            </a:pPr>
+            <a:r>
+              <a:t>STOCK AND CASH</a:t>
+            </a:r>
+          </a:p>
+        </p:txBody>
+      </p:sp>
+      <p:sp>
+        <p:nvSpPr>
+          <p:cNvPr id="8" name="Rounded Rectangle 7"/>
+          <p:cNvSpPr/>
+          <p:nvPr/>
+        </p:nvSpPr>
+        <p:spPr>
+          <a:xfrm>
+            <a:off x="939800" y="3073400"/>
+            <a:ext cx="63500" cy="63500"/>
+          </a:xfrm>
+          <a:prstGeom prst="roundRect">
+            <a:avLst>
+              <a:gd name="adj" fmla="val 15000"/>
+            </a:avLst>
+          </a:prstGeom>
+          <a:solidFill>
+            <a:srgbClr val="008C7B"/>
+          </a:solidFill>
+          <a:ln>
+            <a:noFill/>
+          </a:ln>
+        </p:spPr>
+        <p:style>
+          <a:lnRef idx="1">
+            <a:schemeClr val="accent1"/>
+          </a:lnRef>
+          <a:fillRef idx="3">
+            <a:schemeClr val="accent1"/>
+          </a:fillRef>
+          <a:effectRef idx="2">
+            <a:schemeClr val="accent1"/>
+          </a:effectRef>
+          <a:fontRef idx="minor">
+            <a:schemeClr val="lt1"/>
+          </a:fontRef>
+        </p:style>
+        <p:txBody>
+          <a:bodyPr rtlCol="0" anchor="ctr"/>
+          <a:lstStyle/>
+          <a:p>
+            <a:pPr algn="ctr"/>
+          </a:p>
+        </p:txBody>
+      </p:sp>
+      <p:sp>
+        <p:nvSpPr>
+          <p:cNvPr id="9" name="TextBox 8"/>
+          <p:cNvSpPr txBox="1"/>
+          <p:nvPr/>
+        </p:nvSpPr>
+        <p:spPr>
+          <a:xfrm>
+            <a:off x="1168400" y="2997200"/>
+            <a:ext cx="4508500" cy="1397000"/>
+          </a:xfrm>
+          <a:prstGeom prst="rect">
+            <a:avLst/>
+          </a:prstGeom>
+          <a:noFill/>
+        </p:spPr>
+        <p:txBody>
+          <a:bodyPr wrap="none" lIns="0" rIns="0" tIns="0" bIns="0">
+            <a:spAutoFit/>
+          </a:bodyPr>
+          <a:lstStyle/>
+          <a:p>
+            <a:pPr>
+              <a:lnSpc>
+                <a:spcPts val="2160"/>
+              </a:lnSpc>
+              <a:spcBef>
+                <a:spcPts val="0"/>
+              </a:spcBef>
+              <a:spcAft>
+                <a:spcPts val="0"/>
+              </a:spcAft>
+              <a:defRPr sz="1600" b="0">
+                <a:solidFill>
+                  <a:srgbClr val="173A42"/>
+                </a:solidFill>
+                <a:latin typeface="DejaVu Sans"/>
+              </a:defRPr>
+            </a:pPr>
+            <a:r>
+              <a:t>Start with up to four products, one slot each</a:t>
+            </a:r>
+          </a:p>
+        </p:txBody>
+      </p:sp>
+      <p:sp>
+        <p:nvSpPr>
+          <p:cNvPr id="10" name="Rounded Rectangle 9"/>
+          <p:cNvSpPr/>
+          <p:nvPr/>
+        </p:nvSpPr>
+        <p:spPr>
+          <a:xfrm>
+            <a:off x="939800" y="3429000"/>
+            <a:ext cx="63500" cy="63500"/>
+          </a:xfrm>
+          <a:prstGeom prst="roundRect">
+            <a:avLst>
+              <a:gd name="adj" fmla="val 15000"/>
+            </a:avLst>
+          </a:prstGeom>
+          <a:solidFill>
+            <a:srgbClr val="008C7B"/>
+          </a:solidFill>
+          <a:ln>
+            <a:noFill/>
+          </a:ln>
+        </p:spPr>
+        <p:style>
+          <a:lnRef idx="1">
+            <a:schemeClr val="accent1"/>
+          </a:lnRef>
+          <a:fillRef idx="3">
+            <a:schemeClr val="accent1"/>
+          </a:fillRef>
+          <a:effectRef idx="2">
+            <a:schemeClr val="accent1"/>
+          </a:effectRef>
+          <a:fontRef idx="minor">
+            <a:schemeClr val="lt1"/>
+          </a:fontRef>
+        </p:style>
+        <p:txBody>
+          <a:bodyPr rtlCol="0" anchor="ctr"/>
+          <a:lstStyle/>
+          <a:p>
+            <a:pPr algn="ctr"/>
+          </a:p>
+        </p:txBody>
+      </p:sp>
+      <p:sp>
+        <p:nvSpPr>
+          <p:cNvPr id="11" name="TextBox 10"/>
+          <p:cNvSpPr txBox="1"/>
+          <p:nvPr/>
+        </p:nvSpPr>
+        <p:spPr>
+          <a:xfrm>
+            <a:off x="1168400" y="3352800"/>
+            <a:ext cx="4508500" cy="1397000"/>
+          </a:xfrm>
+          <a:prstGeom prst="rect">
+            <a:avLst/>
+          </a:prstGeom>
+          <a:noFill/>
+        </p:spPr>
+        <p:txBody>
+          <a:bodyPr wrap="none" lIns="0" rIns="0" tIns="0" bIns="0">
+            <a:spAutoFit/>
+          </a:bodyPr>
+          <a:lstStyle/>
+          <a:p>
+            <a:pPr>
+              <a:lnSpc>
+                <a:spcPts val="2160"/>
+              </a:lnSpc>
+              <a:spcBef>
+                <a:spcPts val="0"/>
+              </a:spcBef>
+              <a:spcAft>
+                <a:spcPts val="0"/>
+              </a:spcAft>
+              <a:defRPr sz="1600" b="0">
+                <a:solidFill>
+                  <a:srgbClr val="173A42"/>
+                </a:solidFill>
+                <a:latin typeface="DejaVu Sans"/>
+              </a:defRPr>
+            </a:pPr>
+            <a:r>
+              <a:t>Use three days of sales at the current price</a:t>
+            </a:r>
+          </a:p>
+        </p:txBody>
+      </p:sp>
+      <p:sp>
+        <p:nvSpPr>
+          <p:cNvPr id="12" name="Rounded Rectangle 11"/>
+          <p:cNvSpPr/>
+          <p:nvPr/>
+        </p:nvSpPr>
+        <p:spPr>
+          <a:xfrm>
+            <a:off x="939800" y="3784600"/>
+            <a:ext cx="63500" cy="63500"/>
+          </a:xfrm>
+          <a:prstGeom prst="roundRect">
+            <a:avLst>
+              <a:gd name="adj" fmla="val 15000"/>
+            </a:avLst>
+          </a:prstGeom>
+          <a:solidFill>
+            <a:srgbClr val="008C7B"/>
+          </a:solidFill>
+          <a:ln>
+            <a:noFill/>
+          </a:ln>
+        </p:spPr>
+        <p:style>
+          <a:lnRef idx="1">
+            <a:schemeClr val="accent1"/>
+          </a:lnRef>
+          <a:fillRef idx="3">
+            <a:schemeClr val="accent1"/>
+          </a:fillRef>
+          <a:effectRef idx="2">
+            <a:schemeClr val="accent1"/>
+          </a:effectRef>
+          <a:fontRef idx="minor">
+            <a:schemeClr val="lt1"/>
+          </a:fontRef>
+        </p:style>
+        <p:txBody>
+          <a:bodyPr rtlCol="0" anchor="ctr"/>
+          <a:lstStyle/>
+          <a:p>
+            <a:pPr algn="ctr"/>
+          </a:p>
+        </p:txBody>
+      </p:sp>
+      <p:sp>
+        <p:nvSpPr>
+          <p:cNvPr id="13" name="TextBox 12"/>
+          <p:cNvSpPr txBox="1"/>
+          <p:nvPr/>
+        </p:nvSpPr>
+        <p:spPr>
+          <a:xfrm>
+            <a:off x="1168400" y="3708400"/>
+            <a:ext cx="4508500" cy="1397000"/>
+          </a:xfrm>
+          <a:prstGeom prst="rect">
+            <a:avLst/>
+          </a:prstGeom>
+          <a:noFill/>
+        </p:spPr>
+        <p:txBody>
+          <a:bodyPr wrap="none" lIns="0" rIns="0" tIns="0" bIns="0">
+            <a:spAutoFit/>
+          </a:bodyPr>
+          <a:lstStyle/>
+          <a:p>
+            <a:pPr>
+              <a:lnSpc>
+                <a:spcPts val="2160"/>
+              </a:lnSpc>
+              <a:spcBef>
+                <a:spcPts val="0"/>
+              </a:spcBef>
+              <a:spcAft>
+                <a:spcPts val="0"/>
+              </a:spcAft>
+              <a:defRPr sz="1600" b="0">
+                <a:solidFill>
+                  <a:srgbClr val="173A42"/>
+                </a:solidFill>
+                <a:latin typeface="DejaVu Sans"/>
+              </a:defRPr>
+            </a:pPr>
+            <a:r>
+              <a:t>Machine target: 1.5 days; reserve: 1 day</a:t>
+            </a:r>
+          </a:p>
+        </p:txBody>
+      </p:sp>
+      <p:sp>
+        <p:nvSpPr>
+          <p:cNvPr id="14" name="Rounded Rectangle 13"/>
+          <p:cNvSpPr/>
+          <p:nvPr/>
+        </p:nvSpPr>
+        <p:spPr>
+          <a:xfrm>
+            <a:off x="939800" y="4140200"/>
+            <a:ext cx="63500" cy="63500"/>
+          </a:xfrm>
+          <a:prstGeom prst="roundRect">
+            <a:avLst>
+              <a:gd name="adj" fmla="val 15000"/>
+            </a:avLst>
+          </a:prstGeom>
+          <a:solidFill>
+            <a:srgbClr val="008C7B"/>
+          </a:solidFill>
+          <a:ln>
+            <a:noFill/>
+          </a:ln>
+        </p:spPr>
+        <p:style>
+          <a:lnRef idx="1">
+            <a:schemeClr val="accent1"/>
+          </a:lnRef>
+          <a:fillRef idx="3">
+            <a:schemeClr val="accent1"/>
+          </a:fillRef>
+          <a:effectRef idx="2">
+            <a:schemeClr val="accent1"/>
+          </a:effectRef>
+          <a:fontRef idx="minor">
+            <a:schemeClr val="lt1"/>
+          </a:fontRef>
+        </p:style>
+        <p:txBody>
+          <a:bodyPr rtlCol="0" anchor="ctr"/>
+          <a:lstStyle/>
+          <a:p>
+            <a:pPr algn="ctr"/>
+          </a:p>
+        </p:txBody>
+      </p:sp>
+      <p:sp>
+        <p:nvSpPr>
+          <p:cNvPr id="15" name="TextBox 14"/>
+          <p:cNvSpPr txBox="1"/>
+          <p:nvPr/>
+        </p:nvSpPr>
+        <p:spPr>
+          <a:xfrm>
+            <a:off x="1168400" y="4064000"/>
+            <a:ext cx="4508500" cy="1397000"/>
+          </a:xfrm>
+          <a:prstGeom prst="rect">
+            <a:avLst/>
+          </a:prstGeom>
+          <a:noFill/>
+        </p:spPr>
+        <p:txBody>
+          <a:bodyPr wrap="none" lIns="0" rIns="0" tIns="0" bIns="0">
+            <a:spAutoFit/>
+          </a:bodyPr>
+          <a:lstStyle/>
+          <a:p>
+            <a:pPr>
+              <a:lnSpc>
+                <a:spcPts val="2160"/>
+              </a:lnSpc>
+              <a:spcBef>
+                <a:spcPts val="0"/>
+              </a:spcBef>
+              <a:spcAft>
+                <a:spcPts val="0"/>
+              </a:spcAft>
+              <a:defRPr sz="1600" b="0">
+                <a:solidFill>
+                  <a:srgbClr val="173A42"/>
+                </a:solidFill>
+                <a:latin typeface="DejaVu Sans"/>
+              </a:defRPr>
+            </a:pPr>
+            <a:r>
+              <a:t>Subtract all stock; reserve debt + three</a:t>
+            </a:r>
+          </a:p>
+          <a:p>
+            <a:pPr>
+              <a:lnSpc>
+                <a:spcPts val="2160"/>
+              </a:lnSpc>
+              <a:spcBef>
+                <a:spcPts val="0"/>
+              </a:spcBef>
+              <a:spcAft>
+                <a:spcPts val="0"/>
+              </a:spcAft>
+              <a:defRPr sz="1600" b="0">
+                <a:solidFill>
+                  <a:srgbClr val="173A42"/>
+                </a:solidFill>
+                <a:latin typeface="DejaVu Sans"/>
+              </a:defRPr>
+            </a:pPr>
+            <a:r>
+              <a:t>fees</a:t>
+            </a:r>
+          </a:p>
+        </p:txBody>
+      </p:sp>
+      <p:sp>
+        <p:nvSpPr>
+          <p:cNvPr id="16" name="Rounded Rectangle 15"/>
+          <p:cNvSpPr/>
+          <p:nvPr/>
+        </p:nvSpPr>
+        <p:spPr>
+          <a:xfrm>
+            <a:off x="6223000" y="2209800"/>
+            <a:ext cx="5308600" cy="3352800"/>
+          </a:xfrm>
+          <a:prstGeom prst="roundRect">
+            <a:avLst>
+              <a:gd name="adj" fmla="val 3787"/>
+            </a:avLst>
+          </a:prstGeom>
+          <a:solidFill>
+            <a:srgbClr val="FFFFFF"/>
+          </a:solidFill>
+          <a:ln>
+            <a:noFill/>
+          </a:ln>
+        </p:spPr>
+        <p:style>
+          <a:lnRef idx="1">
+            <a:schemeClr val="accent1"/>
+          </a:lnRef>
+          <a:fillRef idx="3">
+            <a:schemeClr val="accent1"/>
+          </a:fillRef>
+          <a:effectRef idx="2">
+            <a:schemeClr val="accent1"/>
+          </a:effectRef>
+          <a:fontRef idx="minor">
+            <a:schemeClr val="lt1"/>
+          </a:fontRef>
+        </p:style>
+        <p:txBody>
+          <a:bodyPr rtlCol="0" anchor="ctr"/>
+          <a:lstStyle/>
+          <a:p>
+            <a:pPr algn="ctr"/>
+          </a:p>
+        </p:txBody>
+      </p:sp>
+      <p:sp>
+        <p:nvSpPr>
+          <p:cNvPr id="17" name="Rectangle 16"/>
+          <p:cNvSpPr/>
+          <p:nvPr/>
+        </p:nvSpPr>
+        <p:spPr>
+          <a:xfrm>
+            <a:off x="6223000" y="2209800"/>
+            <a:ext cx="5308600" cy="50800"/>
+          </a:xfrm>
+          <a:prstGeom prst="rect">
+            <a:avLst/>
+          </a:prstGeom>
+          <a:solidFill>
+            <a:srgbClr val="5E8DCD"/>
+          </a:solidFill>
+          <a:ln>
+            <a:noFill/>
+          </a:ln>
+        </p:spPr>
+        <p:style>
+          <a:lnRef idx="1">
+            <a:schemeClr val="accent1"/>
+          </a:lnRef>
+          <a:fillRef idx="3">
+            <a:schemeClr val="accent1"/>
+          </a:fillRef>
+          <a:effectRef idx="2">
+            <a:schemeClr val="accent1"/>
+          </a:effectRef>
+          <a:fontRef idx="minor">
+            <a:schemeClr val="lt1"/>
+          </a:fontRef>
+        </p:style>
+        <p:txBody>
+          <a:bodyPr rtlCol="0" anchor="ctr"/>
+          <a:lstStyle/>
+          <a:p>
+            <a:pPr algn="ctr"/>
+          </a:p>
+        </p:txBody>
+      </p:sp>
+      <p:sp>
+        <p:nvSpPr>
+          <p:cNvPr id="18" name="TextBox 17"/>
+          <p:cNvSpPr txBox="1"/>
+          <p:nvPr/>
+        </p:nvSpPr>
+        <p:spPr>
+          <a:xfrm>
+            <a:off x="6502400" y="2489200"/>
+            <a:ext cx="4749800" cy="444500"/>
+          </a:xfrm>
+          <a:prstGeom prst="rect">
+            <a:avLst/>
+          </a:prstGeom>
+          <a:noFill/>
+        </p:spPr>
+        <p:txBody>
+          <a:bodyPr wrap="none" lIns="0" rIns="0" tIns="0" bIns="0">
+            <a:spAutoFit/>
+          </a:bodyPr>
+          <a:lstStyle/>
+          <a:p>
+            <a:pPr>
+              <a:lnSpc>
+                <a:spcPts val="1524"/>
+              </a:lnSpc>
+              <a:spcBef>
+                <a:spcPts val="0"/>
+              </a:spcBef>
+              <a:spcAft>
+                <a:spcPts val="0"/>
+              </a:spcAft>
+              <a:defRPr sz="1200" b="1">
+                <a:solidFill>
+                  <a:srgbClr val="557079"/>
+                </a:solidFill>
+                <a:latin typeface="DejaVu Sans"/>
+              </a:defRPr>
+            </a:pPr>
+            <a:r>
+              <a:t>PRICES AND CAPACITY</a:t>
+            </a:r>
+          </a:p>
+        </p:txBody>
+      </p:sp>
+      <p:sp>
+        <p:nvSpPr>
+          <p:cNvPr id="19" name="Rounded Rectangle 18"/>
+          <p:cNvSpPr/>
+          <p:nvPr/>
+        </p:nvSpPr>
+        <p:spPr>
+          <a:xfrm>
+            <a:off x="6502400" y="3073400"/>
+            <a:ext cx="63500" cy="63500"/>
+          </a:xfrm>
+          <a:prstGeom prst="roundRect">
+            <a:avLst>
+              <a:gd name="adj" fmla="val 15000"/>
+            </a:avLst>
+          </a:prstGeom>
+          <a:solidFill>
+            <a:srgbClr val="008C7B"/>
+          </a:solidFill>
+          <a:ln>
+            <a:noFill/>
+          </a:ln>
+        </p:spPr>
+        <p:style>
+          <a:lnRef idx="1">
+            <a:schemeClr val="accent1"/>
+          </a:lnRef>
+          <a:fillRef idx="3">
+            <a:schemeClr val="accent1"/>
+          </a:fillRef>
+          <a:effectRef idx="2">
+            <a:schemeClr val="accent1"/>
+          </a:effectRef>
+          <a:fontRef idx="minor">
+            <a:schemeClr val="lt1"/>
+          </a:fontRef>
+        </p:style>
+        <p:txBody>
+          <a:bodyPr rtlCol="0" anchor="ctr"/>
+          <a:lstStyle/>
+          <a:p>
+            <a:pPr algn="ctr"/>
+          </a:p>
+        </p:txBody>
+      </p:sp>
+      <p:sp>
+        <p:nvSpPr>
+          <p:cNvPr id="20" name="TextBox 19"/>
+          <p:cNvSpPr txBox="1"/>
+          <p:nvPr/>
+        </p:nvSpPr>
+        <p:spPr>
+          <a:xfrm>
+            <a:off x="6731000" y="2997200"/>
+            <a:ext cx="4508500" cy="1397000"/>
+          </a:xfrm>
+          <a:prstGeom prst="rect">
+            <a:avLst/>
+          </a:prstGeom>
+          <a:noFill/>
+        </p:spPr>
+        <p:txBody>
+          <a:bodyPr wrap="none" lIns="0" rIns="0" tIns="0" bIns="0">
+            <a:spAutoFit/>
+          </a:bodyPr>
+          <a:lstStyle/>
+          <a:p>
+            <a:pPr>
+              <a:lnSpc>
+                <a:spcPts val="2160"/>
+              </a:lnSpc>
+              <a:spcBef>
+                <a:spcPts val="0"/>
+              </a:spcBef>
+              <a:spcAft>
+                <a:spcPts val="0"/>
+              </a:spcAft>
+              <a:defRPr sz="1600" b="0">
+                <a:solidFill>
+                  <a:srgbClr val="173A42"/>
+                </a:solidFill>
+                <a:latin typeface="DejaVu Sans"/>
+              </a:defRPr>
+            </a:pPr>
+            <a:r>
+              <a:t>Start at 150% of reference, above cost</a:t>
+            </a:r>
+          </a:p>
+        </p:txBody>
+      </p:sp>
+      <p:sp>
+        <p:nvSpPr>
+          <p:cNvPr id="21" name="Rounded Rectangle 20"/>
+          <p:cNvSpPr/>
+          <p:nvPr/>
+        </p:nvSpPr>
+        <p:spPr>
+          <a:xfrm>
+            <a:off x="6502400" y="3429000"/>
+            <a:ext cx="63500" cy="63500"/>
+          </a:xfrm>
+          <a:prstGeom prst="roundRect">
+            <a:avLst>
+              <a:gd name="adj" fmla="val 15000"/>
+            </a:avLst>
+          </a:prstGeom>
+          <a:solidFill>
+            <a:srgbClr val="008C7B"/>
+          </a:solidFill>
+          <a:ln>
+            <a:noFill/>
+          </a:ln>
+        </p:spPr>
+        <p:style>
+          <a:lnRef idx="1">
+            <a:schemeClr val="accent1"/>
+          </a:lnRef>
+          <a:fillRef idx="3">
+            <a:schemeClr val="accent1"/>
+          </a:fillRef>
+          <a:effectRef idx="2">
+            <a:schemeClr val="accent1"/>
+          </a:effectRef>
+          <a:fontRef idx="minor">
+            <a:schemeClr val="lt1"/>
+          </a:fontRef>
+        </p:style>
+        <p:txBody>
+          <a:bodyPr rtlCol="0" anchor="ctr"/>
+          <a:lstStyle/>
+          <a:p>
+            <a:pPr algn="ctr"/>
+          </a:p>
+        </p:txBody>
+      </p:sp>
+      <p:sp>
+        <p:nvSpPr>
+          <p:cNvPr id="22" name="TextBox 21"/>
+          <p:cNvSpPr txBox="1"/>
+          <p:nvPr/>
+        </p:nvSpPr>
+        <p:spPr>
+          <a:xfrm>
+            <a:off x="6731000" y="3352800"/>
+            <a:ext cx="4508500" cy="1397000"/>
+          </a:xfrm>
+          <a:prstGeom prst="rect">
+            <a:avLst/>
+          </a:prstGeom>
+          <a:noFill/>
+        </p:spPr>
+        <p:txBody>
+          <a:bodyPr wrap="none" lIns="0" rIns="0" tIns="0" bIns="0">
+            <a:spAutoFit/>
+          </a:bodyPr>
+          <a:lstStyle/>
+          <a:p>
+            <a:pPr>
+              <a:lnSpc>
+                <a:spcPts val="2160"/>
+              </a:lnSpc>
+              <a:spcBef>
+                <a:spcPts val="0"/>
+              </a:spcBef>
+              <a:spcAft>
+                <a:spcPts val="0"/>
+              </a:spcAft>
+              <a:defRPr sz="1600" b="0">
+                <a:solidFill>
+                  <a:srgbClr val="173A42"/>
+                </a:solidFill>
+                <a:latin typeface="DejaVu Sans"/>
+              </a:defRPr>
+            </a:pPr>
+            <a:r>
+              <a:t>Test one price at a time, within ±10%</a:t>
+            </a:r>
+          </a:p>
+        </p:txBody>
+      </p:sp>
+      <p:sp>
+        <p:nvSpPr>
+          <p:cNvPr id="23" name="Rounded Rectangle 22"/>
+          <p:cNvSpPr/>
+          <p:nvPr/>
+        </p:nvSpPr>
+        <p:spPr>
+          <a:xfrm>
+            <a:off x="6502400" y="3784600"/>
+            <a:ext cx="63500" cy="63500"/>
+          </a:xfrm>
+          <a:prstGeom prst="roundRect">
+            <a:avLst>
+              <a:gd name="adj" fmla="val 15000"/>
+            </a:avLst>
+          </a:prstGeom>
+          <a:solidFill>
+            <a:srgbClr val="008C7B"/>
+          </a:solidFill>
+          <a:ln>
+            <a:noFill/>
+          </a:ln>
+        </p:spPr>
+        <p:style>
+          <a:lnRef idx="1">
+            <a:schemeClr val="accent1"/>
+          </a:lnRef>
+          <a:fillRef idx="3">
+            <a:schemeClr val="accent1"/>
+          </a:fillRef>
+          <a:effectRef idx="2">
+            <a:schemeClr val="accent1"/>
+          </a:effectRef>
+          <a:fontRef idx="minor">
+            <a:schemeClr val="lt1"/>
+          </a:fontRef>
+        </p:style>
+        <p:txBody>
+          <a:bodyPr rtlCol="0" anchor="ctr"/>
+          <a:lstStyle/>
+          <a:p>
+            <a:pPr algn="ctr"/>
+          </a:p>
+        </p:txBody>
+      </p:sp>
+      <p:sp>
+        <p:nvSpPr>
+          <p:cNvPr id="24" name="TextBox 23"/>
+          <p:cNvSpPr txBox="1"/>
+          <p:nvPr/>
+        </p:nvSpPr>
+        <p:spPr>
+          <a:xfrm>
+            <a:off x="6731000" y="3708400"/>
+            <a:ext cx="4508500" cy="1397000"/>
+          </a:xfrm>
+          <a:prstGeom prst="rect">
+            <a:avLst/>
+          </a:prstGeom>
+          <a:noFill/>
+        </p:spPr>
+        <p:txBody>
+          <a:bodyPr wrap="none" lIns="0" rIns="0" tIns="0" bIns="0">
+            <a:spAutoFit/>
+          </a:bodyPr>
+          <a:lstStyle/>
+          <a:p>
+            <a:pPr>
+              <a:lnSpc>
+                <a:spcPts val="2160"/>
+              </a:lnSpc>
+              <a:spcBef>
+                <a:spcPts val="0"/>
+              </a:spcBef>
+              <a:spcAft>
+                <a:spcPts val="0"/>
+              </a:spcAft>
+              <a:defRPr sz="1600" b="0">
+                <a:solidFill>
+                  <a:srgbClr val="173A42"/>
+                </a:solidFill>
+                <a:latin typeface="DejaVu Sans"/>
+              </a:defRPr>
+            </a:pPr>
+            <a:r>
+              <a:t>Compare three fully stocked days</a:t>
+            </a:r>
+          </a:p>
+        </p:txBody>
+      </p:sp>
+      <p:sp>
+        <p:nvSpPr>
+          <p:cNvPr id="25" name="Rounded Rectangle 24"/>
+          <p:cNvSpPr/>
+          <p:nvPr/>
+        </p:nvSpPr>
+        <p:spPr>
+          <a:xfrm>
+            <a:off x="6502400" y="4140200"/>
+            <a:ext cx="63500" cy="63500"/>
+          </a:xfrm>
+          <a:prstGeom prst="roundRect">
+            <a:avLst>
+              <a:gd name="adj" fmla="val 15000"/>
+            </a:avLst>
+          </a:prstGeom>
+          <a:solidFill>
+            <a:srgbClr val="008C7B"/>
+          </a:solidFill>
+          <a:ln>
+            <a:noFill/>
+          </a:ln>
+        </p:spPr>
+        <p:style>
+          <a:lnRef idx="1">
+            <a:schemeClr val="accent1"/>
+          </a:lnRef>
+          <a:fillRef idx="3">
+            <a:schemeClr val="accent1"/>
+          </a:fillRef>
+          <a:effectRef idx="2">
+            <a:schemeClr val="accent1"/>
+          </a:effectRef>
+          <a:fontRef idx="minor">
+            <a:schemeClr val="lt1"/>
+          </a:fontRef>
+        </p:style>
+        <p:txBody>
+          <a:bodyPr rtlCol="0" anchor="ctr"/>
+          <a:lstStyle/>
+          <a:p>
+            <a:pPr algn="ctr"/>
+          </a:p>
+        </p:txBody>
+      </p:sp>
+      <p:sp>
+        <p:nvSpPr>
+          <p:cNvPr id="26" name="TextBox 25"/>
+          <p:cNvSpPr txBox="1"/>
+          <p:nvPr/>
+        </p:nvSpPr>
+        <p:spPr>
+          <a:xfrm>
+            <a:off x="6731000" y="4064000"/>
+            <a:ext cx="4508500" cy="1397000"/>
+          </a:xfrm>
+          <a:prstGeom prst="rect">
+            <a:avLst/>
+          </a:prstGeom>
+          <a:noFill/>
+        </p:spPr>
+        <p:txBody>
+          <a:bodyPr wrap="none" lIns="0" rIns="0" tIns="0" bIns="0">
+            <a:spAutoFit/>
+          </a:bodyPr>
+          <a:lstStyle/>
+          <a:p>
+            <a:pPr>
+              <a:lnSpc>
+                <a:spcPts val="2160"/>
+              </a:lnSpc>
+              <a:spcBef>
+                <a:spcPts val="0"/>
+              </a:spcBef>
+              <a:spcAft>
+                <a:spcPts val="0"/>
+              </a:spcAft>
+              <a:defRPr sz="1600" b="0">
+                <a:solidFill>
+                  <a:srgbClr val="173A42"/>
+                </a:solidFill>
+                <a:latin typeface="DejaVu Sans"/>
+              </a:defRPr>
+            </a:pPr>
+            <a:r>
+              <a:t>Two consecutive sellouts permit another</a:t>
+            </a:r>
+          </a:p>
+          <a:p>
+            <a:pPr>
+              <a:lnSpc>
+                <a:spcPts val="2160"/>
+              </a:lnSpc>
+              <a:spcBef>
+                <a:spcPts val="0"/>
+              </a:spcBef>
+              <a:spcAft>
+                <a:spcPts val="0"/>
+              </a:spcAft>
+              <a:defRPr sz="1600" b="0">
+                <a:solidFill>
+                  <a:srgbClr val="173A42"/>
+                </a:solidFill>
+                <a:latin typeface="DejaVu Sans"/>
+              </a:defRPr>
+            </a:pPr>
+            <a:r>
+              <a:t>slot</a:t>
+            </a:r>
+          </a:p>
+        </p:txBody>
+      </p:sp>
+      <p:sp>
+        <p:nvSpPr>
+          <p:cNvPr id="27" name="Rounded Rectangle 26"/>
+          <p:cNvSpPr/>
+          <p:nvPr/>
+        </p:nvSpPr>
+        <p:spPr>
+          <a:xfrm>
+            <a:off x="660400" y="5842000"/>
+            <a:ext cx="10871200" cy="546100"/>
           </a:xfrm>
           <a:prstGeom prst="roundRect">
             <a:avLst>
@@ -9727,14 +10712,14 @@
       </p:sp>
       <p:sp>
         <p:nvSpPr>
-          <p:cNvPr id="7" name="TextBox 6"/>
+          <p:cNvPr id="28" name="TextBox 27"/>
           <p:cNvSpPr txBox="1"/>
           <p:nvPr/>
         </p:nvSpPr>
         <p:spPr>
           <a:xfrm>
-            <a:off x="977900" y="2692400"/>
-            <a:ext cx="330200" cy="228600"/>
+            <a:off x="838200" y="5994400"/>
+            <a:ext cx="10502900" cy="355600"/>
           </a:xfrm>
           <a:prstGeom prst="rect">
             <a:avLst/>
@@ -9749,7 +10734,7 @@
           <a:p>
             <a:pPr>
               <a:lnSpc>
-                <a:spcPts val="1524"/>
+                <a:spcPts val="1380"/>
               </a:lnSpc>
               <a:spcBef>
                 <a:spcPts val="0"/>
@@ -9759,1402 +10744,34 @@
               </a:spcAft>
               <a:defRPr sz="1200" b="1">
                 <a:solidFill>
-                  <a:srgbClr val="008C7B"/>
-                </a:solidFill>
-                <a:latin typeface="DejaVu Sans"/>
-              </a:defRPr>
-            </a:pPr>
-            <a:r>
-              <a:t>01</a:t>
-            </a:r>
-          </a:p>
-        </p:txBody>
-      </p:sp>
-      <p:sp>
-        <p:nvSpPr>
-          <p:cNvPr id="8" name="TextBox 7"/>
-          <p:cNvSpPr txBox="1"/>
-          <p:nvPr/>
-        </p:nvSpPr>
-        <p:spPr>
-          <a:xfrm>
-            <a:off x="889000" y="3314700"/>
-            <a:ext cx="1544320" cy="419100"/>
-          </a:xfrm>
-          <a:prstGeom prst="rect">
-            <a:avLst/>
-          </a:prstGeom>
-          <a:noFill/>
-        </p:spPr>
-        <p:txBody>
-          <a:bodyPr wrap="none" lIns="0" rIns="0" tIns="0" bIns="0">
-            <a:spAutoFit/>
-          </a:bodyPr>
-          <a:lstStyle/>
-          <a:p>
-            <a:pPr>
-              <a:lnSpc>
-                <a:spcPts val="2286"/>
-              </a:lnSpc>
-              <a:spcBef>
-                <a:spcPts val="0"/>
-              </a:spcBef>
-              <a:spcAft>
-                <a:spcPts val="0"/>
-              </a:spcAft>
-              <a:defRPr sz="1800" b="1">
-                <a:solidFill>
                   <a:srgbClr val="173A42"/>
                 </a:solidFill>
                 <a:latin typeface="DejaVu Sans"/>
               </a:defRPr>
             </a:pPr>
             <a:r>
-              <a:t>Observe</a:t>
-            </a:r>
-          </a:p>
-        </p:txBody>
-      </p:sp>
-      <p:sp>
-        <p:nvSpPr>
-          <p:cNvPr id="9" name="TextBox 8"/>
-          <p:cNvSpPr txBox="1"/>
-          <p:nvPr/>
-        </p:nvSpPr>
-        <p:spPr>
-          <a:xfrm>
-            <a:off x="889000" y="3873500"/>
-            <a:ext cx="1544320" cy="927100"/>
-          </a:xfrm>
-          <a:prstGeom prst="rect">
-            <a:avLst/>
-          </a:prstGeom>
-          <a:noFill/>
-        </p:spPr>
-        <p:txBody>
-          <a:bodyPr wrap="none" lIns="0" rIns="0" tIns="0" bIns="0">
-            <a:spAutoFit/>
-          </a:bodyPr>
-          <a:lstStyle/>
-          <a:p>
-            <a:pPr>
-              <a:lnSpc>
-                <a:spcPts val="1995"/>
-              </a:lnSpc>
-              <a:spcBef>
-                <a:spcPts val="0"/>
-              </a:spcBef>
-              <a:spcAft>
-                <a:spcPts val="0"/>
-              </a:spcAft>
-              <a:defRPr sz="1500" b="0">
-                <a:solidFill>
-                  <a:srgbClr val="173A42"/>
-                </a:solidFill>
-                <a:latin typeface="DejaVu Sans"/>
-              </a:defRPr>
-            </a:pPr>
-            <a:r>
-              <a:t>Initialize from</a:t>
-            </a:r>
-          </a:p>
-          <a:p>
-            <a:pPr>
-              <a:lnSpc>
-                <a:spcPts val="1995"/>
-              </a:lnSpc>
-              <a:spcBef>
-                <a:spcPts val="0"/>
-              </a:spcBef>
-              <a:spcAft>
-                <a:spcPts val="0"/>
-              </a:spcAft>
-              <a:defRPr sz="1500" b="0">
-                <a:solidFill>
-                  <a:srgbClr val="173A42"/>
-                </a:solidFill>
-                <a:latin typeface="DejaVu Sans"/>
-              </a:defRPr>
-            </a:pPr>
-            <a:r>
-              <a:t>public state.</a:t>
-            </a:r>
-          </a:p>
-        </p:txBody>
-      </p:sp>
-      <p:sp>
-        <p:nvSpPr>
-          <p:cNvPr id="10" name="TextBox 9"/>
-          <p:cNvSpPr txBox="1"/>
-          <p:nvPr/>
-        </p:nvSpPr>
-        <p:spPr>
-          <a:xfrm>
-            <a:off x="2712720" y="3594100"/>
-            <a:ext cx="177800" cy="381000"/>
-          </a:xfrm>
-          <a:prstGeom prst="rect">
-            <a:avLst/>
-          </a:prstGeom>
-          <a:noFill/>
-        </p:spPr>
-        <p:txBody>
-          <a:bodyPr wrap="none" lIns="0" rIns="0" tIns="0" bIns="0">
-            <a:spAutoFit/>
-          </a:bodyPr>
-          <a:lstStyle/>
-          <a:p>
-            <a:pPr>
-              <a:lnSpc>
-                <a:spcPts val="3175"/>
-              </a:lnSpc>
-              <a:spcBef>
-                <a:spcPts val="0"/>
-              </a:spcBef>
-              <a:spcAft>
-                <a:spcPts val="0"/>
-              </a:spcAft>
-              <a:defRPr sz="2500" b="1">
-                <a:solidFill>
-                  <a:srgbClr val="008C7B"/>
-                </a:solidFill>
-                <a:latin typeface="DejaVu Sans"/>
-              </a:defRPr>
-            </a:pPr>
-            <a:r>
-              <a:t>›</a:t>
-            </a:r>
-          </a:p>
-        </p:txBody>
-      </p:sp>
-      <p:sp>
-        <p:nvSpPr>
-          <p:cNvPr id="11" name="Rounded Rectangle 10"/>
-          <p:cNvSpPr/>
-          <p:nvPr/>
-        </p:nvSpPr>
-        <p:spPr>
-          <a:xfrm>
-            <a:off x="2877820" y="2349500"/>
-            <a:ext cx="2001520" cy="2565400"/>
-          </a:xfrm>
-          <a:prstGeom prst="roundRect">
-            <a:avLst>
-              <a:gd name="adj" fmla="val 6345"/>
-            </a:avLst>
-          </a:prstGeom>
-          <a:solidFill>
-            <a:srgbClr val="FFFFFF"/>
-          </a:solidFill>
-          <a:ln>
-            <a:noFill/>
-          </a:ln>
-        </p:spPr>
-        <p:style>
-          <a:lnRef idx="1">
-            <a:schemeClr val="accent1"/>
-          </a:lnRef>
-          <a:fillRef idx="3">
-            <a:schemeClr val="accent1"/>
-          </a:fillRef>
-          <a:effectRef idx="2">
-            <a:schemeClr val="accent1"/>
-          </a:effectRef>
-          <a:fontRef idx="minor">
-            <a:schemeClr val="lt1"/>
-          </a:fontRef>
-        </p:style>
-        <p:txBody>
-          <a:bodyPr rtlCol="0" anchor="ctr"/>
-          <a:lstStyle/>
-          <a:p>
-            <a:pPr algn="ctr"/>
-          </a:p>
-        </p:txBody>
-      </p:sp>
-      <p:sp>
-        <p:nvSpPr>
-          <p:cNvPr id="12" name="Rounded Rectangle 11"/>
-          <p:cNvSpPr/>
-          <p:nvPr/>
-        </p:nvSpPr>
-        <p:spPr>
-          <a:xfrm>
-            <a:off x="3106420" y="2603500"/>
-            <a:ext cx="431800" cy="381000"/>
-          </a:xfrm>
-          <a:prstGeom prst="roundRect">
-            <a:avLst>
-              <a:gd name="adj" fmla="val 15000"/>
-            </a:avLst>
-          </a:prstGeom>
-          <a:solidFill>
-            <a:srgbClr val="E8F3ED"/>
-          </a:solidFill>
-          <a:ln>
-            <a:noFill/>
-          </a:ln>
-        </p:spPr>
-        <p:style>
-          <a:lnRef idx="1">
-            <a:schemeClr val="accent1"/>
-          </a:lnRef>
-          <a:fillRef idx="3">
-            <a:schemeClr val="accent1"/>
-          </a:fillRef>
-          <a:effectRef idx="2">
-            <a:schemeClr val="accent1"/>
-          </a:effectRef>
-          <a:fontRef idx="minor">
-            <a:schemeClr val="lt1"/>
-          </a:fontRef>
-        </p:style>
-        <p:txBody>
-          <a:bodyPr rtlCol="0" anchor="ctr"/>
-          <a:lstStyle/>
-          <a:p>
-            <a:pPr algn="ctr"/>
-          </a:p>
-        </p:txBody>
-      </p:sp>
-      <p:sp>
-        <p:nvSpPr>
-          <p:cNvPr id="13" name="TextBox 12"/>
-          <p:cNvSpPr txBox="1"/>
-          <p:nvPr/>
-        </p:nvSpPr>
-        <p:spPr>
-          <a:xfrm>
-            <a:off x="3195320" y="2692400"/>
-            <a:ext cx="330200" cy="228600"/>
-          </a:xfrm>
-          <a:prstGeom prst="rect">
-            <a:avLst/>
-          </a:prstGeom>
-          <a:noFill/>
-        </p:spPr>
-        <p:txBody>
-          <a:bodyPr wrap="none" lIns="0" rIns="0" tIns="0" bIns="0">
-            <a:spAutoFit/>
-          </a:bodyPr>
-          <a:lstStyle/>
-          <a:p>
-            <a:pPr>
-              <a:lnSpc>
-                <a:spcPts val="1524"/>
-              </a:lnSpc>
-              <a:spcBef>
-                <a:spcPts val="0"/>
-              </a:spcBef>
-              <a:spcAft>
-                <a:spcPts val="0"/>
-              </a:spcAft>
-              <a:defRPr sz="1200" b="1">
-                <a:solidFill>
-                  <a:srgbClr val="008C7B"/>
-                </a:solidFill>
-                <a:latin typeface="DejaVu Sans"/>
-              </a:defRPr>
-            </a:pPr>
-            <a:r>
-              <a:t>02</a:t>
-            </a:r>
-          </a:p>
-        </p:txBody>
-      </p:sp>
-      <p:sp>
-        <p:nvSpPr>
-          <p:cNvPr id="14" name="TextBox 13"/>
-          <p:cNvSpPr txBox="1"/>
-          <p:nvPr/>
-        </p:nvSpPr>
-        <p:spPr>
-          <a:xfrm>
-            <a:off x="3106420" y="3314700"/>
-            <a:ext cx="1544320" cy="419100"/>
-          </a:xfrm>
-          <a:prstGeom prst="rect">
-            <a:avLst/>
-          </a:prstGeom>
-          <a:noFill/>
-        </p:spPr>
-        <p:txBody>
-          <a:bodyPr wrap="none" lIns="0" rIns="0" tIns="0" bIns="0">
-            <a:spAutoFit/>
-          </a:bodyPr>
-          <a:lstStyle/>
-          <a:p>
-            <a:pPr>
-              <a:lnSpc>
-                <a:spcPts val="2286"/>
-              </a:lnSpc>
-              <a:spcBef>
-                <a:spcPts val="0"/>
-              </a:spcBef>
-              <a:spcAft>
-                <a:spcPts val="0"/>
-              </a:spcAft>
-              <a:defRPr sz="1800" b="1">
-                <a:solidFill>
-                  <a:srgbClr val="173A42"/>
-                </a:solidFill>
-                <a:latin typeface="DejaVu Sans"/>
-              </a:defRPr>
-            </a:pPr>
-            <a:r>
-              <a:t>Decide</a:t>
-            </a:r>
-          </a:p>
-        </p:txBody>
-      </p:sp>
-      <p:sp>
-        <p:nvSpPr>
-          <p:cNvPr id="15" name="TextBox 14"/>
-          <p:cNvSpPr txBox="1"/>
-          <p:nvPr/>
-        </p:nvSpPr>
-        <p:spPr>
-          <a:xfrm>
-            <a:off x="3106420" y="3873500"/>
-            <a:ext cx="1544320" cy="927100"/>
-          </a:xfrm>
-          <a:prstGeom prst="rect">
-            <a:avLst/>
-          </a:prstGeom>
-          <a:noFill/>
-        </p:spPr>
-        <p:txBody>
-          <a:bodyPr wrap="none" lIns="0" rIns="0" tIns="0" bIns="0">
-            <a:spAutoFit/>
-          </a:bodyPr>
-          <a:lstStyle/>
-          <a:p>
-            <a:pPr>
-              <a:lnSpc>
-                <a:spcPts val="1995"/>
-              </a:lnSpc>
-              <a:spcBef>
-                <a:spcPts val="0"/>
-              </a:spcBef>
-              <a:spcAft>
-                <a:spcPts val="0"/>
-              </a:spcAft>
-              <a:defRPr sz="1500" b="0">
-                <a:solidFill>
-                  <a:srgbClr val="173A42"/>
-                </a:solidFill>
-                <a:latin typeface="DejaVu Sans"/>
-              </a:defRPr>
-            </a:pPr>
-            <a:r>
-              <a:t>Give the policy</a:t>
-            </a:r>
-          </a:p>
-          <a:p>
-            <a:pPr>
-              <a:lnSpc>
-                <a:spcPts val="1995"/>
-              </a:lnSpc>
-              <a:spcBef>
-                <a:spcPts val="0"/>
-              </a:spcBef>
-              <a:spcAft>
-                <a:spcPts val="0"/>
-              </a:spcAft>
-              <a:defRPr sz="1500" b="0">
-                <a:solidFill>
-                  <a:srgbClr val="173A42"/>
-                </a:solidFill>
-                <a:latin typeface="DejaVu Sans"/>
-              </a:defRPr>
-            </a:pPr>
-            <a:r>
-              <a:t>context and</a:t>
-            </a:r>
-          </a:p>
-          <a:p>
-            <a:pPr>
-              <a:lnSpc>
-                <a:spcPts val="1995"/>
-              </a:lnSpc>
-              <a:spcBef>
-                <a:spcPts val="0"/>
-              </a:spcBef>
-              <a:spcAft>
-                <a:spcPts val="0"/>
-              </a:spcAft>
-              <a:defRPr sz="1500" b="0">
-                <a:solidFill>
-                  <a:srgbClr val="173A42"/>
-                </a:solidFill>
-                <a:latin typeface="DejaVu Sans"/>
-              </a:defRPr>
-            </a:pPr>
-            <a:r>
-              <a:t>budgets.</a:t>
-            </a:r>
-          </a:p>
-        </p:txBody>
-      </p:sp>
-      <p:sp>
-        <p:nvSpPr>
-          <p:cNvPr id="16" name="TextBox 15"/>
-          <p:cNvSpPr txBox="1"/>
-          <p:nvPr/>
-        </p:nvSpPr>
-        <p:spPr>
-          <a:xfrm>
-            <a:off x="4930140" y="3594100"/>
-            <a:ext cx="177800" cy="381000"/>
-          </a:xfrm>
-          <a:prstGeom prst="rect">
-            <a:avLst/>
-          </a:prstGeom>
-          <a:noFill/>
-        </p:spPr>
-        <p:txBody>
-          <a:bodyPr wrap="none" lIns="0" rIns="0" tIns="0" bIns="0">
-            <a:spAutoFit/>
-          </a:bodyPr>
-          <a:lstStyle/>
-          <a:p>
-            <a:pPr>
-              <a:lnSpc>
-                <a:spcPts val="3175"/>
-              </a:lnSpc>
-              <a:spcBef>
-                <a:spcPts val="0"/>
-              </a:spcBef>
-              <a:spcAft>
-                <a:spcPts val="0"/>
-              </a:spcAft>
-              <a:defRPr sz="2500" b="1">
-                <a:solidFill>
-                  <a:srgbClr val="008C7B"/>
-                </a:solidFill>
-                <a:latin typeface="DejaVu Sans"/>
-              </a:defRPr>
-            </a:pPr>
-            <a:r>
-              <a:t>›</a:t>
-            </a:r>
-          </a:p>
-        </p:txBody>
-      </p:sp>
-      <p:sp>
-        <p:nvSpPr>
-          <p:cNvPr id="17" name="Rounded Rectangle 16"/>
-          <p:cNvSpPr/>
-          <p:nvPr/>
-        </p:nvSpPr>
-        <p:spPr>
-          <a:xfrm>
-            <a:off x="5095240" y="2349500"/>
-            <a:ext cx="2001520" cy="2565400"/>
-          </a:xfrm>
-          <a:prstGeom prst="roundRect">
-            <a:avLst>
-              <a:gd name="adj" fmla="val 6345"/>
-            </a:avLst>
-          </a:prstGeom>
-          <a:solidFill>
-            <a:srgbClr val="FFFFFF"/>
-          </a:solidFill>
-          <a:ln>
-            <a:noFill/>
-          </a:ln>
-        </p:spPr>
-        <p:style>
-          <a:lnRef idx="1">
-            <a:schemeClr val="accent1"/>
-          </a:lnRef>
-          <a:fillRef idx="3">
-            <a:schemeClr val="accent1"/>
-          </a:fillRef>
-          <a:effectRef idx="2">
-            <a:schemeClr val="accent1"/>
-          </a:effectRef>
-          <a:fontRef idx="minor">
-            <a:schemeClr val="lt1"/>
-          </a:fontRef>
-        </p:style>
-        <p:txBody>
-          <a:bodyPr rtlCol="0" anchor="ctr"/>
-          <a:lstStyle/>
-          <a:p>
-            <a:pPr algn="ctr"/>
-          </a:p>
-        </p:txBody>
-      </p:sp>
-      <p:sp>
-        <p:nvSpPr>
-          <p:cNvPr id="18" name="Rounded Rectangle 17"/>
-          <p:cNvSpPr/>
-          <p:nvPr/>
-        </p:nvSpPr>
-        <p:spPr>
-          <a:xfrm>
-            <a:off x="5323840" y="2603500"/>
-            <a:ext cx="431800" cy="381000"/>
-          </a:xfrm>
-          <a:prstGeom prst="roundRect">
-            <a:avLst>
-              <a:gd name="adj" fmla="val 15000"/>
-            </a:avLst>
-          </a:prstGeom>
-          <a:solidFill>
-            <a:srgbClr val="E8F3ED"/>
-          </a:solidFill>
-          <a:ln>
-            <a:noFill/>
-          </a:ln>
-        </p:spPr>
-        <p:style>
-          <a:lnRef idx="1">
-            <a:schemeClr val="accent1"/>
-          </a:lnRef>
-          <a:fillRef idx="3">
-            <a:schemeClr val="accent1"/>
-          </a:fillRef>
-          <a:effectRef idx="2">
-            <a:schemeClr val="accent1"/>
-          </a:effectRef>
-          <a:fontRef idx="minor">
-            <a:schemeClr val="lt1"/>
-          </a:fontRef>
-        </p:style>
-        <p:txBody>
-          <a:bodyPr rtlCol="0" anchor="ctr"/>
-          <a:lstStyle/>
-          <a:p>
-            <a:pPr algn="ctr"/>
-          </a:p>
-        </p:txBody>
-      </p:sp>
-      <p:sp>
-        <p:nvSpPr>
-          <p:cNvPr id="19" name="TextBox 18"/>
-          <p:cNvSpPr txBox="1"/>
-          <p:nvPr/>
-        </p:nvSpPr>
-        <p:spPr>
-          <a:xfrm>
-            <a:off x="5412740" y="2692400"/>
-            <a:ext cx="330200" cy="228600"/>
-          </a:xfrm>
-          <a:prstGeom prst="rect">
-            <a:avLst/>
-          </a:prstGeom>
-          <a:noFill/>
-        </p:spPr>
-        <p:txBody>
-          <a:bodyPr wrap="none" lIns="0" rIns="0" tIns="0" bIns="0">
-            <a:spAutoFit/>
-          </a:bodyPr>
-          <a:lstStyle/>
-          <a:p>
-            <a:pPr>
-              <a:lnSpc>
-                <a:spcPts val="1524"/>
-              </a:lnSpc>
-              <a:spcBef>
-                <a:spcPts val="0"/>
-              </a:spcBef>
-              <a:spcAft>
-                <a:spcPts val="0"/>
-              </a:spcAft>
-              <a:defRPr sz="1200" b="1">
-                <a:solidFill>
-                  <a:srgbClr val="008C7B"/>
-                </a:solidFill>
-                <a:latin typeface="DejaVu Sans"/>
-              </a:defRPr>
-            </a:pPr>
-            <a:r>
-              <a:t>03</a:t>
-            </a:r>
-          </a:p>
-        </p:txBody>
-      </p:sp>
-      <p:sp>
-        <p:nvSpPr>
-          <p:cNvPr id="20" name="TextBox 19"/>
-          <p:cNvSpPr txBox="1"/>
-          <p:nvPr/>
-        </p:nvSpPr>
-        <p:spPr>
-          <a:xfrm>
-            <a:off x="5323840" y="3314700"/>
-            <a:ext cx="1544320" cy="419100"/>
-          </a:xfrm>
-          <a:prstGeom prst="rect">
-            <a:avLst/>
-          </a:prstGeom>
-          <a:noFill/>
-        </p:spPr>
-        <p:txBody>
-          <a:bodyPr wrap="none" lIns="0" rIns="0" tIns="0" bIns="0">
-            <a:spAutoFit/>
-          </a:bodyPr>
-          <a:lstStyle/>
-          <a:p>
-            <a:pPr>
-              <a:lnSpc>
-                <a:spcPts val="2286"/>
-              </a:lnSpc>
-              <a:spcBef>
-                <a:spcPts val="0"/>
-              </a:spcBef>
-              <a:spcAft>
-                <a:spcPts val="0"/>
-              </a:spcAft>
-              <a:defRPr sz="1800" b="1">
-                <a:solidFill>
-                  <a:srgbClr val="173A42"/>
-                </a:solidFill>
-                <a:latin typeface="DejaVu Sans"/>
-              </a:defRPr>
-            </a:pPr>
-            <a:r>
-              <a:t>Validate</a:t>
-            </a:r>
-          </a:p>
-        </p:txBody>
-      </p:sp>
-      <p:sp>
-        <p:nvSpPr>
-          <p:cNvPr id="21" name="TextBox 20"/>
-          <p:cNvSpPr txBox="1"/>
-          <p:nvPr/>
-        </p:nvSpPr>
-        <p:spPr>
-          <a:xfrm>
-            <a:off x="5323840" y="3873500"/>
-            <a:ext cx="1544320" cy="927100"/>
-          </a:xfrm>
-          <a:prstGeom prst="rect">
-            <a:avLst/>
-          </a:prstGeom>
-          <a:noFill/>
-        </p:spPr>
-        <p:txBody>
-          <a:bodyPr wrap="none" lIns="0" rIns="0" tIns="0" bIns="0">
-            <a:spAutoFit/>
-          </a:bodyPr>
-          <a:lstStyle/>
-          <a:p>
-            <a:pPr>
-              <a:lnSpc>
-                <a:spcPts val="1995"/>
-              </a:lnSpc>
-              <a:spcBef>
-                <a:spcPts val="0"/>
-              </a:spcBef>
-              <a:spcAft>
-                <a:spcPts val="0"/>
-              </a:spcAft>
-              <a:defRPr sz="1500" b="0">
-                <a:solidFill>
-                  <a:srgbClr val="173A42"/>
-                </a:solidFill>
-                <a:latin typeface="DejaVu Sans"/>
-              </a:defRPr>
-            </a:pPr>
-            <a:r>
-              <a:t>Check one</a:t>
-            </a:r>
-          </a:p>
-          <a:p>
-            <a:pPr>
-              <a:lnSpc>
-                <a:spcPts val="1995"/>
-              </a:lnSpc>
-              <a:spcBef>
-                <a:spcPts val="0"/>
-              </a:spcBef>
-              <a:spcAft>
-                <a:spcPts val="0"/>
-              </a:spcAft>
-              <a:defRPr sz="1500" b="0">
-                <a:solidFill>
-                  <a:srgbClr val="173A42"/>
-                </a:solidFill>
-                <a:latin typeface="DejaVu Sans"/>
-              </a:defRPr>
-            </a:pPr>
-            <a:r>
-              <a:t>allowed action</a:t>
-            </a:r>
-          </a:p>
-          <a:p>
-            <a:pPr>
-              <a:lnSpc>
-                <a:spcPts val="1995"/>
-              </a:lnSpc>
-              <a:spcBef>
-                <a:spcPts val="0"/>
-              </a:spcBef>
-              <a:spcAft>
-                <a:spcPts val="0"/>
-              </a:spcAft>
-              <a:defRPr sz="1500" b="0">
-                <a:solidFill>
-                  <a:srgbClr val="173A42"/>
-                </a:solidFill>
-                <a:latin typeface="DejaVu Sans"/>
-              </a:defRPr>
-            </a:pPr>
-            <a:r>
-              <a:t>and payload.</a:t>
-            </a:r>
-          </a:p>
-        </p:txBody>
-      </p:sp>
-      <p:sp>
-        <p:nvSpPr>
-          <p:cNvPr id="22" name="TextBox 21"/>
-          <p:cNvSpPr txBox="1"/>
-          <p:nvPr/>
-        </p:nvSpPr>
-        <p:spPr>
-          <a:xfrm>
-            <a:off x="7147559" y="3594100"/>
-            <a:ext cx="177800" cy="381000"/>
-          </a:xfrm>
-          <a:prstGeom prst="rect">
-            <a:avLst/>
-          </a:prstGeom>
-          <a:noFill/>
-        </p:spPr>
-        <p:txBody>
-          <a:bodyPr wrap="none" lIns="0" rIns="0" tIns="0" bIns="0">
-            <a:spAutoFit/>
-          </a:bodyPr>
-          <a:lstStyle/>
-          <a:p>
-            <a:pPr>
-              <a:lnSpc>
-                <a:spcPts val="3175"/>
-              </a:lnSpc>
-              <a:spcBef>
-                <a:spcPts val="0"/>
-              </a:spcBef>
-              <a:spcAft>
-                <a:spcPts val="0"/>
-              </a:spcAft>
-              <a:defRPr sz="2500" b="1">
-                <a:solidFill>
-                  <a:srgbClr val="008C7B"/>
-                </a:solidFill>
-                <a:latin typeface="DejaVu Sans"/>
-              </a:defRPr>
-            </a:pPr>
-            <a:r>
-              <a:t>›</a:t>
-            </a:r>
-          </a:p>
-        </p:txBody>
-      </p:sp>
-      <p:sp>
-        <p:nvSpPr>
-          <p:cNvPr id="23" name="Rounded Rectangle 22"/>
-          <p:cNvSpPr/>
-          <p:nvPr/>
-        </p:nvSpPr>
-        <p:spPr>
-          <a:xfrm>
-            <a:off x="7312659" y="2349500"/>
-            <a:ext cx="2001520" cy="2565400"/>
-          </a:xfrm>
-          <a:prstGeom prst="roundRect">
-            <a:avLst>
-              <a:gd name="adj" fmla="val 6345"/>
-            </a:avLst>
-          </a:prstGeom>
-          <a:solidFill>
-            <a:srgbClr val="FFFFFF"/>
-          </a:solidFill>
-          <a:ln>
-            <a:noFill/>
-          </a:ln>
-        </p:spPr>
-        <p:style>
-          <a:lnRef idx="1">
-            <a:schemeClr val="accent1"/>
-          </a:lnRef>
-          <a:fillRef idx="3">
-            <a:schemeClr val="accent1"/>
-          </a:fillRef>
-          <a:effectRef idx="2">
-            <a:schemeClr val="accent1"/>
-          </a:effectRef>
-          <a:fontRef idx="minor">
-            <a:schemeClr val="lt1"/>
-          </a:fontRef>
-        </p:style>
-        <p:txBody>
-          <a:bodyPr rtlCol="0" anchor="ctr"/>
-          <a:lstStyle/>
-          <a:p>
-            <a:pPr algn="ctr"/>
-          </a:p>
-        </p:txBody>
-      </p:sp>
-      <p:sp>
-        <p:nvSpPr>
-          <p:cNvPr id="24" name="Rounded Rectangle 23"/>
-          <p:cNvSpPr/>
-          <p:nvPr/>
-        </p:nvSpPr>
-        <p:spPr>
-          <a:xfrm>
-            <a:off x="7541259" y="2603500"/>
-            <a:ext cx="431800" cy="381000"/>
-          </a:xfrm>
-          <a:prstGeom prst="roundRect">
-            <a:avLst>
-              <a:gd name="adj" fmla="val 15000"/>
-            </a:avLst>
-          </a:prstGeom>
-          <a:solidFill>
-            <a:srgbClr val="E8F3ED"/>
-          </a:solidFill>
-          <a:ln>
-            <a:noFill/>
-          </a:ln>
-        </p:spPr>
-        <p:style>
-          <a:lnRef idx="1">
-            <a:schemeClr val="accent1"/>
-          </a:lnRef>
-          <a:fillRef idx="3">
-            <a:schemeClr val="accent1"/>
-          </a:fillRef>
-          <a:effectRef idx="2">
-            <a:schemeClr val="accent1"/>
-          </a:effectRef>
-          <a:fontRef idx="minor">
-            <a:schemeClr val="lt1"/>
-          </a:fontRef>
-        </p:style>
-        <p:txBody>
-          <a:bodyPr rtlCol="0" anchor="ctr"/>
-          <a:lstStyle/>
-          <a:p>
-            <a:pPr algn="ctr"/>
-          </a:p>
-        </p:txBody>
-      </p:sp>
-      <p:sp>
-        <p:nvSpPr>
-          <p:cNvPr id="25" name="TextBox 24"/>
-          <p:cNvSpPr txBox="1"/>
-          <p:nvPr/>
-        </p:nvSpPr>
-        <p:spPr>
-          <a:xfrm>
-            <a:off x="7630159" y="2692400"/>
-            <a:ext cx="330200" cy="228600"/>
-          </a:xfrm>
-          <a:prstGeom prst="rect">
-            <a:avLst/>
-          </a:prstGeom>
-          <a:noFill/>
-        </p:spPr>
-        <p:txBody>
-          <a:bodyPr wrap="none" lIns="0" rIns="0" tIns="0" bIns="0">
-            <a:spAutoFit/>
-          </a:bodyPr>
-          <a:lstStyle/>
-          <a:p>
-            <a:pPr>
-              <a:lnSpc>
-                <a:spcPts val="1524"/>
-              </a:lnSpc>
-              <a:spcBef>
-                <a:spcPts val="0"/>
-              </a:spcBef>
-              <a:spcAft>
-                <a:spcPts val="0"/>
-              </a:spcAft>
-              <a:defRPr sz="1200" b="1">
-                <a:solidFill>
-                  <a:srgbClr val="008C7B"/>
-                </a:solidFill>
-                <a:latin typeface="DejaVu Sans"/>
-              </a:defRPr>
-            </a:pPr>
-            <a:r>
-              <a:t>04</a:t>
-            </a:r>
-          </a:p>
-        </p:txBody>
-      </p:sp>
-      <p:sp>
-        <p:nvSpPr>
-          <p:cNvPr id="26" name="TextBox 25"/>
-          <p:cNvSpPr txBox="1"/>
-          <p:nvPr/>
-        </p:nvSpPr>
-        <p:spPr>
-          <a:xfrm>
-            <a:off x="7541259" y="3314700"/>
-            <a:ext cx="1544320" cy="419100"/>
-          </a:xfrm>
-          <a:prstGeom prst="rect">
-            <a:avLst/>
-          </a:prstGeom>
-          <a:noFill/>
-        </p:spPr>
-        <p:txBody>
-          <a:bodyPr wrap="none" lIns="0" rIns="0" tIns="0" bIns="0">
-            <a:spAutoFit/>
-          </a:bodyPr>
-          <a:lstStyle/>
-          <a:p>
-            <a:pPr>
-              <a:lnSpc>
-                <a:spcPts val="2286"/>
-              </a:lnSpc>
-              <a:spcBef>
-                <a:spcPts val="0"/>
-              </a:spcBef>
-              <a:spcAft>
-                <a:spcPts val="0"/>
-              </a:spcAft>
-              <a:defRPr sz="1800" b="1">
-                <a:solidFill>
-                  <a:srgbClr val="173A42"/>
-                </a:solidFill>
-                <a:latin typeface="DejaVu Sans"/>
-              </a:defRPr>
-            </a:pPr>
-            <a:r>
-              <a:t>Execute</a:t>
-            </a:r>
-          </a:p>
-        </p:txBody>
-      </p:sp>
-      <p:sp>
-        <p:nvSpPr>
-          <p:cNvPr id="27" name="TextBox 26"/>
-          <p:cNvSpPr txBox="1"/>
-          <p:nvPr/>
-        </p:nvSpPr>
-        <p:spPr>
-          <a:xfrm>
-            <a:off x="7541259" y="3873500"/>
-            <a:ext cx="1544320" cy="927100"/>
-          </a:xfrm>
-          <a:prstGeom prst="rect">
-            <a:avLst/>
-          </a:prstGeom>
-          <a:noFill/>
-        </p:spPr>
-        <p:txBody>
-          <a:bodyPr wrap="none" lIns="0" rIns="0" tIns="0" bIns="0">
-            <a:spAutoFit/>
-          </a:bodyPr>
-          <a:lstStyle/>
-          <a:p>
-            <a:pPr>
-              <a:lnSpc>
-                <a:spcPts val="1995"/>
-              </a:lnSpc>
-              <a:spcBef>
-                <a:spcPts val="0"/>
-              </a:spcBef>
-              <a:spcAft>
-                <a:spcPts val="0"/>
-              </a:spcAft>
-              <a:defRPr sz="1500" b="0">
-                <a:solidFill>
-                  <a:srgbClr val="173A42"/>
-                </a:solidFill>
-                <a:latin typeface="DejaVu Sans"/>
-              </a:defRPr>
-            </a:pPr>
-            <a:r>
-              <a:t>Call the API;</a:t>
-            </a:r>
-          </a:p>
-          <a:p>
-            <a:pPr>
-              <a:lnSpc>
-                <a:spcPts val="1995"/>
-              </a:lnSpc>
-              <a:spcBef>
-                <a:spcPts val="0"/>
-              </a:spcBef>
-              <a:spcAft>
-                <a:spcPts val="0"/>
-              </a:spcAft>
-              <a:defRPr sz="1500" b="0">
-                <a:solidFill>
-                  <a:srgbClr val="173A42"/>
-                </a:solidFill>
-                <a:latin typeface="DejaVu Sans"/>
-              </a:defRPr>
-            </a:pPr>
-            <a:r>
-              <a:t>handle the</a:t>
-            </a:r>
-          </a:p>
-          <a:p>
-            <a:pPr>
-              <a:lnSpc>
-                <a:spcPts val="1995"/>
-              </a:lnSpc>
-              <a:spcBef>
-                <a:spcPts val="0"/>
-              </a:spcBef>
-              <a:spcAft>
-                <a:spcPts val="0"/>
-              </a:spcAft>
-              <a:defRPr sz="1500" b="0">
-                <a:solidFill>
-                  <a:srgbClr val="173A42"/>
-                </a:solidFill>
-                <a:latin typeface="DejaVu Sans"/>
-              </a:defRPr>
-            </a:pPr>
-            <a:r>
-              <a:t>outcome.</a:t>
-            </a:r>
-          </a:p>
-        </p:txBody>
-      </p:sp>
-      <p:sp>
-        <p:nvSpPr>
-          <p:cNvPr id="28" name="TextBox 27"/>
-          <p:cNvSpPr txBox="1"/>
-          <p:nvPr/>
-        </p:nvSpPr>
-        <p:spPr>
-          <a:xfrm>
-            <a:off x="9364980" y="3594100"/>
-            <a:ext cx="177800" cy="381000"/>
-          </a:xfrm>
-          <a:prstGeom prst="rect">
-            <a:avLst/>
-          </a:prstGeom>
-          <a:noFill/>
-        </p:spPr>
-        <p:txBody>
-          <a:bodyPr wrap="none" lIns="0" rIns="0" tIns="0" bIns="0">
-            <a:spAutoFit/>
-          </a:bodyPr>
-          <a:lstStyle/>
-          <a:p>
-            <a:pPr>
-              <a:lnSpc>
-                <a:spcPts val="3175"/>
-              </a:lnSpc>
-              <a:spcBef>
-                <a:spcPts val="0"/>
-              </a:spcBef>
-              <a:spcAft>
-                <a:spcPts val="0"/>
-              </a:spcAft>
-              <a:defRPr sz="2500" b="1">
-                <a:solidFill>
-                  <a:srgbClr val="008C7B"/>
-                </a:solidFill>
-                <a:latin typeface="DejaVu Sans"/>
-              </a:defRPr>
-            </a:pPr>
-            <a:r>
-              <a:t>›</a:t>
-            </a:r>
-          </a:p>
-        </p:txBody>
-      </p:sp>
-      <p:sp>
-        <p:nvSpPr>
-          <p:cNvPr id="29" name="Rounded Rectangle 28"/>
-          <p:cNvSpPr/>
-          <p:nvPr/>
-        </p:nvSpPr>
-        <p:spPr>
-          <a:xfrm>
-            <a:off x="9530080" y="2349500"/>
-            <a:ext cx="2001520" cy="2565400"/>
-          </a:xfrm>
-          <a:prstGeom prst="roundRect">
-            <a:avLst>
-              <a:gd name="adj" fmla="val 6345"/>
-            </a:avLst>
-          </a:prstGeom>
-          <a:solidFill>
-            <a:srgbClr val="FFFFFF"/>
-          </a:solidFill>
-          <a:ln>
-            <a:noFill/>
-          </a:ln>
-        </p:spPr>
-        <p:style>
-          <a:lnRef idx="1">
-            <a:schemeClr val="accent1"/>
-          </a:lnRef>
-          <a:fillRef idx="3">
-            <a:schemeClr val="accent1"/>
-          </a:fillRef>
-          <a:effectRef idx="2">
-            <a:schemeClr val="accent1"/>
-          </a:effectRef>
-          <a:fontRef idx="minor">
-            <a:schemeClr val="lt1"/>
-          </a:fontRef>
-        </p:style>
-        <p:txBody>
-          <a:bodyPr rtlCol="0" anchor="ctr"/>
-          <a:lstStyle/>
-          <a:p>
-            <a:pPr algn="ctr"/>
-          </a:p>
-        </p:txBody>
-      </p:sp>
-      <p:sp>
-        <p:nvSpPr>
-          <p:cNvPr id="30" name="Rounded Rectangle 29"/>
-          <p:cNvSpPr/>
-          <p:nvPr/>
-        </p:nvSpPr>
-        <p:spPr>
-          <a:xfrm>
-            <a:off x="9758680" y="2603500"/>
-            <a:ext cx="431800" cy="381000"/>
-          </a:xfrm>
-          <a:prstGeom prst="roundRect">
-            <a:avLst>
-              <a:gd name="adj" fmla="val 15000"/>
-            </a:avLst>
-          </a:prstGeom>
-          <a:solidFill>
-            <a:srgbClr val="E8F3ED"/>
-          </a:solidFill>
-          <a:ln>
-            <a:noFill/>
-          </a:ln>
-        </p:spPr>
-        <p:style>
-          <a:lnRef idx="1">
-            <a:schemeClr val="accent1"/>
-          </a:lnRef>
-          <a:fillRef idx="3">
-            <a:schemeClr val="accent1"/>
-          </a:fillRef>
-          <a:effectRef idx="2">
-            <a:schemeClr val="accent1"/>
-          </a:effectRef>
-          <a:fontRef idx="minor">
-            <a:schemeClr val="lt1"/>
-          </a:fontRef>
-        </p:style>
-        <p:txBody>
-          <a:bodyPr rtlCol="0" anchor="ctr"/>
-          <a:lstStyle/>
-          <a:p>
-            <a:pPr algn="ctr"/>
-          </a:p>
-        </p:txBody>
-      </p:sp>
-      <p:sp>
-        <p:nvSpPr>
-          <p:cNvPr id="31" name="TextBox 30"/>
-          <p:cNvSpPr txBox="1"/>
-          <p:nvPr/>
-        </p:nvSpPr>
-        <p:spPr>
-          <a:xfrm>
-            <a:off x="9847580" y="2692400"/>
-            <a:ext cx="330200" cy="228600"/>
-          </a:xfrm>
-          <a:prstGeom prst="rect">
-            <a:avLst/>
-          </a:prstGeom>
-          <a:noFill/>
-        </p:spPr>
-        <p:txBody>
-          <a:bodyPr wrap="none" lIns="0" rIns="0" tIns="0" bIns="0">
-            <a:spAutoFit/>
-          </a:bodyPr>
-          <a:lstStyle/>
-          <a:p>
-            <a:pPr>
-              <a:lnSpc>
-                <a:spcPts val="1524"/>
-              </a:lnSpc>
-              <a:spcBef>
-                <a:spcPts val="0"/>
-              </a:spcBef>
-              <a:spcAft>
-                <a:spcPts val="0"/>
-              </a:spcAft>
-              <a:defRPr sz="1200" b="1">
-                <a:solidFill>
-                  <a:srgbClr val="008C7B"/>
-                </a:solidFill>
-                <a:latin typeface="DejaVu Sans"/>
-              </a:defRPr>
-            </a:pPr>
-            <a:r>
-              <a:t>05</a:t>
-            </a:r>
-          </a:p>
-        </p:txBody>
-      </p:sp>
-      <p:sp>
-        <p:nvSpPr>
-          <p:cNvPr id="32" name="TextBox 31"/>
-          <p:cNvSpPr txBox="1"/>
-          <p:nvPr/>
-        </p:nvSpPr>
-        <p:spPr>
-          <a:xfrm>
-            <a:off x="9758680" y="3314700"/>
-            <a:ext cx="1544320" cy="419100"/>
-          </a:xfrm>
-          <a:prstGeom prst="rect">
-            <a:avLst/>
-          </a:prstGeom>
-          <a:noFill/>
-        </p:spPr>
-        <p:txBody>
-          <a:bodyPr wrap="none" lIns="0" rIns="0" tIns="0" bIns="0">
-            <a:spAutoFit/>
-          </a:bodyPr>
-          <a:lstStyle/>
-          <a:p>
-            <a:pPr>
-              <a:lnSpc>
-                <a:spcPts val="2286"/>
-              </a:lnSpc>
-              <a:spcBef>
-                <a:spcPts val="0"/>
-              </a:spcBef>
-              <a:spcAft>
-                <a:spcPts val="0"/>
-              </a:spcAft>
-              <a:defRPr sz="1800" b="1">
-                <a:solidFill>
-                  <a:srgbClr val="173A42"/>
-                </a:solidFill>
-                <a:latin typeface="DejaVu Sans"/>
-              </a:defRPr>
-            </a:pPr>
-            <a:r>
-              <a:t>Remember</a:t>
-            </a:r>
-          </a:p>
-        </p:txBody>
-      </p:sp>
-      <p:sp>
-        <p:nvSpPr>
-          <p:cNvPr id="33" name="TextBox 32"/>
-          <p:cNvSpPr txBox="1"/>
-          <p:nvPr/>
-        </p:nvSpPr>
-        <p:spPr>
-          <a:xfrm>
-            <a:off x="9758680" y="3873500"/>
-            <a:ext cx="1544320" cy="927100"/>
-          </a:xfrm>
-          <a:prstGeom prst="rect">
-            <a:avLst/>
-          </a:prstGeom>
-          <a:noFill/>
-        </p:spPr>
-        <p:txBody>
-          <a:bodyPr wrap="none" lIns="0" rIns="0" tIns="0" bIns="0">
-            <a:spAutoFit/>
-          </a:bodyPr>
-          <a:lstStyle/>
-          <a:p>
-            <a:pPr>
-              <a:lnSpc>
-                <a:spcPts val="1995"/>
-              </a:lnSpc>
-              <a:spcBef>
-                <a:spcPts val="0"/>
-              </a:spcBef>
-              <a:spcAft>
-                <a:spcPts val="0"/>
-              </a:spcAft>
-              <a:defRPr sz="1500" b="0">
-                <a:solidFill>
-                  <a:srgbClr val="173A42"/>
-                </a:solidFill>
-                <a:latin typeface="DejaVu Sans"/>
-              </a:defRPr>
-            </a:pPr>
-            <a:r>
-              <a:t>Log, update</a:t>
-            </a:r>
-          </a:p>
-          <a:p>
-            <a:pPr>
-              <a:lnSpc>
-                <a:spcPts val="1995"/>
-              </a:lnSpc>
-              <a:spcBef>
-                <a:spcPts val="0"/>
-              </a:spcBef>
-              <a:spcAft>
-                <a:spcPts val="0"/>
-              </a:spcAft>
-              <a:defRPr sz="1500" b="0">
-                <a:solidFill>
-                  <a:srgbClr val="173A42"/>
-                </a:solidFill>
-                <a:latin typeface="DejaVu Sans"/>
-              </a:defRPr>
-            </a:pPr>
-            <a:r>
-              <a:t>state, and</a:t>
-            </a:r>
-          </a:p>
-          <a:p>
-            <a:pPr>
-              <a:lnSpc>
-                <a:spcPts val="1995"/>
-              </a:lnSpc>
-              <a:spcBef>
-                <a:spcPts val="0"/>
-              </a:spcBef>
-              <a:spcAft>
-                <a:spcPts val="0"/>
-              </a:spcAft>
-              <a:defRPr sz="1500" b="0">
-                <a:solidFill>
-                  <a:srgbClr val="173A42"/>
-                </a:solidFill>
-                <a:latin typeface="DejaVu Sans"/>
-              </a:defRPr>
-            </a:pPr>
-            <a:r>
-              <a:t>check limits.</a:t>
+              <a:t>These are bounded starter heuristics. Profitability gains remain unproven.</a:t>
             </a:r>
           </a:p>
         </p:txBody>
       </p:sp>
       <p:cxnSp>
         <p:nvCxnSpPr>
-          <p:cNvPr id="34" name="Connector 33"/>
+          <p:cNvPr id="29" name="Connector 28"/>
           <p:cNvCxnSpPr/>
           <p:nvPr/>
         </p:nvCxnSpPr>
         <p:spPr>
           <a:xfrm>
-            <a:off x="965200" y="5295900"/>
-            <a:ext cx="2336800" cy="0"/>
+            <a:off x="660400" y="6565900"/>
+            <a:ext cx="10871200" cy="0"/>
           </a:xfrm>
           <a:prstGeom prst="line">
             <a:avLst/>
           </a:prstGeom>
-          <a:ln w="25400">
+          <a:ln w="8255">
             <a:solidFill>
-              <a:srgbClr val="008C7B"/>
+              <a:srgbClr val="DCE6E2"/>
             </a:solidFill>
           </a:ln>
         </p:spPr>
@@ -11173,51 +10790,16 @@
           </a:fontRef>
         </p:style>
       </p:cxnSp>
-      <p:cxnSp>
-        <p:nvCxnSpPr>
-          <p:cNvPr id="35" name="Connector 34"/>
-          <p:cNvCxnSpPr/>
-          <p:nvPr/>
-        </p:nvCxnSpPr>
-        <p:spPr>
-          <a:xfrm>
-            <a:off x="8953500" y="5295900"/>
-            <a:ext cx="2273300" cy="0"/>
-          </a:xfrm>
-          <a:prstGeom prst="line">
-            <a:avLst/>
-          </a:prstGeom>
-          <a:ln w="25400">
-            <a:solidFill>
-              <a:srgbClr val="008C7B"/>
-            </a:solidFill>
-          </a:ln>
-        </p:spPr>
-        <p:style>
-          <a:lnRef idx="2">
-            <a:schemeClr val="accent1"/>
-          </a:lnRef>
-          <a:fillRef idx="0">
-            <a:schemeClr val="accent1"/>
-          </a:fillRef>
-          <a:effectRef idx="1">
-            <a:schemeClr val="accent1"/>
-          </a:effectRef>
-          <a:fontRef idx="minor">
-            <a:schemeClr val="tx1"/>
-          </a:fontRef>
-        </p:style>
-      </p:cxnSp>
-      <p:sp>
-        <p:nvSpPr>
-          <p:cNvPr id="36" name="TextBox 35"/>
+      <p:sp>
+        <p:nvSpPr>
+          <p:cNvPr id="30" name="TextBox 29"/>
           <p:cNvSpPr txBox="1"/>
           <p:nvPr/>
         </p:nvSpPr>
         <p:spPr>
           <a:xfrm>
-            <a:off x="3492500" y="5105400"/>
-            <a:ext cx="5334000" cy="406400"/>
+            <a:off x="660400" y="6654800"/>
+            <a:ext cx="8509000" cy="127000"/>
           </a:xfrm>
           <a:prstGeom prst="rect">
             <a:avLst/>
@@ -11232,176 +10814,6 @@
           <a:p>
             <a:pPr>
               <a:lnSpc>
-                <a:spcPts val="1905"/>
-              </a:lnSpc>
-              <a:spcBef>
-                <a:spcPts val="0"/>
-              </a:spcBef>
-              <a:spcAft>
-                <a:spcPts val="0"/>
-              </a:spcAft>
-              <a:defRPr sz="1500" b="1">
-                <a:solidFill>
-                  <a:srgbClr val="008C7B"/>
-                </a:solidFill>
-                <a:latin typeface="DejaVu Sans"/>
-              </a:defRPr>
-            </a:pPr>
-            <a:r>
-              <a:t>Repeat while running and within budget</a:t>
-            </a:r>
-          </a:p>
-        </p:txBody>
-      </p:sp>
-      <p:sp>
-        <p:nvSpPr>
-          <p:cNvPr id="37" name="Rounded Rectangle 36"/>
-          <p:cNvSpPr/>
-          <p:nvPr/>
-        </p:nvSpPr>
-        <p:spPr>
-          <a:xfrm>
-            <a:off x="660400" y="5842000"/>
-            <a:ext cx="10871200" cy="546100"/>
-          </a:xfrm>
-          <a:prstGeom prst="roundRect">
-            <a:avLst>
-              <a:gd name="adj" fmla="val 15000"/>
-            </a:avLst>
-          </a:prstGeom>
-          <a:solidFill>
-            <a:srgbClr val="E8F3ED"/>
-          </a:solidFill>
-          <a:ln>
-            <a:noFill/>
-          </a:ln>
-        </p:spPr>
-        <p:style>
-          <a:lnRef idx="1">
-            <a:schemeClr val="accent1"/>
-          </a:lnRef>
-          <a:fillRef idx="3">
-            <a:schemeClr val="accent1"/>
-          </a:fillRef>
-          <a:effectRef idx="2">
-            <a:schemeClr val="accent1"/>
-          </a:effectRef>
-          <a:fontRef idx="minor">
-            <a:schemeClr val="lt1"/>
-          </a:fontRef>
-        </p:style>
-        <p:txBody>
-          <a:bodyPr rtlCol="0" anchor="ctr"/>
-          <a:lstStyle/>
-          <a:p>
-            <a:pPr algn="ctr"/>
-          </a:p>
-        </p:txBody>
-      </p:sp>
-      <p:sp>
-        <p:nvSpPr>
-          <p:cNvPr id="38" name="TextBox 37"/>
-          <p:cNvSpPr txBox="1"/>
-          <p:nvPr/>
-        </p:nvSpPr>
-        <p:spPr>
-          <a:xfrm>
-            <a:off x="838200" y="5994400"/>
-            <a:ext cx="10502900" cy="355600"/>
-          </a:xfrm>
-          <a:prstGeom prst="rect">
-            <a:avLst/>
-          </a:prstGeom>
-          <a:noFill/>
-        </p:spPr>
-        <p:txBody>
-          <a:bodyPr wrap="none" lIns="0" rIns="0" tIns="0" bIns="0">
-            <a:spAutoFit/>
-          </a:bodyPr>
-          <a:lstStyle/>
-          <a:p>
-            <a:pPr>
-              <a:lnSpc>
-                <a:spcPts val="1380"/>
-              </a:lnSpc>
-              <a:spcBef>
-                <a:spcPts val="0"/>
-              </a:spcBef>
-              <a:spcAft>
-                <a:spcPts val="0"/>
-              </a:spcAft>
-              <a:defRPr sz="1200" b="1">
-                <a:solidFill>
-                  <a:srgbClr val="173A42"/>
-                </a:solidFill>
-                <a:latin typeface="DejaVu Sans"/>
-              </a:defRPr>
-            </a:pPr>
-            <a:r>
-              <a:t>Preserve instructions, useful discoveries, and recent action/result pairs.</a:t>
-            </a:r>
-          </a:p>
-        </p:txBody>
-      </p:sp>
-      <p:cxnSp>
-        <p:nvCxnSpPr>
-          <p:cNvPr id="39" name="Connector 38"/>
-          <p:cNvCxnSpPr/>
-          <p:nvPr/>
-        </p:nvCxnSpPr>
-        <p:spPr>
-          <a:xfrm>
-            <a:off x="660400" y="6565900"/>
-            <a:ext cx="10871200" cy="0"/>
-          </a:xfrm>
-          <a:prstGeom prst="line">
-            <a:avLst/>
-          </a:prstGeom>
-          <a:ln w="8255">
-            <a:solidFill>
-              <a:srgbClr val="DCE6E2"/>
-            </a:solidFill>
-          </a:ln>
-        </p:spPr>
-        <p:style>
-          <a:lnRef idx="2">
-            <a:schemeClr val="accent1"/>
-          </a:lnRef>
-          <a:fillRef idx="0">
-            <a:schemeClr val="accent1"/>
-          </a:fillRef>
-          <a:effectRef idx="1">
-            <a:schemeClr val="accent1"/>
-          </a:effectRef>
-          <a:fontRef idx="minor">
-            <a:schemeClr val="tx1"/>
-          </a:fontRef>
-        </p:style>
-      </p:cxnSp>
-      <p:sp>
-        <p:nvSpPr>
-          <p:cNvPr id="40" name="TextBox 39"/>
-          <p:cNvSpPr txBox="1"/>
-          <p:nvPr/>
-        </p:nvSpPr>
-        <p:spPr>
-          <a:xfrm>
-            <a:off x="660400" y="6654800"/>
-            <a:ext cx="8509000" cy="127000"/>
-          </a:xfrm>
-          <a:prstGeom prst="rect">
-            <a:avLst/>
-          </a:prstGeom>
-          <a:noFill/>
-        </p:spPr>
-        <p:txBody>
-          <a:bodyPr wrap="none" lIns="0" rIns="0" tIns="0" bIns="0">
-            <a:spAutoFit/>
-          </a:bodyPr>
-          <a:lstStyle/>
-          <a:p>
-            <a:pPr>
-              <a:lnSpc>
                 <a:spcPts val="952"/>
               </a:lnSpc>
               <a:spcBef>
@@ -11425,7 +10837,7 @@
       </p:sp>
       <p:sp>
         <p:nvSpPr>
-          <p:cNvPr id="41" name="TextBox 40"/>
+          <p:cNvPr id="31" name="TextBox 30"/>
           <p:cNvSpPr txBox="1"/>
           <p:nvPr/>
         </p:nvSpPr>
@@ -11614,29 +11026,7 @@
               </a:defRPr>
             </a:pPr>
             <a:r>
-              <a:t>The starter skill and graph guard keep the</a:t>
-            </a:r>
-          </a:p>
-          <a:p>
-            <a:pPr>
-              <a:lnSpc>
-                <a:spcPts val="3596"/>
-              </a:lnSpc>
-              <a:spcBef>
-                <a:spcPts val="0"/>
-              </a:spcBef>
-              <a:spcAft>
-                <a:spcPts val="0"/>
-              </a:spcAft>
-              <a:defRPr sz="3100" b="1">
-                <a:solidFill>
-                  <a:srgbClr val="173A42"/>
-                </a:solidFill>
-                <a:latin typeface="DejaVu Sans"/>
-              </a:defRPr>
-            </a:pPr>
-            <a:r>
-              <a:t>agent on the public path.</a:t>
+              <a:t>One tool. A controlled daily loop.</a:t>
             </a:r>
           </a:p>
         </p:txBody>
@@ -11771,7 +11161,7 @@
               </a:defRPr>
             </a:pPr>
             <a:r>
-              <a:t>Starting skill and guarded control flow</a:t>
+              <a:t>Structured vending tool · *refresh when required</a:t>
             </a:r>
           </a:p>
         </p:txBody>
@@ -11816,7 +11206,7 @@
               </a:defRPr>
             </a:pPr>
             <a:r>
-              <a:t>What participants should know</a:t>
+              <a:t>Enforced by the extension</a:t>
             </a:r>
           </a:p>
         </p:txBody>
@@ -11829,13 +11219,13 @@
         </p:nvCxnSpPr>
         <p:spPr>
           <a:xfrm>
-            <a:off x="2692400" y="3530600"/>
-            <a:ext cx="304800" cy="0"/>
+            <a:off x="2565400" y="3175000"/>
+            <a:ext cx="203200" cy="0"/>
           </a:xfrm>
           <a:prstGeom prst="line">
             <a:avLst/>
           </a:prstGeom>
-          <a:ln w="22860">
+          <a:ln w="19050">
             <a:solidFill>
               <a:srgbClr val="008C7B"/>
             </a:solidFill>
@@ -11863,14 +11253,14 @@
           <p:nvPr/>
         </p:nvCxnSpPr>
         <p:spPr>
-          <a:xfrm>
-            <a:off x="4978400" y="3530600"/>
-            <a:ext cx="304800" cy="0"/>
+          <a:xfrm flipH="1">
+            <a:off x="2701728" y="3175000"/>
+            <a:ext cx="66872" cy="36532"/>
           </a:xfrm>
           <a:prstGeom prst="line">
             <a:avLst/>
           </a:prstGeom>
-          <a:ln w="22860">
+          <a:ln w="19050">
             <a:solidFill>
               <a:srgbClr val="008C7B"/>
             </a:solidFill>
@@ -11898,14 +11288,14 @@
           <p:nvPr/>
         </p:nvCxnSpPr>
         <p:spPr>
-          <a:xfrm>
-            <a:off x="6908800" y="3530600"/>
-            <a:ext cx="304800" cy="0"/>
+          <a:xfrm flipH="1" flipV="1">
+            <a:off x="2701728" y="3138467"/>
+            <a:ext cx="66872" cy="36533"/>
           </a:xfrm>
           <a:prstGeom prst="line">
             <a:avLst/>
           </a:prstGeom>
-          <a:ln w="22860">
+          <a:ln w="19050">
             <a:solidFill>
               <a:srgbClr val="008C7B"/>
             </a:solidFill>
@@ -11933,14 +11323,14 @@
           <p:nvPr/>
         </p:nvCxnSpPr>
         <p:spPr>
-          <a:xfrm flipH="1">
-            <a:off x="4191000" y="3530600"/>
-            <a:ext cx="3022600" cy="1270000"/>
+          <a:xfrm>
+            <a:off x="4445000" y="3175000"/>
+            <a:ext cx="203200" cy="0"/>
           </a:xfrm>
           <a:prstGeom prst="line">
             <a:avLst/>
           </a:prstGeom>
-          <a:ln w="22860">
+          <a:ln w="19050">
             <a:solidFill>
               <a:srgbClr val="008C7B"/>
             </a:solidFill>
@@ -11968,16 +11358,16 @@
           <p:nvPr/>
         </p:nvCxnSpPr>
         <p:spPr>
-          <a:xfrm>
-            <a:off x="4191000" y="4800600"/>
-            <a:ext cx="381000" cy="0"/>
+          <a:xfrm flipH="1">
+            <a:off x="4581328" y="3175000"/>
+            <a:ext cx="66872" cy="36532"/>
           </a:xfrm>
           <a:prstGeom prst="line">
             <a:avLst/>
           </a:prstGeom>
-          <a:ln w="15240">
+          <a:ln w="19050">
             <a:solidFill>
-              <a:srgbClr val="DCE6E2"/>
+              <a:srgbClr val="008C7B"/>
             </a:solidFill>
           </a:ln>
         </p:spPr>
@@ -12003,16 +11393,16 @@
           <p:nvPr/>
         </p:nvCxnSpPr>
         <p:spPr>
-          <a:xfrm>
-            <a:off x="6604000" y="4800600"/>
-            <a:ext cx="330200" cy="0"/>
+          <a:xfrm flipH="1" flipV="1">
+            <a:off x="4581328" y="3138467"/>
+            <a:ext cx="66872" cy="36533"/>
           </a:xfrm>
           <a:prstGeom prst="line">
             <a:avLst/>
           </a:prstGeom>
-          <a:ln w="15240">
+          <a:ln w="19050">
             <a:solidFill>
-              <a:srgbClr val="DCE6E2"/>
+              <a:srgbClr val="008C7B"/>
             </a:solidFill>
           </a:ln>
         </p:spPr>
@@ -12038,16 +11428,16 @@
           <p:nvPr/>
         </p:nvCxnSpPr>
         <p:spPr>
-          <a:xfrm flipH="1">
-            <a:off x="4826000" y="4800600"/>
-            <a:ext cx="2108200" cy="304800"/>
+          <a:xfrm>
+            <a:off x="6324600" y="3175000"/>
+            <a:ext cx="203200" cy="0"/>
           </a:xfrm>
           <a:prstGeom prst="line">
             <a:avLst/>
           </a:prstGeom>
-          <a:ln w="15240">
+          <a:ln w="19050">
             <a:solidFill>
-              <a:srgbClr val="DCE6E2"/>
+              <a:srgbClr val="008C7B"/>
             </a:solidFill>
           </a:ln>
         </p:spPr>
@@ -12073,16 +11463,16 @@
           <p:nvPr/>
         </p:nvCxnSpPr>
         <p:spPr>
-          <a:xfrm>
-            <a:off x="4826000" y="5105400"/>
-            <a:ext cx="355600" cy="0"/>
+          <a:xfrm flipH="1">
+            <a:off x="6460928" y="3175000"/>
+            <a:ext cx="66872" cy="36532"/>
           </a:xfrm>
           <a:prstGeom prst="line">
             <a:avLst/>
           </a:prstGeom>
-          <a:ln w="15240">
+          <a:ln w="19050">
             <a:solidFill>
-              <a:srgbClr val="DCE6E2"/>
+              <a:srgbClr val="008C7B"/>
             </a:solidFill>
           </a:ln>
         </p:spPr>
@@ -12109,13 +11499,13 @@
         </p:nvCxnSpPr>
         <p:spPr>
           <a:xfrm flipH="1" flipV="1">
-            <a:off x="4191000" y="4800600"/>
-            <a:ext cx="990600" cy="304800"/>
+            <a:off x="6460928" y="3138467"/>
+            <a:ext cx="66872" cy="36533"/>
           </a:xfrm>
           <a:prstGeom prst="line">
             <a:avLst/>
           </a:prstGeom>
-          <a:ln w="22860">
+          <a:ln w="19050">
             <a:solidFill>
               <a:srgbClr val="008C7B"/>
             </a:solidFill>
@@ -12144,13 +11534,13 @@
         </p:nvCxnSpPr>
         <p:spPr>
           <a:xfrm>
-            <a:off x="7416800" y="5105400"/>
-            <a:ext cx="228600" cy="0"/>
+            <a:off x="7366000" y="3556000"/>
+            <a:ext cx="0" cy="457200"/>
           </a:xfrm>
           <a:prstGeom prst="line">
             <a:avLst/>
           </a:prstGeom>
-          <a:ln w="22860">
+          <a:ln w="19050">
             <a:solidFill>
               <a:srgbClr val="008C7B"/>
             </a:solidFill>
@@ -12178,16 +11568,16 @@
           <p:nvPr/>
         </p:nvCxnSpPr>
         <p:spPr>
-          <a:xfrm flipH="1">
-            <a:off x="2717800" y="4800600"/>
-            <a:ext cx="1854200" cy="254000"/>
+          <a:xfrm flipH="1" flipV="1">
+            <a:off x="7329467" y="3946328"/>
+            <a:ext cx="36533" cy="66872"/>
           </a:xfrm>
           <a:prstGeom prst="line">
             <a:avLst/>
           </a:prstGeom>
-          <a:ln w="22860">
+          <a:ln w="19050">
             <a:solidFill>
-              <a:srgbClr val="5E8DCD"/>
+              <a:srgbClr val="008C7B"/>
             </a:solidFill>
           </a:ln>
         </p:spPr>
@@ -12214,15 +11604,15 @@
         </p:nvCxnSpPr>
         <p:spPr>
           <a:xfrm flipV="1">
-            <a:off x="2717800" y="3530600"/>
-            <a:ext cx="4495800" cy="1524000"/>
+            <a:off x="7366000" y="3946328"/>
+            <a:ext cx="36532" cy="66872"/>
           </a:xfrm>
           <a:prstGeom prst="line">
             <a:avLst/>
           </a:prstGeom>
-          <a:ln w="22860">
+          <a:ln w="19050">
             <a:solidFill>
-              <a:srgbClr val="5E8DCD"/>
+              <a:srgbClr val="008C7B"/>
             </a:solidFill>
           </a:ln>
         </p:spPr>
@@ -12241,156 +11631,510 @@
           </a:fontRef>
         </p:style>
       </p:cxnSp>
-      <p:sp>
-        <p:nvSpPr>
-          <p:cNvPr id="21" name="Rounded Rectangle 20"/>
+      <p:cxnSp>
+        <p:nvCxnSpPr>
+          <p:cNvPr id="21" name="Connector 20"/>
+          <p:cNvCxnSpPr/>
+          <p:nvPr/>
+        </p:nvCxnSpPr>
+        <p:spPr>
+          <a:xfrm flipH="1">
+            <a:off x="6324600" y="4394200"/>
+            <a:ext cx="203200" cy="0"/>
+          </a:xfrm>
+          <a:prstGeom prst="line">
+            <a:avLst/>
+          </a:prstGeom>
+          <a:ln w="19050">
+            <a:solidFill>
+              <a:srgbClr val="008C7B"/>
+            </a:solidFill>
+          </a:ln>
+        </p:spPr>
+        <p:style>
+          <a:lnRef idx="2">
+            <a:schemeClr val="accent1"/>
+          </a:lnRef>
+          <a:fillRef idx="0">
+            <a:schemeClr val="accent1"/>
+          </a:fillRef>
+          <a:effectRef idx="1">
+            <a:schemeClr val="accent1"/>
+          </a:effectRef>
+          <a:fontRef idx="minor">
+            <a:schemeClr val="tx1"/>
+          </a:fontRef>
+        </p:style>
+      </p:cxnSp>
+      <p:cxnSp>
+        <p:nvCxnSpPr>
+          <p:cNvPr id="22" name="Connector 21"/>
+          <p:cNvCxnSpPr/>
+          <p:nvPr/>
+        </p:nvCxnSpPr>
+        <p:spPr>
+          <a:xfrm flipV="1">
+            <a:off x="6324600" y="4357667"/>
+            <a:ext cx="66871" cy="36533"/>
+          </a:xfrm>
+          <a:prstGeom prst="line">
+            <a:avLst/>
+          </a:prstGeom>
+          <a:ln w="19050">
+            <a:solidFill>
+              <a:srgbClr val="008C7B"/>
+            </a:solidFill>
+          </a:ln>
+        </p:spPr>
+        <p:style>
+          <a:lnRef idx="2">
+            <a:schemeClr val="accent1"/>
+          </a:lnRef>
+          <a:fillRef idx="0">
+            <a:schemeClr val="accent1"/>
+          </a:fillRef>
+          <a:effectRef idx="1">
+            <a:schemeClr val="accent1"/>
+          </a:effectRef>
+          <a:fontRef idx="minor">
+            <a:schemeClr val="tx1"/>
+          </a:fontRef>
+        </p:style>
+      </p:cxnSp>
+      <p:cxnSp>
+        <p:nvCxnSpPr>
+          <p:cNvPr id="23" name="Connector 22"/>
+          <p:cNvCxnSpPr/>
+          <p:nvPr/>
+        </p:nvCxnSpPr>
+        <p:spPr>
+          <a:xfrm>
+            <a:off x="6324600" y="4394200"/>
+            <a:ext cx="66871" cy="36532"/>
+          </a:xfrm>
+          <a:prstGeom prst="line">
+            <a:avLst/>
+          </a:prstGeom>
+          <a:ln w="19050">
+            <a:solidFill>
+              <a:srgbClr val="008C7B"/>
+            </a:solidFill>
+          </a:ln>
+        </p:spPr>
+        <p:style>
+          <a:lnRef idx="2">
+            <a:schemeClr val="accent1"/>
+          </a:lnRef>
+          <a:fillRef idx="0">
+            <a:schemeClr val="accent1"/>
+          </a:fillRef>
+          <a:effectRef idx="1">
+            <a:schemeClr val="accent1"/>
+          </a:effectRef>
+          <a:fontRef idx="minor">
+            <a:schemeClr val="tx1"/>
+          </a:fontRef>
+        </p:style>
+      </p:cxnSp>
+      <p:cxnSp>
+        <p:nvCxnSpPr>
+          <p:cNvPr id="24" name="Connector 23"/>
+          <p:cNvCxnSpPr/>
+          <p:nvPr/>
+        </p:nvCxnSpPr>
+        <p:spPr>
+          <a:xfrm flipH="1">
+            <a:off x="4445000" y="4394200"/>
+            <a:ext cx="203200" cy="0"/>
+          </a:xfrm>
+          <a:prstGeom prst="line">
+            <a:avLst/>
+          </a:prstGeom>
+          <a:ln w="19050">
+            <a:solidFill>
+              <a:srgbClr val="008C7B"/>
+            </a:solidFill>
+          </a:ln>
+        </p:spPr>
+        <p:style>
+          <a:lnRef idx="2">
+            <a:schemeClr val="accent1"/>
+          </a:lnRef>
+          <a:fillRef idx="0">
+            <a:schemeClr val="accent1"/>
+          </a:fillRef>
+          <a:effectRef idx="1">
+            <a:schemeClr val="accent1"/>
+          </a:effectRef>
+          <a:fontRef idx="minor">
+            <a:schemeClr val="tx1"/>
+          </a:fontRef>
+        </p:style>
+      </p:cxnSp>
+      <p:cxnSp>
+        <p:nvCxnSpPr>
+          <p:cNvPr id="25" name="Connector 24"/>
+          <p:cNvCxnSpPr/>
+          <p:nvPr/>
+        </p:nvCxnSpPr>
+        <p:spPr>
+          <a:xfrm flipV="1">
+            <a:off x="4445000" y="4357667"/>
+            <a:ext cx="66871" cy="36533"/>
+          </a:xfrm>
+          <a:prstGeom prst="line">
+            <a:avLst/>
+          </a:prstGeom>
+          <a:ln w="19050">
+            <a:solidFill>
+              <a:srgbClr val="008C7B"/>
+            </a:solidFill>
+          </a:ln>
+        </p:spPr>
+        <p:style>
+          <a:lnRef idx="2">
+            <a:schemeClr val="accent1"/>
+          </a:lnRef>
+          <a:fillRef idx="0">
+            <a:schemeClr val="accent1"/>
+          </a:fillRef>
+          <a:effectRef idx="1">
+            <a:schemeClr val="accent1"/>
+          </a:effectRef>
+          <a:fontRef idx="minor">
+            <a:schemeClr val="tx1"/>
+          </a:fontRef>
+        </p:style>
+      </p:cxnSp>
+      <p:cxnSp>
+        <p:nvCxnSpPr>
+          <p:cNvPr id="26" name="Connector 25"/>
+          <p:cNvCxnSpPr/>
+          <p:nvPr/>
+        </p:nvCxnSpPr>
+        <p:spPr>
+          <a:xfrm>
+            <a:off x="4445000" y="4394200"/>
+            <a:ext cx="66871" cy="36532"/>
+          </a:xfrm>
+          <a:prstGeom prst="line">
+            <a:avLst/>
+          </a:prstGeom>
+          <a:ln w="19050">
+            <a:solidFill>
+              <a:srgbClr val="008C7B"/>
+            </a:solidFill>
+          </a:ln>
+        </p:spPr>
+        <p:style>
+          <a:lnRef idx="2">
+            <a:schemeClr val="accent1"/>
+          </a:lnRef>
+          <a:fillRef idx="0">
+            <a:schemeClr val="accent1"/>
+          </a:fillRef>
+          <a:effectRef idx="1">
+            <a:schemeClr val="accent1"/>
+          </a:effectRef>
+          <a:fontRef idx="minor">
+            <a:schemeClr val="tx1"/>
+          </a:fontRef>
+        </p:style>
+      </p:cxnSp>
+      <p:cxnSp>
+        <p:nvCxnSpPr>
+          <p:cNvPr id="27" name="Connector 26"/>
+          <p:cNvCxnSpPr/>
+          <p:nvPr/>
+        </p:nvCxnSpPr>
+        <p:spPr>
+          <a:xfrm flipH="1">
+            <a:off x="2565400" y="4394200"/>
+            <a:ext cx="203200" cy="0"/>
+          </a:xfrm>
+          <a:prstGeom prst="line">
+            <a:avLst/>
+          </a:prstGeom>
+          <a:ln w="19050">
+            <a:solidFill>
+              <a:srgbClr val="008C7B"/>
+            </a:solidFill>
+          </a:ln>
+        </p:spPr>
+        <p:style>
+          <a:lnRef idx="2">
+            <a:schemeClr val="accent1"/>
+          </a:lnRef>
+          <a:fillRef idx="0">
+            <a:schemeClr val="accent1"/>
+          </a:fillRef>
+          <a:effectRef idx="1">
+            <a:schemeClr val="accent1"/>
+          </a:effectRef>
+          <a:fontRef idx="minor">
+            <a:schemeClr val="tx1"/>
+          </a:fontRef>
+        </p:style>
+      </p:cxnSp>
+      <p:cxnSp>
+        <p:nvCxnSpPr>
+          <p:cNvPr id="28" name="Connector 27"/>
+          <p:cNvCxnSpPr/>
+          <p:nvPr/>
+        </p:nvCxnSpPr>
+        <p:spPr>
+          <a:xfrm flipV="1">
+            <a:off x="2565400" y="4357667"/>
+            <a:ext cx="66871" cy="36533"/>
+          </a:xfrm>
+          <a:prstGeom prst="line">
+            <a:avLst/>
+          </a:prstGeom>
+          <a:ln w="19050">
+            <a:solidFill>
+              <a:srgbClr val="008C7B"/>
+            </a:solidFill>
+          </a:ln>
+        </p:spPr>
+        <p:style>
+          <a:lnRef idx="2">
+            <a:schemeClr val="accent1"/>
+          </a:lnRef>
+          <a:fillRef idx="0">
+            <a:schemeClr val="accent1"/>
+          </a:fillRef>
+          <a:effectRef idx="1">
+            <a:schemeClr val="accent1"/>
+          </a:effectRef>
+          <a:fontRef idx="minor">
+            <a:schemeClr val="tx1"/>
+          </a:fontRef>
+        </p:style>
+      </p:cxnSp>
+      <p:cxnSp>
+        <p:nvCxnSpPr>
+          <p:cNvPr id="29" name="Connector 28"/>
+          <p:cNvCxnSpPr/>
+          <p:nvPr/>
+        </p:nvCxnSpPr>
+        <p:spPr>
+          <a:xfrm>
+            <a:off x="2565400" y="4394200"/>
+            <a:ext cx="66871" cy="36532"/>
+          </a:xfrm>
+          <a:prstGeom prst="line">
+            <a:avLst/>
+          </a:prstGeom>
+          <a:ln w="19050">
+            <a:solidFill>
+              <a:srgbClr val="008C7B"/>
+            </a:solidFill>
+          </a:ln>
+        </p:spPr>
+        <p:style>
+          <a:lnRef idx="2">
+            <a:schemeClr val="accent1"/>
+          </a:lnRef>
+          <a:fillRef idx="0">
+            <a:schemeClr val="accent1"/>
+          </a:fillRef>
+          <a:effectRef idx="1">
+            <a:schemeClr val="accent1"/>
+          </a:effectRef>
+          <a:fontRef idx="minor">
+            <a:schemeClr val="tx1"/>
+          </a:fontRef>
+        </p:style>
+      </p:cxnSp>
+      <p:cxnSp>
+        <p:nvCxnSpPr>
+          <p:cNvPr id="30" name="Connector 29"/>
+          <p:cNvCxnSpPr/>
+          <p:nvPr/>
+        </p:nvCxnSpPr>
+        <p:spPr>
+          <a:xfrm flipV="1">
+            <a:off x="1727200" y="3784600"/>
+            <a:ext cx="0" cy="228600"/>
+          </a:xfrm>
+          <a:prstGeom prst="line">
+            <a:avLst/>
+          </a:prstGeom>
+          <a:ln w="19050">
+            <a:solidFill>
+              <a:srgbClr val="008C7B"/>
+            </a:solidFill>
+          </a:ln>
+        </p:spPr>
+        <p:style>
+          <a:lnRef idx="2">
+            <a:schemeClr val="accent1"/>
+          </a:lnRef>
+          <a:fillRef idx="0">
+            <a:schemeClr val="accent1"/>
+          </a:fillRef>
+          <a:effectRef idx="1">
+            <a:schemeClr val="accent1"/>
+          </a:effectRef>
+          <a:fontRef idx="minor">
+            <a:schemeClr val="tx1"/>
+          </a:fontRef>
+        </p:style>
+      </p:cxnSp>
+      <p:cxnSp>
+        <p:nvCxnSpPr>
+          <p:cNvPr id="31" name="Connector 30"/>
+          <p:cNvCxnSpPr/>
+          <p:nvPr/>
+        </p:nvCxnSpPr>
+        <p:spPr>
+          <a:xfrm>
+            <a:off x="1727200" y="3784600"/>
+            <a:ext cx="3759200" cy="0"/>
+          </a:xfrm>
+          <a:prstGeom prst="line">
+            <a:avLst/>
+          </a:prstGeom>
+          <a:ln w="19050">
+            <a:solidFill>
+              <a:srgbClr val="008C7B"/>
+            </a:solidFill>
+          </a:ln>
+        </p:spPr>
+        <p:style>
+          <a:lnRef idx="2">
+            <a:schemeClr val="accent1"/>
+          </a:lnRef>
+          <a:fillRef idx="0">
+            <a:schemeClr val="accent1"/>
+          </a:fillRef>
+          <a:effectRef idx="1">
+            <a:schemeClr val="accent1"/>
+          </a:effectRef>
+          <a:fontRef idx="minor">
+            <a:schemeClr val="tx1"/>
+          </a:fontRef>
+        </p:style>
+      </p:cxnSp>
+      <p:cxnSp>
+        <p:nvCxnSpPr>
+          <p:cNvPr id="32" name="Connector 31"/>
+          <p:cNvCxnSpPr/>
+          <p:nvPr/>
+        </p:nvCxnSpPr>
+        <p:spPr>
+          <a:xfrm flipV="1">
+            <a:off x="5486400" y="3556000"/>
+            <a:ext cx="0" cy="228600"/>
+          </a:xfrm>
+          <a:prstGeom prst="line">
+            <a:avLst/>
+          </a:prstGeom>
+          <a:ln w="19050">
+            <a:solidFill>
+              <a:srgbClr val="008C7B"/>
+            </a:solidFill>
+          </a:ln>
+        </p:spPr>
+        <p:style>
+          <a:lnRef idx="2">
+            <a:schemeClr val="accent1"/>
+          </a:lnRef>
+          <a:fillRef idx="0">
+            <a:schemeClr val="accent1"/>
+          </a:fillRef>
+          <a:effectRef idx="1">
+            <a:schemeClr val="accent1"/>
+          </a:effectRef>
+          <a:fontRef idx="minor">
+            <a:schemeClr val="tx1"/>
+          </a:fontRef>
+        </p:style>
+      </p:cxnSp>
+      <p:cxnSp>
+        <p:nvCxnSpPr>
+          <p:cNvPr id="33" name="Connector 32"/>
+          <p:cNvCxnSpPr/>
+          <p:nvPr/>
+        </p:nvCxnSpPr>
+        <p:spPr>
+          <a:xfrm>
+            <a:off x="5486400" y="3556000"/>
+            <a:ext cx="36532" cy="66871"/>
+          </a:xfrm>
+          <a:prstGeom prst="line">
+            <a:avLst/>
+          </a:prstGeom>
+          <a:ln w="19050">
+            <a:solidFill>
+              <a:srgbClr val="008C7B"/>
+            </a:solidFill>
+          </a:ln>
+        </p:spPr>
+        <p:style>
+          <a:lnRef idx="2">
+            <a:schemeClr val="accent1"/>
+          </a:lnRef>
+          <a:fillRef idx="0">
+            <a:schemeClr val="accent1"/>
+          </a:fillRef>
+          <a:effectRef idx="1">
+            <a:schemeClr val="accent1"/>
+          </a:effectRef>
+          <a:fontRef idx="minor">
+            <a:schemeClr val="tx1"/>
+          </a:fontRef>
+        </p:style>
+      </p:cxnSp>
+      <p:cxnSp>
+        <p:nvCxnSpPr>
+          <p:cNvPr id="34" name="Connector 33"/>
+          <p:cNvCxnSpPr/>
+          <p:nvPr/>
+        </p:nvCxnSpPr>
+        <p:spPr>
+          <a:xfrm flipH="1">
+            <a:off x="5449867" y="3556000"/>
+            <a:ext cx="36533" cy="66871"/>
+          </a:xfrm>
+          <a:prstGeom prst="line">
+            <a:avLst/>
+          </a:prstGeom>
+          <a:ln w="19050">
+            <a:solidFill>
+              <a:srgbClr val="008C7B"/>
+            </a:solidFill>
+          </a:ln>
+        </p:spPr>
+        <p:style>
+          <a:lnRef idx="2">
+            <a:schemeClr val="accent1"/>
+          </a:lnRef>
+          <a:fillRef idx="0">
+            <a:schemeClr val="accent1"/>
+          </a:fillRef>
+          <a:effectRef idx="1">
+            <a:schemeClr val="accent1"/>
+          </a:effectRef>
+          <a:fontRef idx="minor">
+            <a:schemeClr val="tx1"/>
+          </a:fontRef>
+        </p:style>
+      </p:cxnSp>
+      <p:sp>
+        <p:nvSpPr>
+          <p:cNvPr id="35" name="Rounded Rectangle 34"/>
           <p:cNvSpPr/>
           <p:nvPr/>
         </p:nvSpPr>
         <p:spPr>
           <a:xfrm>
-            <a:off x="889000" y="3073400"/>
-            <a:ext cx="1803400" cy="914400"/>
+            <a:off x="889000" y="2794000"/>
+            <a:ext cx="1676400" cy="762000"/>
           </a:xfrm>
           <a:prstGeom prst="roundRect">
             <a:avLst>
-              <a:gd name="adj" fmla="val 11111"/>
-            </a:avLst>
-          </a:prstGeom>
-          <a:solidFill>
-            <a:srgbClr val="CAEFA1"/>
-          </a:solidFill>
-          <a:ln w="8890">
-            <a:solidFill>
-              <a:srgbClr val="CAEFA1"/>
-            </a:solidFill>
-          </a:ln>
-        </p:spPr>
-        <p:style>
-          <a:lnRef idx="1">
-            <a:schemeClr val="accent1"/>
-          </a:lnRef>
-          <a:fillRef idx="3">
-            <a:schemeClr val="accent1"/>
-          </a:fillRef>
-          <a:effectRef idx="2">
-            <a:schemeClr val="accent1"/>
-          </a:effectRef>
-          <a:fontRef idx="minor">
-            <a:schemeClr val="lt1"/>
-          </a:fontRef>
-        </p:style>
-        <p:txBody>
-          <a:bodyPr rtlCol="0" anchor="ctr"/>
-          <a:lstStyle/>
-          <a:p>
-            <a:pPr algn="ctr"/>
-          </a:p>
-        </p:txBody>
-      </p:sp>
-      <p:sp>
-        <p:nvSpPr>
-          <p:cNvPr id="22" name="TextBox 21"/>
-          <p:cNvSpPr txBox="1"/>
-          <p:nvPr/>
-        </p:nvSpPr>
-        <p:spPr>
-          <a:xfrm>
-            <a:off x="1016000" y="3200400"/>
-            <a:ext cx="1549400" cy="685800"/>
-          </a:xfrm>
-          <a:prstGeom prst="rect">
-            <a:avLst/>
-          </a:prstGeom>
-          <a:noFill/>
-        </p:spPr>
-        <p:txBody>
-          <a:bodyPr wrap="none" lIns="0" rIns="0" tIns="0" bIns="0">
-            <a:spAutoFit/>
-          </a:bodyPr>
-          <a:lstStyle/>
-          <a:p>
-            <a:pPr>
-              <a:lnSpc>
-                <a:spcPts val="1512"/>
-              </a:lnSpc>
-              <a:spcBef>
-                <a:spcPts val="0"/>
-              </a:spcBef>
-              <a:spcAft>
-                <a:spcPts val="0"/>
-              </a:spcAft>
-              <a:defRPr sz="1400" b="1">
-                <a:solidFill>
-                  <a:srgbClr val="173A42"/>
-                </a:solidFill>
-                <a:latin typeface="DejaVu Sans"/>
-              </a:defRPr>
-            </a:pPr>
-            <a:r>
-              <a:t>Starting skill</a:t>
-            </a:r>
-          </a:p>
-          <a:p>
-            <a:pPr>
-              <a:lnSpc>
-                <a:spcPts val="1512"/>
-              </a:lnSpc>
-              <a:spcBef>
-                <a:spcPts val="0"/>
-              </a:spcBef>
-              <a:spcAft>
-                <a:spcPts val="0"/>
-              </a:spcAft>
-              <a:defRPr sz="1400" b="1">
-                <a:solidFill>
-                  <a:srgbClr val="173A42"/>
-                </a:solidFill>
-                <a:latin typeface="DejaVu Sans"/>
-              </a:defRPr>
-            </a:pPr>
-            <a:r>
-              <a:t>vending-</a:t>
-            </a:r>
-          </a:p>
-          <a:p>
-            <a:pPr>
-              <a:lnSpc>
-                <a:spcPts val="1512"/>
-              </a:lnSpc>
-              <a:spcBef>
-                <a:spcPts val="0"/>
-              </a:spcBef>
-              <a:spcAft>
-                <a:spcPts val="0"/>
-              </a:spcAft>
-              <a:defRPr sz="1400" b="1">
-                <a:solidFill>
-                  <a:srgbClr val="173A42"/>
-                </a:solidFill>
-                <a:latin typeface="DejaVu Sans"/>
-              </a:defRPr>
-            </a:pPr>
-            <a:r>
-              <a:t>machine</a:t>
-            </a:r>
-          </a:p>
-        </p:txBody>
-      </p:sp>
-      <p:sp>
-        <p:nvSpPr>
-          <p:cNvPr id="23" name="Rounded Rectangle 22"/>
-          <p:cNvSpPr/>
-          <p:nvPr/>
-        </p:nvSpPr>
-        <p:spPr>
-          <a:xfrm>
-            <a:off x="2997200" y="3073400"/>
-            <a:ext cx="1981200" cy="914400"/>
-          </a:xfrm>
-          <a:prstGeom prst="roundRect">
-            <a:avLst>
-              <a:gd name="adj" fmla="val 11111"/>
+              <a:gd name="adj" fmla="val 13333"/>
             </a:avLst>
           </a:prstGeom>
           <a:solidFill>
@@ -12426,14 +12170,14 @@
       </p:sp>
       <p:sp>
         <p:nvSpPr>
-          <p:cNvPr id="24" name="TextBox 23"/>
+          <p:cNvPr id="36" name="TextBox 35"/>
           <p:cNvSpPr txBox="1"/>
           <p:nvPr/>
         </p:nvSpPr>
         <p:spPr>
           <a:xfrm>
-            <a:off x="3124200" y="3200400"/>
-            <a:ext cx="1727200" cy="685800"/>
+            <a:off x="1016000" y="2921000"/>
+            <a:ext cx="1422400" cy="533400"/>
           </a:xfrm>
           <a:prstGeom prst="rect">
             <a:avLst/>
@@ -12448,15 +12192,15 @@
           <a:p>
             <a:pPr>
               <a:lnSpc>
-                <a:spcPts val="1512"/>
-              </a:lnSpc>
-              <a:spcBef>
-                <a:spcPts val="0"/>
-              </a:spcBef>
-              <a:spcAft>
-                <a:spcPts val="0"/>
-              </a:spcAft>
-              <a:defRPr sz="1400" b="1">
+                <a:spcPts val="1296"/>
+              </a:lnSpc>
+              <a:spcBef>
+                <a:spcPts val="0"/>
+              </a:spcBef>
+              <a:spcAft>
+                <a:spcPts val="0"/>
+              </a:spcAft>
+              <a:defRPr sz="1200" b="1">
                 <a:solidFill>
                   <a:srgbClr val="173A42"/>
                 </a:solidFill>
@@ -12464,21 +12208,21 @@
               </a:defRPr>
             </a:pPr>
             <a:r>
-              <a:t>run_pi_agent.sh</a:t>
-            </a:r>
-          </a:p>
-          <a:p>
-            <a:pPr>
-              <a:lnSpc>
-                <a:spcPts val="1512"/>
-              </a:lnSpc>
-              <a:spcBef>
-                <a:spcPts val="0"/>
-              </a:spcBef>
-              <a:spcAft>
-                <a:spcPts val="0"/>
-              </a:spcAft>
-              <a:defRPr sz="1400" b="1">
+              <a:t>Create /</a:t>
+            </a:r>
+          </a:p>
+          <a:p>
+            <a:pPr>
+              <a:lnSpc>
+                <a:spcPts val="1296"/>
+              </a:lnSpc>
+              <a:spcBef>
+                <a:spcPts val="0"/>
+              </a:spcBef>
+              <a:spcAft>
+                <a:spcPts val="0"/>
+              </a:spcAft>
+              <a:defRPr sz="1200" b="1">
                 <a:solidFill>
                   <a:srgbClr val="173A42"/>
                 </a:solidFill>
@@ -12486,47 +12230,139 @@
               </a:defRPr>
             </a:pPr>
             <a:r>
-              <a:t>loads one skill</a:t>
-            </a:r>
-          </a:p>
-          <a:p>
-            <a:pPr>
-              <a:lnSpc>
-                <a:spcPts val="1512"/>
-              </a:lnSpc>
-              <a:spcBef>
-                <a:spcPts val="0"/>
-              </a:spcBef>
-              <a:spcAft>
-                <a:spcPts val="0"/>
-              </a:spcAft>
-              <a:defRPr sz="1400" b="1">
-                <a:solidFill>
-                  <a:srgbClr val="173A42"/>
-                </a:solidFill>
-                <a:latin typeface="DejaVu Sans"/>
-              </a:defRPr>
-            </a:pPr>
-            <a:r>
-              <a:t>and read,bash</a:t>
-            </a:r>
-          </a:p>
-        </p:txBody>
-      </p:sp>
-      <p:sp>
-        <p:nvSpPr>
-          <p:cNvPr id="25" name="Rounded Rectangle 24"/>
+              <a:t>observe</a:t>
+            </a:r>
+          </a:p>
+        </p:txBody>
+      </p:sp>
+      <p:sp>
+        <p:nvSpPr>
+          <p:cNvPr id="37" name="Rounded Rectangle 36"/>
           <p:cNvSpPr/>
           <p:nvPr/>
         </p:nvSpPr>
         <p:spPr>
           <a:xfrm>
-            <a:off x="5283200" y="3073400"/>
-            <a:ext cx="1625600" cy="914400"/>
+            <a:off x="2768600" y="2794000"/>
+            <a:ext cx="1676400" cy="762000"/>
           </a:xfrm>
           <a:prstGeom prst="roundRect">
             <a:avLst>
-              <a:gd name="adj" fmla="val 11111"/>
+              <a:gd name="adj" fmla="val 13333"/>
+            </a:avLst>
+          </a:prstGeom>
+          <a:solidFill>
+            <a:srgbClr val="E8F3ED"/>
+          </a:solidFill>
+          <a:ln w="8890">
+            <a:solidFill>
+              <a:srgbClr val="DCE6E2"/>
+            </a:solidFill>
+          </a:ln>
+        </p:spPr>
+        <p:style>
+          <a:lnRef idx="1">
+            <a:schemeClr val="accent1"/>
+          </a:lnRef>
+          <a:fillRef idx="3">
+            <a:schemeClr val="accent1"/>
+          </a:fillRef>
+          <a:effectRef idx="2">
+            <a:schemeClr val="accent1"/>
+          </a:effectRef>
+          <a:fontRef idx="minor">
+            <a:schemeClr val="lt1"/>
+          </a:fontRef>
+        </p:style>
+        <p:txBody>
+          <a:bodyPr rtlCol="0" anchor="ctr"/>
+          <a:lstStyle/>
+          <a:p>
+            <a:pPr algn="ctr"/>
+          </a:p>
+        </p:txBody>
+      </p:sp>
+      <p:sp>
+        <p:nvSpPr>
+          <p:cNvPr id="38" name="TextBox 37"/>
+          <p:cNvSpPr txBox="1"/>
+          <p:nvPr/>
+        </p:nvSpPr>
+        <p:spPr>
+          <a:xfrm>
+            <a:off x="2895600" y="2921000"/>
+            <a:ext cx="1422400" cy="533400"/>
+          </a:xfrm>
+          <a:prstGeom prst="rect">
+            <a:avLst/>
+          </a:prstGeom>
+          <a:noFill/>
+        </p:spPr>
+        <p:txBody>
+          <a:bodyPr wrap="none" lIns="0" rIns="0" tIns="0" bIns="0">
+            <a:spAutoFit/>
+          </a:bodyPr>
+          <a:lstStyle/>
+          <a:p>
+            <a:pPr>
+              <a:lnSpc>
+                <a:spcPts val="1296"/>
+              </a:lnSpc>
+              <a:spcBef>
+                <a:spcPts val="0"/>
+              </a:spcBef>
+              <a:spcAft>
+                <a:spcPts val="0"/>
+              </a:spcAft>
+              <a:defRPr sz="1200" b="1">
+                <a:solidFill>
+                  <a:srgbClr val="173A42"/>
+                </a:solidFill>
+                <a:latin typeface="DejaVu Sans"/>
+              </a:defRPr>
+            </a:pPr>
+            <a:r>
+              <a:t>Select ≤4</a:t>
+            </a:r>
+          </a:p>
+          <a:p>
+            <a:pPr>
+              <a:lnSpc>
+                <a:spcPts val="1296"/>
+              </a:lnSpc>
+              <a:spcBef>
+                <a:spcPts val="0"/>
+              </a:spcBef>
+              <a:spcAft>
+                <a:spcPts val="0"/>
+              </a:spcAft>
+              <a:defRPr sz="1200" b="1">
+                <a:solidFill>
+                  <a:srgbClr val="173A42"/>
+                </a:solidFill>
+                <a:latin typeface="DejaVu Sans"/>
+              </a:defRPr>
+            </a:pPr>
+            <a:r>
+              <a:t>products</a:t>
+            </a:r>
+          </a:p>
+        </p:txBody>
+      </p:sp>
+      <p:sp>
+        <p:nvSpPr>
+          <p:cNvPr id="39" name="Rounded Rectangle 38"/>
+          <p:cNvSpPr/>
+          <p:nvPr/>
+        </p:nvSpPr>
+        <p:spPr>
+          <a:xfrm>
+            <a:off x="4648200" y="2794000"/>
+            <a:ext cx="1676400" cy="762000"/>
+          </a:xfrm>
+          <a:prstGeom prst="roundRect">
+            <a:avLst>
+              <a:gd name="adj" fmla="val 13333"/>
             </a:avLst>
           </a:prstGeom>
           <a:solidFill>
@@ -12562,14 +12398,14 @@
       </p:sp>
       <p:sp>
         <p:nvSpPr>
-          <p:cNvPr id="26" name="TextBox 25"/>
+          <p:cNvPr id="40" name="TextBox 39"/>
           <p:cNvSpPr txBox="1"/>
           <p:nvPr/>
         </p:nvSpPr>
         <p:spPr>
           <a:xfrm>
-            <a:off x="5410200" y="3200400"/>
-            <a:ext cx="1371600" cy="685800"/>
+            <a:off x="4775200" y="2921000"/>
+            <a:ext cx="1422400" cy="533400"/>
           </a:xfrm>
           <a:prstGeom prst="rect">
             <a:avLst/>
@@ -12584,15 +12420,15 @@
           <a:p>
             <a:pPr>
               <a:lnSpc>
-                <a:spcPts val="1512"/>
-              </a:lnSpc>
-              <a:spcBef>
-                <a:spcPts val="0"/>
-              </a:spcBef>
-              <a:spcAft>
-                <a:spcPts val="0"/>
-              </a:spcAft>
-              <a:defRPr sz="1400" b="1">
+                <a:spcPts val="1296"/>
+              </a:lnSpc>
+              <a:spcBef>
+                <a:spcPts val="0"/>
+              </a:spcBef>
+              <a:spcAft>
+                <a:spcPts val="0"/>
+              </a:spcAft>
+              <a:defRPr sz="1200" b="1">
                 <a:solidFill>
                   <a:srgbClr val="173A42"/>
                 </a:solidFill>
@@ -12600,21 +12436,21 @@
               </a:defRPr>
             </a:pPr>
             <a:r>
-              <a:t>POST /env</a:t>
-            </a:r>
-          </a:p>
-          <a:p>
-            <a:pPr>
-              <a:lnSpc>
-                <a:spcPts val="1512"/>
-              </a:lnSpc>
-              <a:spcBef>
-                <a:spcPts val="0"/>
-              </a:spcBef>
-              <a:spcAft>
-                <a:spcPts val="0"/>
-              </a:spcAft>
-              <a:defRPr sz="1400" b="1">
+              <a:t>Buy /</a:t>
+            </a:r>
+          </a:p>
+          <a:p>
+            <a:pPr>
+              <a:lnSpc>
+                <a:spcPts val="1296"/>
+              </a:lnSpc>
+              <a:spcBef>
+                <a:spcPts val="0"/>
+              </a:spcBef>
+              <a:spcAft>
+                <a:spcPts val="0"/>
+              </a:spcAft>
+              <a:defRPr sz="1200" b="1">
                 <a:solidFill>
                   <a:srgbClr val="173A42"/>
                 </a:solidFill>
@@ -12622,47 +12458,25 @@
               </a:defRPr>
             </a:pPr>
             <a:r>
-              <a:t>create the</a:t>
-            </a:r>
-          </a:p>
-          <a:p>
-            <a:pPr>
-              <a:lnSpc>
-                <a:spcPts val="1512"/>
-              </a:lnSpc>
-              <a:spcBef>
-                <a:spcPts val="0"/>
-              </a:spcBef>
-              <a:spcAft>
-                <a:spcPts val="0"/>
-              </a:spcAft>
-              <a:defRPr sz="1400" b="1">
-                <a:solidFill>
-                  <a:srgbClr val="173A42"/>
-                </a:solidFill>
-                <a:latin typeface="DejaVu Sans"/>
-              </a:defRPr>
-            </a:pPr>
-            <a:r>
-              <a:t>episode</a:t>
-            </a:r>
-          </a:p>
-        </p:txBody>
-      </p:sp>
-      <p:sp>
-        <p:nvSpPr>
-          <p:cNvPr id="27" name="Rounded Rectangle 26"/>
+              <a:t>stock</a:t>
+            </a:r>
+          </a:p>
+        </p:txBody>
+      </p:sp>
+      <p:sp>
+        <p:nvSpPr>
+          <p:cNvPr id="41" name="Rounded Rectangle 40"/>
           <p:cNvSpPr/>
           <p:nvPr/>
         </p:nvSpPr>
         <p:spPr>
           <a:xfrm>
-            <a:off x="7213600" y="3073400"/>
-            <a:ext cx="1524000" cy="914400"/>
+            <a:off x="6527800" y="2794000"/>
+            <a:ext cx="1676400" cy="762000"/>
           </a:xfrm>
           <a:prstGeom prst="roundRect">
             <a:avLst>
-              <a:gd name="adj" fmla="val 11111"/>
+              <a:gd name="adj" fmla="val 13333"/>
             </a:avLst>
           </a:prstGeom>
           <a:solidFill>
@@ -12698,14 +12512,14 @@
       </p:sp>
       <p:sp>
         <p:nvSpPr>
-          <p:cNvPr id="28" name="TextBox 27"/>
+          <p:cNvPr id="42" name="TextBox 41"/>
           <p:cNvSpPr txBox="1"/>
           <p:nvPr/>
         </p:nvSpPr>
         <p:spPr>
           <a:xfrm>
-            <a:off x="7340600" y="3200400"/>
-            <a:ext cx="1270000" cy="685800"/>
+            <a:off x="6654800" y="2921000"/>
+            <a:ext cx="1422400" cy="533400"/>
           </a:xfrm>
           <a:prstGeom prst="rect">
             <a:avLst/>
@@ -12720,15 +12534,15 @@
           <a:p>
             <a:pPr>
               <a:lnSpc>
-                <a:spcPts val="1512"/>
-              </a:lnSpc>
-              <a:spcBef>
-                <a:spcPts val="0"/>
-              </a:spcBef>
-              <a:spcAft>
-                <a:spcPts val="0"/>
-              </a:spcAft>
-              <a:defRPr sz="1400" b="1">
+                <a:spcPts val="1296"/>
+              </a:lnSpc>
+              <a:spcBef>
+                <a:spcPts val="0"/>
+              </a:spcBef>
+              <a:spcAft>
+                <a:spcPts val="0"/>
+              </a:spcAft>
+              <a:defRPr sz="1200" b="1">
                 <a:solidFill>
                   <a:srgbClr val="173A42"/>
                 </a:solidFill>
@@ -12736,69 +12550,25 @@
               </a:defRPr>
             </a:pPr>
             <a:r>
-              <a:t>observe</a:t>
-            </a:r>
-          </a:p>
-          <a:p>
-            <a:pPr>
-              <a:lnSpc>
-                <a:spcPts val="1512"/>
-              </a:lnSpc>
-              <a:spcBef>
-                <a:spcPts val="0"/>
-              </a:spcBef>
-              <a:spcAft>
-                <a:spcPts val="0"/>
-              </a:spcAft>
-              <a:defRPr sz="1400" b="1">
-                <a:solidFill>
-                  <a:srgbClr val="173A42"/>
-                </a:solidFill>
-                <a:latin typeface="DejaVu Sans"/>
-              </a:defRPr>
-            </a:pPr>
-            <a:r>
-              <a:t>read public</a:t>
-            </a:r>
-          </a:p>
-          <a:p>
-            <a:pPr>
-              <a:lnSpc>
-                <a:spcPts val="1512"/>
-              </a:lnSpc>
-              <a:spcBef>
-                <a:spcPts val="0"/>
-              </a:spcBef>
-              <a:spcAft>
-                <a:spcPts val="0"/>
-              </a:spcAft>
-              <a:defRPr sz="1400" b="1">
-                <a:solidFill>
-                  <a:srgbClr val="173A42"/>
-                </a:solidFill>
-                <a:latin typeface="DejaVu Sans"/>
-              </a:defRPr>
-            </a:pPr>
-            <a:r>
-              <a:t>state</a:t>
-            </a:r>
-          </a:p>
-        </p:txBody>
-      </p:sp>
-      <p:sp>
-        <p:nvSpPr>
-          <p:cNvPr id="29" name="Rounded Rectangle 28"/>
+              <a:t>end_day</a:t>
+            </a:r>
+          </a:p>
+        </p:txBody>
+      </p:sp>
+      <p:sp>
+        <p:nvSpPr>
+          <p:cNvPr id="43" name="Rounded Rectangle 42"/>
           <p:cNvSpPr/>
           <p:nvPr/>
         </p:nvSpPr>
         <p:spPr>
           <a:xfrm>
-            <a:off x="2108200" y="4343400"/>
-            <a:ext cx="2082800" cy="914400"/>
+            <a:off x="6527800" y="4013200"/>
+            <a:ext cx="1676400" cy="762000"/>
           </a:xfrm>
           <a:prstGeom prst="roundRect">
             <a:avLst>
-              <a:gd name="adj" fmla="val 11111"/>
+              <a:gd name="adj" fmla="val 13333"/>
             </a:avLst>
           </a:prstGeom>
           <a:solidFill>
@@ -12834,14 +12604,14 @@
       </p:sp>
       <p:sp>
         <p:nvSpPr>
-          <p:cNvPr id="30" name="TextBox 29"/>
+          <p:cNvPr id="44" name="TextBox 43"/>
           <p:cNvSpPr txBox="1"/>
           <p:nvPr/>
         </p:nvSpPr>
         <p:spPr>
           <a:xfrm>
-            <a:off x="2235200" y="4470400"/>
-            <a:ext cx="1828800" cy="685800"/>
+            <a:off x="6654800" y="4140200"/>
+            <a:ext cx="1422400" cy="533400"/>
           </a:xfrm>
           <a:prstGeom prst="rect">
             <a:avLst/>
@@ -12856,15 +12626,15 @@
           <a:p>
             <a:pPr>
               <a:lnSpc>
-                <a:spcPts val="1512"/>
-              </a:lnSpc>
-              <a:spcBef>
-                <a:spcPts val="0"/>
-              </a:spcBef>
-              <a:spcAft>
-                <a:spcPts val="0"/>
-              </a:spcAft>
-              <a:defRPr sz="1400" b="1">
+                <a:spcPts val="1296"/>
+              </a:lnSpc>
+              <a:spcBef>
+                <a:spcPts val="0"/>
+              </a:spcBef>
+              <a:spcAft>
+                <a:spcPts val="0"/>
+              </a:spcAft>
+              <a:defRPr sz="1200" b="1">
                 <a:solidFill>
                   <a:srgbClr val="173A42"/>
                 </a:solidFill>
@@ -12872,21 +12642,21 @@
               </a:defRPr>
             </a:pPr>
             <a:r>
-              <a:t>Plan one action</a:t>
-            </a:r>
-          </a:p>
-          <a:p>
-            <a:pPr>
-              <a:lnSpc>
-                <a:spcPts val="1512"/>
-              </a:lnSpc>
-              <a:spcBef>
-                <a:spcPts val="0"/>
-              </a:spcBef>
-              <a:spcAft>
-                <a:spcPts val="0"/>
-              </a:spcAft>
-              <a:defRPr sz="1400" b="1">
+              <a:t>Collect cash</a:t>
+            </a:r>
+          </a:p>
+          <a:p>
+            <a:pPr>
+              <a:lnSpc>
+                <a:spcPts val="1296"/>
+              </a:lnSpc>
+              <a:spcBef>
+                <a:spcPts val="0"/>
+              </a:spcBef>
+              <a:spcAft>
+                <a:spcPts val="0"/>
+              </a:spcAft>
+              <a:defRPr sz="1200" b="1">
                 <a:solidFill>
                   <a:srgbClr val="173A42"/>
                 </a:solidFill>
@@ -12894,25 +12664,25 @@
               </a:defRPr>
             </a:pPr>
             <a:r>
-              <a:t>from public data</a:t>
-            </a:r>
-          </a:p>
-        </p:txBody>
-      </p:sp>
-      <p:sp>
-        <p:nvSpPr>
-          <p:cNvPr id="31" name="Rounded Rectangle 30"/>
+              <a:t>if positive</a:t>
+            </a:r>
+          </a:p>
+        </p:txBody>
+      </p:sp>
+      <p:sp>
+        <p:nvSpPr>
+          <p:cNvPr id="45" name="Rounded Rectangle 44"/>
           <p:cNvSpPr/>
           <p:nvPr/>
         </p:nvSpPr>
         <p:spPr>
           <a:xfrm>
-            <a:off x="4572000" y="4343400"/>
-            <a:ext cx="2032000" cy="914400"/>
+            <a:off x="4648200" y="4013200"/>
+            <a:ext cx="1676400" cy="762000"/>
           </a:xfrm>
           <a:prstGeom prst="roundRect">
             <a:avLst>
-              <a:gd name="adj" fmla="val 11111"/>
+              <a:gd name="adj" fmla="val 13333"/>
             </a:avLst>
           </a:prstGeom>
           <a:solidFill>
@@ -12948,14 +12718,14 @@
       </p:sp>
       <p:sp>
         <p:nvSpPr>
-          <p:cNvPr id="32" name="TextBox 31"/>
+          <p:cNvPr id="46" name="TextBox 45"/>
           <p:cNvSpPr txBox="1"/>
           <p:nvPr/>
         </p:nvSpPr>
         <p:spPr>
           <a:xfrm>
-            <a:off x="4699000" y="4470400"/>
-            <a:ext cx="1778000" cy="685800"/>
+            <a:off x="4775200" y="4140200"/>
+            <a:ext cx="1422400" cy="533400"/>
           </a:xfrm>
           <a:prstGeom prst="rect">
             <a:avLst/>
@@ -12970,15 +12740,15 @@
           <a:p>
             <a:pPr>
               <a:lnSpc>
-                <a:spcPts val="1512"/>
-              </a:lnSpc>
-              <a:spcBef>
-                <a:spcPts val="0"/>
-              </a:spcBef>
-              <a:spcAft>
-                <a:spcPts val="0"/>
-              </a:spcAft>
-              <a:defRPr sz="1400" b="1">
+                <a:spcPts val="1296"/>
+              </a:lnSpc>
+              <a:spcBef>
+                <a:spcPts val="0"/>
+              </a:spcBef>
+              <a:spcAft>
+                <a:spcPts val="0"/>
+              </a:spcAft>
+              <a:defRPr sz="1200" b="1">
                 <a:solidFill>
                   <a:srgbClr val="173A42"/>
                 </a:solidFill>
@@ -12986,21 +12756,21 @@
               </a:defRPr>
             </a:pPr>
             <a:r>
-              <a:t>Validate IDs,</a:t>
-            </a:r>
-          </a:p>
-          <a:p>
-            <a:pPr>
-              <a:lnSpc>
-                <a:spcPts val="1512"/>
-              </a:lnSpc>
-              <a:spcBef>
-                <a:spcPts val="0"/>
-              </a:spcBef>
-              <a:spcAft>
-                <a:spcPts val="0"/>
-              </a:spcAft>
-              <a:defRPr sz="1400" b="1">
+              <a:t>Machine +</a:t>
+            </a:r>
+          </a:p>
+          <a:p>
+            <a:pPr>
+              <a:lnSpc>
+                <a:spcPts val="1296"/>
+              </a:lnSpc>
+              <a:spcBef>
+                <a:spcPts val="0"/>
+              </a:spcBef>
+              <a:spcAft>
+                <a:spcPts val="0"/>
+              </a:spcAft>
+              <a:defRPr sz="1200" b="1">
                 <a:solidFill>
                   <a:srgbClr val="173A42"/>
                 </a:solidFill>
@@ -13008,25 +12778,25 @@
               </a:defRPr>
             </a:pPr>
             <a:r>
-              <a:t>prices, and cash</a:t>
-            </a:r>
-          </a:p>
-        </p:txBody>
-      </p:sp>
-      <p:sp>
-        <p:nvSpPr>
-          <p:cNvPr id="33" name="Rounded Rectangle 32"/>
+              <a:t>storage</a:t>
+            </a:r>
+          </a:p>
+        </p:txBody>
+      </p:sp>
+      <p:sp>
+        <p:nvSpPr>
+          <p:cNvPr id="47" name="Rounded Rectangle 46"/>
           <p:cNvSpPr/>
           <p:nvPr/>
         </p:nvSpPr>
         <p:spPr>
           <a:xfrm>
-            <a:off x="6934200" y="4343400"/>
-            <a:ext cx="1803400" cy="914400"/>
+            <a:off x="2768600" y="4013200"/>
+            <a:ext cx="1676400" cy="762000"/>
           </a:xfrm>
           <a:prstGeom prst="roundRect">
             <a:avLst>
-              <a:gd name="adj" fmla="val 11111"/>
+              <a:gd name="adj" fmla="val 13333"/>
             </a:avLst>
           </a:prstGeom>
           <a:solidFill>
@@ -13062,14 +12832,14 @@
       </p:sp>
       <p:sp>
         <p:nvSpPr>
-          <p:cNvPr id="34" name="TextBox 33"/>
+          <p:cNvPr id="48" name="TextBox 47"/>
           <p:cNvSpPr txBox="1"/>
           <p:nvPr/>
         </p:nvSpPr>
         <p:spPr>
           <a:xfrm>
-            <a:off x="7061200" y="4470400"/>
-            <a:ext cx="1549400" cy="685800"/>
+            <a:off x="2895600" y="4140200"/>
+            <a:ext cx="1422400" cy="533400"/>
           </a:xfrm>
           <a:prstGeom prst="rect">
             <a:avLst/>
@@ -13084,15 +12854,15 @@
           <a:p>
             <a:pPr>
               <a:lnSpc>
-                <a:spcPts val="1512"/>
-              </a:lnSpc>
-              <a:spcBef>
-                <a:spcPts val="0"/>
-              </a:spcBef>
-              <a:spcAft>
-                <a:spcPts val="0"/>
-              </a:spcAft>
-              <a:defRPr sz="1400" b="1">
+                <a:spcPts val="1296"/>
+              </a:lnSpc>
+              <a:spcBef>
+                <a:spcPts val="0"/>
+              </a:spcBef>
+              <a:spcAft>
+                <a:spcPts val="0"/>
+              </a:spcAft>
+              <a:defRPr sz="1200" b="1">
                 <a:solidFill>
                   <a:srgbClr val="173A42"/>
                 </a:solidFill>
@@ -13100,21 +12870,21 @@
               </a:defRPr>
             </a:pPr>
             <a:r>
-              <a:t>Execute one</a:t>
-            </a:r>
-          </a:p>
-          <a:p>
-            <a:pPr>
-              <a:lnSpc>
-                <a:spcPts val="1512"/>
-              </a:lnSpc>
-              <a:spcBef>
-                <a:spcPts val="0"/>
-              </a:spcBef>
-              <a:spcAft>
-                <a:spcPts val="0"/>
-              </a:spcAft>
-              <a:defRPr sz="1400" b="1">
+              <a:t>Refresh</a:t>
+            </a:r>
+          </a:p>
+          <a:p>
+            <a:pPr>
+              <a:lnSpc>
+                <a:spcPts val="1296"/>
+              </a:lnSpc>
+              <a:spcBef>
+                <a:spcPts val="0"/>
+              </a:spcBef>
+              <a:spcAft>
+                <a:spcPts val="0"/>
+              </a:spcAft>
+              <a:defRPr sz="1200" b="1">
                 <a:solidFill>
                   <a:srgbClr val="173A42"/>
                 </a:solidFill>
@@ -13122,179 +12892,21 @@
               </a:defRPr>
             </a:pPr>
             <a:r>
-              <a:t>API call</a:t>
-            </a:r>
-          </a:p>
-          <a:p>
-            <a:pPr>
-              <a:lnSpc>
-                <a:spcPts val="1512"/>
-              </a:lnSpc>
-              <a:spcBef>
-                <a:spcPts val="0"/>
-              </a:spcBef>
-              <a:spcAft>
-                <a:spcPts val="0"/>
-              </a:spcAft>
-              <a:defRPr sz="1400" b="1">
-                <a:solidFill>
-                  <a:srgbClr val="173A42"/>
-                </a:solidFill>
-                <a:latin typeface="DejaVu Sans"/>
-              </a:defRPr>
-            </a:pPr>
-            <a:r>
-              <a:t>via bash/curl</a:t>
-            </a:r>
-          </a:p>
-        </p:txBody>
-      </p:sp>
-      <p:sp>
-        <p:nvSpPr>
-          <p:cNvPr id="35" name="Rounded Rectangle 34"/>
+              <a:t>quotes*</a:t>
+            </a:r>
+          </a:p>
+        </p:txBody>
+      </p:sp>
+      <p:sp>
+        <p:nvSpPr>
+          <p:cNvPr id="49" name="Rounded Rectangle 48"/>
           <p:cNvSpPr/>
           <p:nvPr/>
         </p:nvSpPr>
         <p:spPr>
           <a:xfrm>
-            <a:off x="1549400" y="4622800"/>
-            <a:ext cx="1168400" cy="863600"/>
-          </a:xfrm>
-          <a:prstGeom prst="roundRect">
-            <a:avLst>
-              <a:gd name="adj" fmla="val 11764"/>
-            </a:avLst>
-          </a:prstGeom>
-          <a:solidFill>
-            <a:srgbClr val="E8F3ED"/>
-          </a:solidFill>
-          <a:ln w="8890">
-            <a:solidFill>
-              <a:srgbClr val="5E8DCD"/>
-            </a:solidFill>
-          </a:ln>
-        </p:spPr>
-        <p:style>
-          <a:lnRef idx="1">
-            <a:schemeClr val="accent1"/>
-          </a:lnRef>
-          <a:fillRef idx="3">
-            <a:schemeClr val="accent1"/>
-          </a:fillRef>
-          <a:effectRef idx="2">
-            <a:schemeClr val="accent1"/>
-          </a:effectRef>
-          <a:fontRef idx="minor">
-            <a:schemeClr val="lt1"/>
-          </a:fontRef>
-        </p:style>
-        <p:txBody>
-          <a:bodyPr rtlCol="0" anchor="ctr"/>
-          <a:lstStyle/>
-          <a:p>
-            <a:pPr algn="ctr"/>
-          </a:p>
-        </p:txBody>
-      </p:sp>
-      <p:sp>
-        <p:nvSpPr>
-          <p:cNvPr id="36" name="TextBox 35"/>
-          <p:cNvSpPr txBox="1"/>
-          <p:nvPr/>
-        </p:nvSpPr>
-        <p:spPr>
-          <a:xfrm>
-            <a:off x="1676400" y="4749800"/>
-            <a:ext cx="914400" cy="635000"/>
-          </a:xfrm>
-          <a:prstGeom prst="rect">
-            <a:avLst/>
-          </a:prstGeom>
-          <a:noFill/>
-        </p:spPr>
-        <p:txBody>
-          <a:bodyPr wrap="none" lIns="0" rIns="0" tIns="0" bIns="0">
-            <a:spAutoFit/>
-          </a:bodyPr>
-          <a:lstStyle/>
-          <a:p>
-            <a:pPr>
-              <a:lnSpc>
-                <a:spcPts val="1026"/>
-              </a:lnSpc>
-              <a:spcBef>
-                <a:spcPts val="0"/>
-              </a:spcBef>
-              <a:spcAft>
-                <a:spcPts val="0"/>
-              </a:spcAft>
-              <a:defRPr sz="950" b="1">
-                <a:solidFill>
-                  <a:srgbClr val="008C7B"/>
-                </a:solidFill>
-                <a:latin typeface="DejaVu Sans"/>
-              </a:defRPr>
-            </a:pPr>
-            <a:r>
-              <a:t>Graph guard</a:t>
-            </a:r>
-          </a:p>
-          <a:p>
-            <a:pPr>
-              <a:lnSpc>
-                <a:spcPts val="1026"/>
-              </a:lnSpc>
-              <a:spcBef>
-                <a:spcPts val="0"/>
-              </a:spcBef>
-              <a:spcAft>
-                <a:spcPts val="0"/>
-              </a:spcAft>
-              <a:defRPr sz="950" b="1">
-                <a:solidFill>
-                  <a:srgbClr val="008C7B"/>
-                </a:solidFill>
-                <a:latin typeface="DejaVu Sans"/>
-              </a:defRPr>
-            </a:pPr>
-            <a:r>
-              <a:t>blocks bad</a:t>
-            </a:r>
-          </a:p>
-          <a:p>
-            <a:pPr>
-              <a:lnSpc>
-                <a:spcPts val="1026"/>
-              </a:lnSpc>
-              <a:spcBef>
-                <a:spcPts val="0"/>
-              </a:spcBef>
-              <a:spcAft>
-                <a:spcPts val="0"/>
-              </a:spcAft>
-              <a:defRPr sz="950" b="1">
-                <a:solidFill>
-                  <a:srgbClr val="008C7B"/>
-                </a:solidFill>
-                <a:latin typeface="DejaVu Sans"/>
-              </a:defRPr>
-            </a:pPr>
-            <a:r>
-              <a:t>order</a:t>
-            </a:r>
-          </a:p>
-        </p:txBody>
-      </p:sp>
-      <p:sp>
-        <p:nvSpPr>
-          <p:cNvPr id="37" name="Rounded Rectangle 36"/>
-          <p:cNvSpPr/>
-          <p:nvPr/>
-        </p:nvSpPr>
-        <p:spPr>
-          <a:xfrm>
-            <a:off x="3327400" y="4724400"/>
-            <a:ext cx="1498600" cy="762000"/>
+            <a:off x="889000" y="4013200"/>
+            <a:ext cx="1676400" cy="762000"/>
           </a:xfrm>
           <a:prstGeom prst="roundRect">
             <a:avLst>
@@ -13334,14 +12946,14 @@
       </p:sp>
       <p:sp>
         <p:nvSpPr>
-          <p:cNvPr id="38" name="TextBox 37"/>
+          <p:cNvPr id="50" name="TextBox 49"/>
           <p:cNvSpPr txBox="1"/>
           <p:nvPr/>
         </p:nvSpPr>
         <p:spPr>
           <a:xfrm>
-            <a:off x="3454400" y="4851400"/>
-            <a:ext cx="1244600" cy="533400"/>
+            <a:off x="1016000" y="4140200"/>
+            <a:ext cx="1422400" cy="533400"/>
           </a:xfrm>
           <a:prstGeom prst="rect">
             <a:avLst/>
@@ -13356,15 +12968,15 @@
           <a:p>
             <a:pPr>
               <a:lnSpc>
-                <a:spcPts val="1134"/>
-              </a:lnSpc>
-              <a:spcBef>
-                <a:spcPts val="0"/>
-              </a:spcBef>
-              <a:spcAft>
-                <a:spcPts val="0"/>
-              </a:spcAft>
-              <a:defRPr sz="1050" b="1">
+                <a:spcPts val="1296"/>
+              </a:lnSpc>
+              <a:spcBef>
+                <a:spcPts val="0"/>
+              </a:spcBef>
+              <a:spcAft>
+                <a:spcPts val="0"/>
+              </a:spcAft>
+              <a:defRPr sz="1200" b="1">
                 <a:solidFill>
                   <a:srgbClr val="173A42"/>
                 </a:solidFill>
@@ -13372,21 +12984,21 @@
               </a:defRPr>
             </a:pPr>
             <a:r>
-              <a:t>Update logs</a:t>
-            </a:r>
-          </a:p>
-          <a:p>
-            <a:pPr>
-              <a:lnSpc>
-                <a:spcPts val="1134"/>
-              </a:lnSpc>
-              <a:spcBef>
-                <a:spcPts val="0"/>
-              </a:spcBef>
-              <a:spcAft>
-                <a:spcPts val="0"/>
-              </a:spcAft>
-              <a:defRPr sz="1050" b="1">
+              <a:t>Review</a:t>
+            </a:r>
+          </a:p>
+          <a:p>
+            <a:pPr>
+              <a:lnSpc>
+                <a:spcPts val="1296"/>
+              </a:lnSpc>
+              <a:spcBef>
+                <a:spcPts val="0"/>
+              </a:spcBef>
+              <a:spcAft>
+                <a:spcPts val="0"/>
+              </a:spcAft>
+              <a:defRPr sz="1200" b="1">
                 <a:solidFill>
                   <a:srgbClr val="173A42"/>
                 </a:solidFill>
@@ -13394,68 +13006,21 @@
               </a:defRPr>
             </a:pPr>
             <a:r>
-              <a:t>and memory</a:t>
-            </a:r>
-          </a:p>
-        </p:txBody>
-      </p:sp>
-      <p:sp>
-        <p:nvSpPr>
-          <p:cNvPr id="39" name="Rounded Rectangle 38"/>
-          <p:cNvSpPr/>
-          <p:nvPr/>
-        </p:nvSpPr>
-        <p:spPr>
-          <a:xfrm>
-            <a:off x="5181600" y="4724400"/>
-            <a:ext cx="2235200" cy="762000"/>
-          </a:xfrm>
-          <a:prstGeom prst="roundRect">
-            <a:avLst>
-              <a:gd name="adj" fmla="val 13333"/>
-            </a:avLst>
-          </a:prstGeom>
-          <a:solidFill>
-            <a:srgbClr val="FFFFFF"/>
-          </a:solidFill>
-          <a:ln w="8890">
-            <a:solidFill>
-              <a:srgbClr val="DCE6E2"/>
-            </a:solidFill>
-          </a:ln>
-        </p:spPr>
-        <p:style>
-          <a:lnRef idx="1">
-            <a:schemeClr val="accent1"/>
-          </a:lnRef>
-          <a:fillRef idx="3">
-            <a:schemeClr val="accent1"/>
-          </a:fillRef>
-          <a:effectRef idx="2">
-            <a:schemeClr val="accent1"/>
-          </a:effectRef>
-          <a:fontRef idx="minor">
-            <a:schemeClr val="lt1"/>
-          </a:fontRef>
-        </p:style>
-        <p:txBody>
-          <a:bodyPr rtlCol="0" anchor="ctr"/>
-          <a:lstStyle/>
-          <a:p>
-            <a:pPr algn="ctr"/>
-          </a:p>
-        </p:txBody>
-      </p:sp>
-      <p:sp>
-        <p:nvSpPr>
-          <p:cNvPr id="40" name="TextBox 39"/>
+              <a:t>prices</a:t>
+            </a:r>
+          </a:p>
+        </p:txBody>
+      </p:sp>
+      <p:sp>
+        <p:nvSpPr>
+          <p:cNvPr id="51" name="TextBox 50"/>
           <p:cNvSpPr txBox="1"/>
           <p:nvPr/>
         </p:nvSpPr>
         <p:spPr>
           <a:xfrm>
-            <a:off x="5308600" y="4851400"/>
-            <a:ext cx="1981200" cy="533400"/>
+            <a:off x="914400" y="5143500"/>
+            <a:ext cx="7264400" cy="254000"/>
           </a:xfrm>
           <a:prstGeom prst="rect">
             <a:avLst/>
@@ -13470,166 +13035,30 @@
           <a:p>
             <a:pPr>
               <a:lnSpc>
-                <a:spcPts val="1134"/>
-              </a:lnSpc>
-              <a:spcBef>
-                <a:spcPts val="0"/>
-              </a:spcBef>
-              <a:spcAft>
-                <a:spcPts val="0"/>
-              </a:spcAft>
-              <a:defRPr sz="1050" b="1">
-                <a:solidFill>
-                  <a:srgbClr val="173A42"/>
-                </a:solidFill>
-                <a:latin typeface="DejaVu Sans"/>
-              </a:defRPr>
-            </a:pPr>
-            <a:r>
-              <a:t>Check result</a:t>
-            </a:r>
-          </a:p>
-          <a:p>
-            <a:pPr>
-              <a:lnSpc>
-                <a:spcPts val="1134"/>
-              </a:lnSpc>
-              <a:spcBef>
-                <a:spcPts val="0"/>
-              </a:spcBef>
-              <a:spcAft>
-                <a:spcPts val="0"/>
-              </a:spcAft>
-              <a:defRPr sz="1050" b="1">
-                <a:solidFill>
-                  <a:srgbClr val="173A42"/>
-                </a:solidFill>
-                <a:latin typeface="DejaVu Sans"/>
-              </a:defRPr>
-            </a:pPr>
-            <a:r>
-              <a:t>and continue or stop</a:t>
-            </a:r>
-          </a:p>
-        </p:txBody>
-      </p:sp>
-      <p:sp>
-        <p:nvSpPr>
-          <p:cNvPr id="41" name="Rounded Rectangle 40"/>
-          <p:cNvSpPr/>
-          <p:nvPr/>
-        </p:nvSpPr>
-        <p:spPr>
-          <a:xfrm>
-            <a:off x="7645400" y="4724400"/>
-            <a:ext cx="1727200" cy="762000"/>
-          </a:xfrm>
-          <a:prstGeom prst="roundRect">
-            <a:avLst>
-              <a:gd name="adj" fmla="val 13333"/>
-            </a:avLst>
-          </a:prstGeom>
-          <a:solidFill>
-            <a:srgbClr val="CAEFA1"/>
-          </a:solidFill>
-          <a:ln w="8890">
-            <a:solidFill>
-              <a:srgbClr val="CAEFA1"/>
-            </a:solidFill>
-          </a:ln>
-        </p:spPr>
-        <p:style>
-          <a:lnRef idx="1">
-            <a:schemeClr val="accent1"/>
-          </a:lnRef>
-          <a:fillRef idx="3">
-            <a:schemeClr val="accent1"/>
-          </a:fillRef>
-          <a:effectRef idx="2">
-            <a:schemeClr val="accent1"/>
-          </a:effectRef>
-          <a:fontRef idx="minor">
-            <a:schemeClr val="lt1"/>
-          </a:fontRef>
-        </p:style>
-        <p:txBody>
-          <a:bodyPr rtlCol="0" anchor="ctr"/>
-          <a:lstStyle/>
-          <a:p>
-            <a:pPr algn="ctr"/>
-          </a:p>
-        </p:txBody>
-      </p:sp>
-      <p:sp>
-        <p:nvSpPr>
-          <p:cNvPr id="42" name="TextBox 41"/>
-          <p:cNvSpPr txBox="1"/>
-          <p:nvPr/>
-        </p:nvSpPr>
-        <p:spPr>
-          <a:xfrm>
-            <a:off x="7772400" y="4851400"/>
-            <a:ext cx="1473200" cy="533400"/>
-          </a:xfrm>
-          <a:prstGeom prst="rect">
-            <a:avLst/>
-          </a:prstGeom>
-          <a:noFill/>
-        </p:spPr>
-        <p:txBody>
-          <a:bodyPr wrap="none" lIns="0" rIns="0" tIns="0" bIns="0">
-            <a:spAutoFit/>
-          </a:bodyPr>
-          <a:lstStyle/>
-          <a:p>
-            <a:pPr>
-              <a:lnSpc>
-                <a:spcPts val="1134"/>
-              </a:lnSpc>
-              <a:spcBef>
-                <a:spcPts val="0"/>
-              </a:spcBef>
-              <a:spcAft>
-                <a:spcPts val="0"/>
-              </a:spcAft>
-              <a:defRPr sz="1050" b="1">
-                <a:solidFill>
-                  <a:srgbClr val="173A42"/>
-                </a:solidFill>
-                <a:latin typeface="DejaVu Sans"/>
-              </a:defRPr>
-            </a:pPr>
-            <a:r>
-              <a:t>Stop and cleanup</a:t>
-            </a:r>
-          </a:p>
-          <a:p>
-            <a:pPr>
-              <a:lnSpc>
-                <a:spcPts val="1134"/>
-              </a:lnSpc>
-              <a:spcBef>
-                <a:spcPts val="0"/>
-              </a:spcBef>
-              <a:spcAft>
-                <a:spcPts val="0"/>
-              </a:spcAft>
-              <a:defRPr sz="1050" b="1">
-                <a:solidFill>
-                  <a:srgbClr val="173A42"/>
-                </a:solidFill>
-                <a:latin typeface="DejaVu Sans"/>
-              </a:defRPr>
-            </a:pPr>
-            <a:r>
-              <a:t>when done</a:t>
-            </a:r>
-          </a:p>
-        </p:txBody>
-      </p:sp>
-      <p:sp>
-        <p:nvSpPr>
-          <p:cNvPr id="43" name="Rounded Rectangle 42"/>
+                <a:spcPts val="1524"/>
+              </a:lnSpc>
+              <a:spcBef>
+                <a:spcPts val="0"/>
+              </a:spcBef>
+              <a:spcAft>
+                <a:spcPts val="0"/>
+              </a:spcAft>
+              <a:defRPr sz="1200" b="1">
+                <a:solidFill>
+                  <a:srgbClr val="008C7B"/>
+                </a:solidFill>
+                <a:latin typeface="DejaVu Sans"/>
+              </a:defRPr>
+            </a:pPr>
+            <a:r>
+              <a:t>Any terminal state → get result → delete</a:t>
+            </a:r>
+          </a:p>
+        </p:txBody>
+      </p:sp>
+      <p:sp>
+        <p:nvSpPr>
+          <p:cNvPr id="52" name="Rounded Rectangle 51"/>
           <p:cNvSpPr/>
           <p:nvPr/>
         </p:nvSpPr>
@@ -13674,7 +13103,7 @@
       </p:sp>
       <p:sp>
         <p:nvSpPr>
-          <p:cNvPr id="44" name="TextBox 43"/>
+          <p:cNvPr id="53" name="TextBox 52"/>
           <p:cNvSpPr txBox="1"/>
           <p:nvPr/>
         </p:nvSpPr>
@@ -13712,7 +13141,7 @@
               </a:defRPr>
             </a:pPr>
             <a:r>
-              <a:t>The starting skill is the</a:t>
+              <a:t>Skill injected into the</a:t>
             </a:r>
           </a:p>
           <a:p>
@@ -13734,14 +13163,14 @@
               </a:defRPr>
             </a:pPr>
             <a:r>
-              <a:t>vending-machine skill.</a:t>
-            </a:r>
-          </a:p>
-        </p:txBody>
-      </p:sp>
-      <p:sp>
-        <p:nvSpPr>
-          <p:cNvPr id="45" name="Rounded Rectangle 44"/>
+              <a:t>prompt</a:t>
+            </a:r>
+          </a:p>
+        </p:txBody>
+      </p:sp>
+      <p:sp>
+        <p:nvSpPr>
+          <p:cNvPr id="54" name="Rounded Rectangle 53"/>
           <p:cNvSpPr/>
           <p:nvPr/>
         </p:nvSpPr>
@@ -13786,7 +13215,7 @@
       </p:sp>
       <p:sp>
         <p:nvSpPr>
-          <p:cNvPr id="46" name="TextBox 45"/>
+          <p:cNvPr id="55" name="TextBox 54"/>
           <p:cNvSpPr txBox="1"/>
           <p:nvPr/>
         </p:nvSpPr>
@@ -13824,64 +13253,20 @@
               </a:defRPr>
             </a:pPr>
             <a:r>
-              <a:t>The launcher uses one</a:t>
-            </a:r>
-          </a:p>
-          <a:p>
-            <a:pPr>
-              <a:lnSpc>
-                <a:spcPts val="1822"/>
-              </a:lnSpc>
-              <a:spcBef>
-                <a:spcPts val="0"/>
-              </a:spcBef>
-              <a:spcAft>
-                <a:spcPts val="0"/>
-              </a:spcAft>
-              <a:defRPr sz="1350" b="0">
-                <a:solidFill>
-                  <a:srgbClr val="173A42"/>
-                </a:solidFill>
-                <a:latin typeface="DejaVu Sans"/>
-              </a:defRPr>
-            </a:pPr>
-            <a:r>
-              <a:t>skill and only read,bash</a:t>
-            </a:r>
-          </a:p>
-          <a:p>
-            <a:pPr>
-              <a:lnSpc>
-                <a:spcPts val="1822"/>
-              </a:lnSpc>
-              <a:spcBef>
-                <a:spcPts val="0"/>
-              </a:spcBef>
-              <a:spcAft>
-                <a:spcPts val="0"/>
-              </a:spcAft>
-              <a:defRPr sz="1350" b="0">
-                <a:solidFill>
-                  <a:srgbClr val="173A42"/>
-                </a:solidFill>
-                <a:latin typeface="DejaVu Sans"/>
-              </a:defRPr>
-            </a:pPr>
-            <a:r>
-              <a:t>tools.</a:t>
-            </a:r>
-          </a:p>
-        </p:txBody>
-      </p:sp>
-      <p:sp>
-        <p:nvSpPr>
-          <p:cNvPr id="47" name="Rounded Rectangle 46"/>
+              <a:t>Validate before HTTP</a:t>
+            </a:r>
+          </a:p>
+        </p:txBody>
+      </p:sp>
+      <p:sp>
+        <p:nvSpPr>
+          <p:cNvPr id="56" name="Rounded Rectangle 55"/>
           <p:cNvSpPr/>
           <p:nvPr/>
         </p:nvSpPr>
         <p:spPr>
           <a:xfrm>
-            <a:off x="8864600" y="4212272"/>
+            <a:off x="8864600" y="3749357"/>
             <a:ext cx="63500" cy="63500"/>
           </a:xfrm>
           <a:prstGeom prst="roundRect">
@@ -13920,13 +13305,13 @@
       </p:sp>
       <p:sp>
         <p:nvSpPr>
-          <p:cNvPr id="48" name="TextBox 47"/>
+          <p:cNvPr id="57" name="TextBox 56"/>
           <p:cNvSpPr txBox="1"/>
           <p:nvPr/>
         </p:nvSpPr>
         <p:spPr>
           <a:xfrm>
-            <a:off x="9093200" y="4136072"/>
+            <a:off x="9093200" y="3673157"/>
             <a:ext cx="2235200" cy="1397000"/>
           </a:xfrm>
           <a:prstGeom prst="rect">
@@ -13958,86 +13343,20 @@
               </a:defRPr>
             </a:pPr>
             <a:r>
-              <a:t>The guard enforces</a:t>
-            </a:r>
-          </a:p>
-          <a:p>
-            <a:pPr>
-              <a:lnSpc>
-                <a:spcPts val="1822"/>
-              </a:lnSpc>
-              <a:spcBef>
-                <a:spcPts val="0"/>
-              </a:spcBef>
-              <a:spcAft>
-                <a:spcPts val="0"/>
-              </a:spcAft>
-              <a:defRPr sz="1350" b="0">
-                <a:solidFill>
-                  <a:srgbClr val="173A42"/>
-                </a:solidFill>
-                <a:latin typeface="DejaVu Sans"/>
-              </a:defRPr>
-            </a:pPr>
-            <a:r>
-              <a:t>observe before act and</a:t>
-            </a:r>
-          </a:p>
-          <a:p>
-            <a:pPr>
-              <a:lnSpc>
-                <a:spcPts val="1822"/>
-              </a:lnSpc>
-              <a:spcBef>
-                <a:spcPts val="0"/>
-              </a:spcBef>
-              <a:spcAft>
-                <a:spcPts val="0"/>
-              </a:spcAft>
-              <a:defRPr sz="1350" b="0">
-                <a:solidFill>
-                  <a:srgbClr val="173A42"/>
-                </a:solidFill>
-                <a:latin typeface="DejaVu Sans"/>
-              </a:defRPr>
-            </a:pPr>
-            <a:r>
-              <a:t>set_price before</a:t>
-            </a:r>
-          </a:p>
-          <a:p>
-            <a:pPr>
-              <a:lnSpc>
-                <a:spcPts val="1822"/>
-              </a:lnSpc>
-              <a:spcBef>
-                <a:spcPts val="0"/>
-              </a:spcBef>
-              <a:spcAft>
-                <a:spcPts val="0"/>
-              </a:spcAft>
-              <a:defRPr sz="1350" b="0">
-                <a:solidFill>
-                  <a:srgbClr val="173A42"/>
-                </a:solidFill>
-                <a:latin typeface="DejaVu Sans"/>
-              </a:defRPr>
-            </a:pPr>
-            <a:r>
-              <a:t>stock_items.</a:t>
-            </a:r>
-          </a:p>
-        </p:txBody>
-      </p:sp>
-      <p:sp>
-        <p:nvSpPr>
-          <p:cNvPr id="49" name="Rounded Rectangle 48"/>
+              <a:t>One request at a time</a:t>
+            </a:r>
+          </a:p>
+        </p:txBody>
+      </p:sp>
+      <p:sp>
+        <p:nvSpPr>
+          <p:cNvPr id="58" name="Rounded Rectangle 57"/>
           <p:cNvSpPr/>
           <p:nvPr/>
         </p:nvSpPr>
         <p:spPr>
           <a:xfrm>
-            <a:off x="8864600" y="5217795"/>
+            <a:off x="8864600" y="4060507"/>
             <a:ext cx="63500" cy="63500"/>
           </a:xfrm>
           <a:prstGeom prst="roundRect">
@@ -14076,13 +13395,13 @@
       </p:sp>
       <p:sp>
         <p:nvSpPr>
-          <p:cNvPr id="50" name="TextBox 49"/>
+          <p:cNvPr id="59" name="TextBox 58"/>
           <p:cNvSpPr txBox="1"/>
           <p:nvPr/>
         </p:nvSpPr>
         <p:spPr>
           <a:xfrm>
-            <a:off x="9093200" y="5141595"/>
+            <a:off x="9093200" y="3984307"/>
             <a:ext cx="2235200" cy="1397000"/>
           </a:xfrm>
           <a:prstGeom prst="rect">
@@ -14114,7 +13433,7 @@
               </a:defRPr>
             </a:pPr>
             <a:r>
-              <a:t>SKILL.md explains the</a:t>
+              <a:t>Persist and reconcile</a:t>
             </a:r>
           </a:p>
           <a:p>
@@ -14136,58 +13455,14 @@
               </a:defRPr>
             </a:pPr>
             <a:r>
-              <a:t>public graph; the</a:t>
-            </a:r>
-          </a:p>
-          <a:p>
-            <a:pPr>
-              <a:lnSpc>
-                <a:spcPts val="1822"/>
-              </a:lnSpc>
-              <a:spcBef>
-                <a:spcPts val="0"/>
-              </a:spcBef>
-              <a:spcAft>
-                <a:spcPts val="0"/>
-              </a:spcAft>
-              <a:defRPr sz="1350" b="0">
-                <a:solidFill>
-                  <a:srgbClr val="173A42"/>
-                </a:solidFill>
-                <a:latin typeface="DejaVu Sans"/>
-              </a:defRPr>
-            </a:pPr>
-            <a:r>
-              <a:t>extension enforces it at</a:t>
-            </a:r>
-          </a:p>
-          <a:p>
-            <a:pPr>
-              <a:lnSpc>
-                <a:spcPts val="1822"/>
-              </a:lnSpc>
-              <a:spcBef>
-                <a:spcPts val="0"/>
-              </a:spcBef>
-              <a:spcAft>
-                <a:spcPts val="0"/>
-              </a:spcAft>
-              <a:defRPr sz="1350" b="0">
-                <a:solidFill>
-                  <a:srgbClr val="173A42"/>
-                </a:solidFill>
-                <a:latin typeface="DejaVu Sans"/>
-              </a:defRPr>
-            </a:pPr>
-            <a:r>
-              <a:t>runtime.</a:t>
-            </a:r>
-          </a:p>
-        </p:txBody>
-      </p:sp>
-      <p:sp>
-        <p:nvSpPr>
-          <p:cNvPr id="51" name="Rounded Rectangle 50"/>
+              <a:t>state</a:t>
+            </a:r>
+          </a:p>
+        </p:txBody>
+      </p:sp>
+      <p:sp>
+        <p:nvSpPr>
+          <p:cNvPr id="60" name="Rounded Rectangle 59"/>
           <p:cNvSpPr/>
           <p:nvPr/>
         </p:nvSpPr>
@@ -14232,7 +13507,7 @@
       </p:sp>
       <p:sp>
         <p:nvSpPr>
-          <p:cNvPr id="52" name="TextBox 51"/>
+          <p:cNvPr id="61" name="TextBox 60"/>
           <p:cNvSpPr txBox="1"/>
           <p:nvPr/>
         </p:nvSpPr>
@@ -14270,14 +13545,14 @@
               </a:defRPr>
             </a:pPr>
             <a:r>
-              <a:t>Participants should see the harness as a guarded public-state loop, not a free-form planner.</a:t>
+              <a:t>A midnight crossing interrupts business actions for daily synchronization.</a:t>
             </a:r>
           </a:p>
         </p:txBody>
       </p:sp>
       <p:cxnSp>
         <p:nvCxnSpPr>
-          <p:cNvPr id="53" name="Connector 52"/>
+          <p:cNvPr id="62" name="Connector 61"/>
           <p:cNvCxnSpPr/>
           <p:nvPr/>
         </p:nvCxnSpPr>
@@ -14312,7 +13587,7 @@
       </p:cxnSp>
       <p:sp>
         <p:nvSpPr>
-          <p:cNvPr id="54" name="TextBox 53"/>
+          <p:cNvPr id="63" name="TextBox 62"/>
           <p:cNvSpPr txBox="1"/>
           <p:nvPr/>
         </p:nvSpPr>
@@ -14357,7 +13632,7 @@
       </p:sp>
       <p:sp>
         <p:nvSpPr>
-          <p:cNvPr id="55" name="TextBox 54"/>
+          <p:cNvPr id="64" name="TextBox 63"/>
           <p:cNvSpPr txBox="1"/>
           <p:nvPr/>
         </p:nvSpPr>
@@ -14769,7 +14044,7 @@
               </a:defRPr>
             </a:pPr>
             <a:r>
-              <a:t>Validate IDs, integer cents, and quantities</a:t>
+              <a:t>Validate IDs, quantities, prices, and stock</a:t>
             </a:r>
           </a:p>
         </p:txBody>
@@ -14859,7 +14134,7 @@
               </a:defRPr>
             </a:pPr>
             <a:r>
-              <a:t>Execute actions serially</a:t>
+              <a:t>Serialize requests; check each response</a:t>
             </a:r>
           </a:p>
         </p:txBody>
@@ -14949,7 +14224,7 @@
               </a:defRPr>
             </a:pPr>
             <a:r>
-              <a:t>Retry transient failures with the SAME key</a:t>
+              <a:t>Retry once with the same request key</a:t>
             </a:r>
           </a:p>
         </p:txBody>
@@ -15039,7 +14314,7 @@
               </a:defRPr>
             </a:pPr>
             <a:r>
-              <a:t>Bound model timeouts and poll status</a:t>
+              <a:t>Check status and reconcile on resume</a:t>
             </a:r>
           </a:p>
         </p:txBody>
@@ -15262,7 +14537,7 @@
               </a:defRPr>
             </a:pPr>
             <a:r>
-              <a:t>Treat 410 as ended; inspect 409 state</a:t>
+              <a:t>Process terminal state from any response</a:t>
             </a:r>
           </a:p>
         </p:txBody>
@@ -15352,7 +14627,7 @@
               </a:defRPr>
             </a:pPr>
             <a:r>
-              <a:t>Retrieve the terminal summary</a:t>
+              <a:t>Record GET /result before deletion</a:t>
             </a:r>
           </a:p>
         </p:txBody>
@@ -15442,7 +14717,7 @@
               </a:defRPr>
             </a:pPr>
             <a:r>
-              <a:t>Preserve logs and the final public snapshot</a:t>
+              <a:t>Preserve the Pi session and final result</a:t>
             </a:r>
           </a:p>
         </p:txBody>
@@ -15532,7 +14807,7 @@
               </a:defRPr>
             </a:pPr>
             <a:r>
-              <a:t>Always attempt cleanup</a:t>
+              <a:t>Delete; never auto-create a replacement</a:t>
             </a:r>
           </a:p>
         </p:txBody>
@@ -15898,7 +15173,7 @@
               </a:defRPr>
             </a:pPr>
             <a:r>
-              <a:t>Plan for three separate resource limits.</a:t>
+              <a:t>Know which limits are actually enforced.</a:t>
             </a:r>
           </a:p>
         </p:txBody>
@@ -15988,7 +15263,7 @@
               </a:defRPr>
             </a:pPr>
             <a:r>
-              <a:t>7,200 s</a:t>
+              <a:t>3,600 s</a:t>
             </a:r>
           </a:p>
         </p:txBody>
@@ -16033,7 +15308,7 @@
               </a:defRPr>
             </a:pPr>
             <a:r>
-              <a:t>Default environment lifetime</a:t>
+              <a:t>Practice environment lifetime</a:t>
             </a:r>
           </a:p>
         </p:txBody>
@@ -16123,7 +15398,7 @@
               </a:defRPr>
             </a:pPr>
             <a:r>
-              <a:t>100,000</a:t>
+              <a:t>365 days</a:t>
             </a:r>
           </a:p>
         </p:txBody>
@@ -16168,29 +15443,7 @@
               </a:defRPr>
             </a:pPr>
             <a:r>
-              <a:t>Default input + output token</a:t>
-            </a:r>
-          </a:p>
-          <a:p>
-            <a:pPr>
-              <a:lnSpc>
-                <a:spcPts val="1714"/>
-              </a:lnSpc>
-              <a:spcBef>
-                <a:spcPts val="0"/>
-              </a:spcBef>
-              <a:spcAft>
-                <a:spcPts val="0"/>
-              </a:spcAft>
-              <a:defRPr sz="1350" b="0">
-                <a:solidFill>
-                  <a:srgbClr val="557079"/>
-                </a:solidFill>
-                <a:latin typeface="DejaVu Sans"/>
-              </a:defRPr>
-            </a:pPr>
-            <a:r>
-              <a:t>budget</a:t>
+              <a:t>Practice simulated-day cap</a:t>
             </a:r>
           </a:p>
         </p:txBody>
@@ -16280,7 +15533,7 @@
               </a:defRPr>
             </a:pPr>
             <a:r>
-              <a:t>1,000</a:t>
+              <a:t>Not set</a:t>
             </a:r>
           </a:p>
         </p:txBody>
@@ -16325,7 +15578,7 @@
               </a:defRPr>
             </a:pPr>
             <a:r>
-              <a:t>Default policy-call ceiling</a:t>
+              <a:t>Pi total token / call budget</a:t>
             </a:r>
           </a:p>
         </p:txBody>
@@ -16415,7 +15668,7 @@
               </a:defRPr>
             </a:pPr>
             <a:r>
-              <a:t>Reserve input and maximum output tokens before a model call.</a:t>
+              <a:t>Model usage is recorded, but no total token budget is enforced.</a:t>
             </a:r>
           </a:p>
         </p:txBody>
@@ -16505,7 +15758,7 @@
               </a:defRPr>
             </a:pPr>
             <a:r>
-              <a:t>History, tool schemas, and summaries also cost tokens.</a:t>
+              <a:t>Context, tool schemas, and responses consume model tokens.</a:t>
             </a:r>
           </a:p>
         </p:txBody>
@@ -16595,7 +15848,7 @@
               </a:defRPr>
             </a:pPr>
             <a:r>
-              <a:t>Stopping on a harness budget is a truncated run, not natural completion.</a:t>
+              <a:t>Official model and compute allowances remain organizer decisions.</a:t>
             </a:r>
           </a:p>
         </p:txBody>
@@ -16685,7 +15938,7 @@
               </a:defRPr>
             </a:pPr>
             <a:r>
-              <a:t>Current starter defaults. Official model, compute, and budget rules will be announced.</a:t>
+              <a:t>Configured service limits and participant compute policies are separate.</a:t>
             </a:r>
           </a:p>
         </p:txBody>
@@ -16961,7 +16214,7 @@
               </a:defRPr>
             </a:pPr>
             <a:r>
-              <a:t>Measure tokens where decisions happen.</a:t>
+              <a:t>Distinguish recorded usage from attribution.</a:t>
             </a:r>
           </a:p>
         </p:txBody>
@@ -17229,7 +16482,7 @@
               </a:defRPr>
             </a:pPr>
             <a:r>
-              <a:t>Per action</a:t>
+              <a:t>Pi session</a:t>
             </a:r>
           </a:p>
         </p:txBody>
@@ -17274,7 +16527,7 @@
               </a:defRPr>
             </a:pPr>
             <a:r>
-              <a:t>Input, output, and total tokens</a:t>
+              <a:t>Raw provider usage</a:t>
             </a:r>
           </a:p>
         </p:txBody>
@@ -17319,29 +16572,7 @@
               </a:defRPr>
             </a:pPr>
             <a:r>
-              <a:t>Full provider-call usage, including</a:t>
-            </a:r>
-          </a:p>
-          <a:p>
-            <a:pPr>
-              <a:lnSpc>
-                <a:spcPts val="1844"/>
-              </a:lnSpc>
-              <a:spcBef>
-                <a:spcPts val="0"/>
-              </a:spcBef>
-              <a:spcAft>
-                <a:spcPts val="0"/>
-              </a:spcAft>
-              <a:defRPr sz="1550" b="0">
-                <a:solidFill>
-                  <a:srgbClr val="173A42"/>
-                </a:solidFill>
-                <a:latin typeface="DejaVu Sans"/>
-              </a:defRPr>
-            </a:pPr>
-            <a:r>
-              <a:t>context</a:t>
+              <a:t>Inspect model messages</a:t>
             </a:r>
           </a:p>
         </p:txBody>
@@ -17429,7 +16660,7 @@
               </a:defRPr>
             </a:pPr>
             <a:r>
-              <a:t>Per simulated day</a:t>
+              <a:t>Viewer totals</a:t>
             </a:r>
           </a:p>
         </p:txBody>
@@ -17474,7 +16705,7 @@
               </a:defRPr>
             </a:pPr>
             <a:r>
-              <a:t>Tokens and model-call count</a:t>
+              <a:t>Input / output tokens; calls</a:t>
             </a:r>
           </a:p>
         </p:txBody>
@@ -17519,7 +16750,7 @@
               </a:defRPr>
             </a:pPr>
             <a:r>
-              <a:t>Assigned to the model decision's day</a:t>
+              <a:t>Compare usage with progress</a:t>
             </a:r>
           </a:p>
         </p:txBody>
@@ -17607,7 +16838,7 @@
               </a:defRPr>
             </a:pPr>
             <a:r>
-              <a:t>Shared response</a:t>
+              <a:t>Per action</a:t>
             </a:r>
           </a:p>
         </p:txBody>
@@ -17652,7 +16883,7 @@
               </a:defRPr>
             </a:pPr>
             <a:r>
-              <a:t>Linked model-call ID</a:t>
+              <a:t>Unavailable for Pi traces</a:t>
             </a:r>
           </a:p>
         </p:txBody>
@@ -17697,29 +16928,7 @@
               </a:defRPr>
             </a:pPr>
             <a:r>
-              <a:t>Charge first action once; later actions</a:t>
-            </a:r>
-          </a:p>
-          <a:p>
-            <a:pPr>
-              <a:lnSpc>
-                <a:spcPts val="1844"/>
-              </a:lnSpc>
-              <a:spcBef>
-                <a:spcPts val="0"/>
-              </a:spcBef>
-              <a:spcAft>
-                <a:spcPts val="0"/>
-              </a:spcAft>
-              <a:defRPr sz="1550" b="0">
-                <a:solidFill>
-                  <a:srgbClr val="173A42"/>
-                </a:solidFill>
-                <a:latin typeface="DejaVu Sans"/>
-              </a:defRPr>
-            </a:pPr>
-            <a:r>
-              <a:t>add zero</a:t>
+              <a:t>Do not interpret as zero</a:t>
             </a:r>
           </a:p>
         </p:txBody>
@@ -17807,7 +17016,7 @@
               </a:defRPr>
             </a:pPr>
             <a:r>
-              <a:t>Timeout</a:t>
+              <a:t>Per simulated day</a:t>
             </a:r>
           </a:p>
         </p:txBody>
@@ -17852,7 +17061,7 @@
               </a:defRPr>
             </a:pPr>
             <a:r>
-              <a:t>Estimated reservation</a:t>
+              <a:t>Unavailable for Pi traces</a:t>
             </a:r>
           </a:p>
         </p:txBody>
@@ -17897,29 +17106,7 @@
               </a:defRPr>
             </a:pPr>
             <a:r>
-              <a:t>Clearly labeled; not measured token</a:t>
-            </a:r>
-          </a:p>
-          <a:p>
-            <a:pPr>
-              <a:lnSpc>
-                <a:spcPts val="1844"/>
-              </a:lnSpc>
-              <a:spcBef>
-                <a:spcPts val="0"/>
-              </a:spcBef>
-              <a:spcAft>
-                <a:spcPts val="0"/>
-              </a:spcAft>
-              <a:defRPr sz="1550" b="0">
-                <a:solidFill>
-                  <a:srgbClr val="173A42"/>
-                </a:solidFill>
-                <a:latin typeface="DejaVu Sans"/>
-              </a:defRPr>
-            </a:pPr>
-            <a:r>
-              <a:t>usage</a:t>
+              <a:t>Requires decision-time attribution</a:t>
             </a:r>
           </a:p>
         </p:txBody>
@@ -18007,7 +17194,7 @@
               </a:defRPr>
             </a:pPr>
             <a:r>
-              <a:t>Run summary</a:t>
+              <a:t>Controller state</a:t>
             </a:r>
           </a:p>
         </p:txBody>
@@ -18052,7 +17239,7 @@
               </a:defRPr>
             </a:pPr>
             <a:r>
-              <a:t>Totals + daily breakdown</a:t>
+              <a:t>Persistent session checkpoints</a:t>
             </a:r>
           </a:p>
         </p:txBody>
@@ -18097,7 +17284,7 @@
               </a:defRPr>
             </a:pPr>
             <a:r>
-              <a:t>Check cost against business progress</a:t>
+              <a:t>Recovery data, not token usage</a:t>
             </a:r>
           </a:p>
         </p:txBody>
@@ -18187,7 +17374,7 @@
               </a:defRPr>
             </a:pPr>
             <a:r>
-              <a:t>Scripted actions use zero model tokens. Missing legacy attribution is unavailable.</a:t>
+              <a:t>Legacy run formats can carry finer attribution; current Pi traces do not.</a:t>
             </a:r>
           </a:p>
         </p:txBody>
@@ -18598,7 +17785,7 @@
               </a:defRPr>
             </a:pPr>
             <a:r>
-              <a:t>python3 -m pip install -e '.[test]'</a:t>
+              <a:t># One-time setup</a:t>
             </a:r>
           </a:p>
           <a:p>
@@ -18619,6 +17806,9 @@
                 <a:latin typeface="DejaVu Sans Mono"/>
               </a:defRPr>
             </a:pPr>
+            <a:r>
+              <a:t>./scripts/install_pi.sh</a:t>
+            </a:r>
           </a:p>
           <a:p>
             <a:pPr>
@@ -18639,7 +17829,7 @@
               </a:defRPr>
             </a:pPr>
             <a:r>
-              <a:t>./scripts/run_environment.sh smoke --agent listed</a:t>
+              <a:t># Run each command in a separate terminal:</a:t>
             </a:r>
           </a:p>
           <a:p>
@@ -18661,7 +17851,7 @@
               </a:defRPr>
             </a:pPr>
             <a:r>
-              <a:t>./scripts/run_environment.sh smoke --agent negotiating</a:t>
+              <a:t>bash start_env.sh configs/environment.json</a:t>
             </a:r>
           </a:p>
           <a:p>
@@ -18682,6 +17872,9 @@
                 <a:latin typeface="DejaVu Sans Mono"/>
               </a:defRPr>
             </a:pPr>
+            <a:r>
+              <a:t>./scripts/serve_qwen_vllm.sh</a:t>
+            </a:r>
           </a:p>
           <a:p>
             <a:pPr>
@@ -18702,29 +17895,29 @@
               </a:defRPr>
             </a:pPr>
             <a:r>
+              <a:t>./scripts/run_pi_agent.sh</a:t>
+            </a:r>
+          </a:p>
+          <a:p>
+            <a:pPr>
+              <a:lnSpc>
+                <a:spcPts val="2142"/>
+              </a:lnSpc>
+              <a:spcBef>
+                <a:spcPts val="0"/>
+              </a:spcBef>
+              <a:spcAft>
+                <a:spcPts val="0"/>
+              </a:spcAft>
+              <a:defRPr sz="1400" b="0">
+                <a:solidFill>
+                  <a:srgbClr val="FFFFFF"/>
+                </a:solidFill>
+                <a:latin typeface="DejaVu Sans Mono"/>
+              </a:defRPr>
+            </a:pPr>
+            <a:r>
               <a:t>./scripts/view_runs.sh</a:t>
-            </a:r>
-          </a:p>
-          <a:p>
-            <a:pPr>
-              <a:lnSpc>
-                <a:spcPts val="2142"/>
-              </a:lnSpc>
-              <a:spcBef>
-                <a:spcPts val="0"/>
-              </a:spcBef>
-              <a:spcAft>
-                <a:spcPts val="0"/>
-              </a:spcAft>
-              <a:defRPr sz="1400" b="0">
-                <a:solidFill>
-                  <a:srgbClr val="FFFFFF"/>
-                </a:solidFill>
-                <a:latin typeface="DejaVu Sans Mono"/>
-              </a:defRPr>
-            </a:pPr>
-            <a:r>
-              <a:t># Open http://localhost:8080</a:t>
             </a:r>
           </a:p>
         </p:txBody>
@@ -18814,51 +18007,7 @@
               </a:defRPr>
             </a:pPr>
             <a:r>
-              <a:t>Use the supplied smoke</a:t>
-            </a:r>
-          </a:p>
-          <a:p>
-            <a:pPr>
-              <a:lnSpc>
-                <a:spcPts val="2092"/>
-              </a:lnSpc>
-              <a:spcBef>
-                <a:spcPts val="0"/>
-              </a:spcBef>
-              <a:spcAft>
-                <a:spcPts val="0"/>
-              </a:spcAft>
-              <a:defRPr sz="1550" b="0">
-                <a:solidFill>
-                  <a:srgbClr val="173A42"/>
-                </a:solidFill>
-                <a:latin typeface="DejaVu Sans"/>
-              </a:defRPr>
-            </a:pPr>
-            <a:r>
-              <a:t>environment for local</a:t>
-            </a:r>
-          </a:p>
-          <a:p>
-            <a:pPr>
-              <a:lnSpc>
-                <a:spcPts val="2092"/>
-              </a:lnSpc>
-              <a:spcBef>
-                <a:spcPts val="0"/>
-              </a:spcBef>
-              <a:spcAft>
-                <a:spcPts val="0"/>
-              </a:spcAft>
-              <a:defRPr sz="1550" b="0">
-                <a:solidFill>
-                  <a:srgbClr val="173A42"/>
-                </a:solidFill>
-                <a:latin typeface="DejaVu Sans"/>
-              </a:defRPr>
-            </a:pPr>
-            <a:r>
-              <a:t>development.</a:t>
+              <a:t>Start from the repository root.</a:t>
             </a:r>
           </a:p>
         </p:txBody>
@@ -18871,7 +18020,7 @@
         </p:nvSpPr>
         <p:spPr>
           <a:xfrm>
-            <a:off x="8293100" y="3369945"/>
+            <a:off x="8293100" y="2838450"/>
             <a:ext cx="63500" cy="63500"/>
           </a:xfrm>
           <a:prstGeom prst="roundRect">
@@ -18916,7 +18065,7 @@
         </p:nvSpPr>
         <p:spPr>
           <a:xfrm>
-            <a:off x="8521700" y="3293745"/>
+            <a:off x="8521700" y="2762250"/>
             <a:ext cx="3009900" cy="1397000"/>
           </a:xfrm>
           <a:prstGeom prst="rect">
@@ -18948,7 +18097,7 @@
               </a:defRPr>
             </a:pPr>
             <a:r>
-              <a:t>The run script owns a</a:t>
+              <a:t>The local model server needs</a:t>
             </a:r>
           </a:p>
           <a:p>
@@ -18970,7 +18119,7 @@
               </a:defRPr>
             </a:pPr>
             <a:r>
-              <a:t>temporary local service and</a:t>
+              <a:t>installed weights and suitable</a:t>
             </a:r>
           </a:p>
           <a:p>
@@ -18992,7 +18141,7 @@
               </a:defRPr>
             </a:pPr>
             <a:r>
-              <a:t>cleans it up.</a:t>
+              <a:t>hardware.</a:t>
             </a:r>
           </a:p>
         </p:txBody>
@@ -19005,7 +18154,7 @@
         </p:nvSpPr>
         <p:spPr>
           <a:xfrm>
-            <a:off x="8293100" y="4326890"/>
+            <a:off x="8293100" y="3795395"/>
             <a:ext cx="63500" cy="63500"/>
           </a:xfrm>
           <a:prstGeom prst="roundRect">
@@ -19050,7 +18199,7 @@
         </p:nvSpPr>
         <p:spPr>
           <a:xfrm>
-            <a:off x="8521700" y="4250690"/>
+            <a:off x="8521700" y="3719195"/>
             <a:ext cx="3009900" cy="1397000"/>
           </a:xfrm>
           <a:prstGeom prst="rect">
@@ -19082,7 +18231,7 @@
               </a:defRPr>
             </a:pPr>
             <a:r>
-              <a:t>Use the baselines to verify</a:t>
+              <a:t>Open localhost:8080 to</a:t>
             </a:r>
           </a:p>
           <a:p>
@@ -19104,29 +18253,7 @@
               </a:defRPr>
             </a:pPr>
             <a:r>
-              <a:t>your setup before replacing</a:t>
-            </a:r>
-          </a:p>
-          <a:p>
-            <a:pPr>
-              <a:lnSpc>
-                <a:spcPts val="2092"/>
-              </a:lnSpc>
-              <a:spcBef>
-                <a:spcPts val="0"/>
-              </a:spcBef>
-              <a:spcAft>
-                <a:spcPts val="0"/>
-              </a:spcAft>
-              <a:defRPr sz="1550" b="0">
-                <a:solidFill>
-                  <a:srgbClr val="173A42"/>
-                </a:solidFill>
-                <a:latin typeface="DejaVu Sans"/>
-              </a:defRPr>
-            </a:pPr>
-            <a:r>
-              <a:t>the policy.</a:t>
+              <a:t>inspect the trace.</a:t>
             </a:r>
           </a:p>
         </p:txBody>
@@ -19850,7 +18977,7 @@
               </a:defRPr>
             </a:pPr>
             <a:r>
-              <a:t>Score, net profit, and liquidity</a:t>
+              <a:t>Live profit and terminal score</a:t>
             </a:r>
           </a:p>
         </p:txBody>
@@ -19940,7 +19067,7 @@
               </a:defRPr>
             </a:pPr>
             <a:r>
-              <a:t>Sales by product and daily fees</a:t>
+              <a:t>Daily purchases, sales, and cash collection</a:t>
             </a:r>
           </a:p>
         </p:txBody>
@@ -20030,7 +19157,7 @@
               </a:defRPr>
             </a:pPr>
             <a:r>
-              <a:t>Cash trajectory and stock snapshots</a:t>
+              <a:t>Machine and storage snapshots</a:t>
             </a:r>
           </a:p>
         </p:txBody>
@@ -20343,7 +19470,7 @@
               </a:defRPr>
             </a:pPr>
             <a:r>
-              <a:t>Tokens by action and simulated day</a:t>
+              <a:t>Aggregate model usage and calls</a:t>
             </a:r>
           </a:p>
         </p:txBody>
@@ -20433,7 +19560,7 @@
               </a:defRPr>
             </a:pPr>
             <a:r>
-              <a:t>Context, memory, usage, and stop reason</a:t>
+              <a:t>Controller state and stop reason</a:t>
             </a:r>
           </a:p>
         </p:txBody>
@@ -21840,7 +20967,29 @@
               </a:defRPr>
             </a:pPr>
             <a:r>
-              <a:t>You design the harness. We fix the market.</a:t>
+              <a:t>You design the harness. We define the</a:t>
+            </a:r>
+          </a:p>
+          <a:p>
+            <a:pPr>
+              <a:lnSpc>
+                <a:spcPts val="3596"/>
+              </a:lnSpc>
+              <a:spcBef>
+                <a:spcPts val="0"/>
+              </a:spcBef>
+              <a:spcAft>
+                <a:spcPts val="0"/>
+              </a:spcAft>
+              <a:defRPr sz="3100" b="1">
+                <a:solidFill>
+                  <a:srgbClr val="173A42"/>
+                </a:solidFill>
+                <a:latin typeface="DejaVu Sans"/>
+              </a:defRPr>
+            </a:pPr>
+            <a:r>
+              <a:t>environment.</a:t>
             </a:r>
           </a:p>
         </p:txBody>
@@ -23192,29 +22341,7 @@
               </a:defRPr>
             </a:pPr>
             <a:r>
-              <a:t>Create or receive an ID, act, then retrieve</a:t>
-            </a:r>
-          </a:p>
-          <a:p>
-            <a:pPr>
-              <a:lnSpc>
-                <a:spcPts val="3596"/>
-              </a:lnSpc>
-              <a:spcBef>
-                <a:spcPts val="0"/>
-              </a:spcBef>
-              <a:spcAft>
-                <a:spcPts val="0"/>
-              </a:spcAft>
-              <a:defRPr sz="3100" b="1">
-                <a:solidFill>
-                  <a:srgbClr val="173A42"/>
-                </a:solidFill>
-                <a:latin typeface="DejaVu Sans"/>
-              </a:defRPr>
-            </a:pPr>
-            <a:r>
-              <a:t>results.</a:t>
+              <a:t>REST lifecycle: create, act, retrieve, delete.</a:t>
             </a:r>
           </a:p>
         </p:txBody>
@@ -23273,7 +22400,7 @@
         <p:spPr>
           <a:xfrm>
             <a:off x="825500" y="2247900"/>
-            <a:ext cx="2159000" cy="228600"/>
+            <a:ext cx="3111500" cy="228600"/>
           </a:xfrm>
           <a:prstGeom prst="rect">
             <a:avLst/>
@@ -23317,8 +22444,8 @@
         </p:nvSpPr>
         <p:spPr>
           <a:xfrm>
-            <a:off x="3302000" y="2247900"/>
-            <a:ext cx="3746500" cy="228600"/>
+            <a:off x="4254500" y="2247900"/>
+            <a:ext cx="2730500" cy="228600"/>
           </a:xfrm>
           <a:prstGeom prst="rect">
             <a:avLst/>
@@ -23362,8 +22489,8 @@
         </p:nvSpPr>
         <p:spPr>
           <a:xfrm>
-            <a:off x="7366000" y="2247900"/>
-            <a:ext cx="4013200" cy="228600"/>
+            <a:off x="7302500" y="2247900"/>
+            <a:ext cx="4076700" cy="228600"/>
           </a:xfrm>
           <a:prstGeom prst="rect">
             <a:avLst/>
@@ -23451,7 +22578,7 @@
         <p:spPr>
           <a:xfrm>
             <a:off x="825500" y="2705100"/>
-            <a:ext cx="2159000" cy="436880"/>
+            <a:ext cx="3111500" cy="436880"/>
           </a:xfrm>
           <a:prstGeom prst="rect">
             <a:avLst/>
@@ -23495,8 +22622,8 @@
         </p:nvSpPr>
         <p:spPr>
           <a:xfrm>
-            <a:off x="3302000" y="2705100"/>
-            <a:ext cx="3746500" cy="436880"/>
+            <a:off x="4254500" y="2705100"/>
+            <a:ext cx="2730500" cy="436880"/>
           </a:xfrm>
           <a:prstGeom prst="rect">
             <a:avLst/>
@@ -23540,8 +22667,8 @@
         </p:nvSpPr>
         <p:spPr>
           <a:xfrm>
-            <a:off x="7366000" y="2705100"/>
-            <a:ext cx="4013200" cy="436880"/>
+            <a:off x="7302500" y="2705100"/>
+            <a:ext cx="4076700" cy="436880"/>
           </a:xfrm>
           <a:prstGeom prst="rect">
             <a:avLst/>
@@ -23629,7 +22756,7 @@
         <p:spPr>
           <a:xfrm>
             <a:off x="825500" y="3319779"/>
-            <a:ext cx="2159000" cy="436880"/>
+            <a:ext cx="3111500" cy="436880"/>
           </a:xfrm>
           <a:prstGeom prst="rect">
             <a:avLst/>
@@ -23660,29 +22787,7 @@
               </a:defRPr>
             </a:pPr>
             <a:r>
-              <a:t>POST</a:t>
-            </a:r>
-          </a:p>
-          <a:p>
-            <a:pPr>
-              <a:lnSpc>
-                <a:spcPts val="1844"/>
-              </a:lnSpc>
-              <a:spcBef>
-                <a:spcPts val="0"/>
-              </a:spcBef>
-              <a:spcAft>
-                <a:spcPts val="0"/>
-              </a:spcAft>
-              <a:defRPr sz="1550" b="1">
-                <a:solidFill>
-                  <a:srgbClr val="008C7B"/>
-                </a:solidFill>
-                <a:latin typeface="DejaVu Sans"/>
-              </a:defRPr>
-            </a:pPr>
-            <a:r>
-              <a:t>/env/{id}/{action}</a:t>
+              <a:t>POST /env/{id}/{action}</a:t>
             </a:r>
           </a:p>
         </p:txBody>
@@ -23695,8 +22800,8 @@
         </p:nvSpPr>
         <p:spPr>
           <a:xfrm>
-            <a:off x="3302000" y="3319779"/>
-            <a:ext cx="3746500" cy="436880"/>
+            <a:off x="4254500" y="3319779"/>
+            <a:ext cx="2730500" cy="436880"/>
           </a:xfrm>
           <a:prstGeom prst="rect">
             <a:avLst/>
@@ -23740,8 +22845,8 @@
         </p:nvSpPr>
         <p:spPr>
           <a:xfrm>
-            <a:off x="7366000" y="3319779"/>
-            <a:ext cx="4013200" cy="436880"/>
+            <a:off x="7302500" y="3319779"/>
+            <a:ext cx="4076700" cy="436880"/>
           </a:xfrm>
           <a:prstGeom prst="rect">
             <a:avLst/>
@@ -23829,7 +22934,7 @@
         <p:spPr>
           <a:xfrm>
             <a:off x="825500" y="3934460"/>
-            <a:ext cx="2159000" cy="436880"/>
+            <a:ext cx="3111500" cy="436880"/>
           </a:xfrm>
           <a:prstGeom prst="rect">
             <a:avLst/>
@@ -23860,29 +22965,7 @@
               </a:defRPr>
             </a:pPr>
             <a:r>
-              <a:t>GET</a:t>
-            </a:r>
-          </a:p>
-          <a:p>
-            <a:pPr>
-              <a:lnSpc>
-                <a:spcPts val="1844"/>
-              </a:lnSpc>
-              <a:spcBef>
-                <a:spcPts val="0"/>
-              </a:spcBef>
-              <a:spcAft>
-                <a:spcPts val="0"/>
-              </a:spcAft>
-              <a:defRPr sz="1550" b="1">
-                <a:solidFill>
-                  <a:srgbClr val="008C7B"/>
-                </a:solidFill>
-                <a:latin typeface="DejaVu Sans"/>
-              </a:defRPr>
-            </a:pPr>
-            <a:r>
-              <a:t>/env/{id}/status</a:t>
+              <a:t>GET /env/{id}/status</a:t>
             </a:r>
           </a:p>
         </p:txBody>
@@ -23895,8 +22978,8 @@
         </p:nvSpPr>
         <p:spPr>
           <a:xfrm>
-            <a:off x="3302000" y="3934460"/>
-            <a:ext cx="3746500" cy="436880"/>
+            <a:off x="4254500" y="3934460"/>
+            <a:ext cx="2730500" cy="436880"/>
           </a:xfrm>
           <a:prstGeom prst="rect">
             <a:avLst/>
@@ -23940,8 +23023,8 @@
         </p:nvSpPr>
         <p:spPr>
           <a:xfrm>
-            <a:off x="7366000" y="3934460"/>
-            <a:ext cx="4013200" cy="436880"/>
+            <a:off x="7302500" y="3934460"/>
+            <a:ext cx="4076700" cy="436880"/>
           </a:xfrm>
           <a:prstGeom prst="rect">
             <a:avLst/>
@@ -24029,7 +23112,7 @@
         <p:spPr>
           <a:xfrm>
             <a:off x="825500" y="4549140"/>
-            <a:ext cx="2159000" cy="436880"/>
+            <a:ext cx="3111500" cy="436880"/>
           </a:xfrm>
           <a:prstGeom prst="rect">
             <a:avLst/>
@@ -24060,29 +23143,7 @@
               </a:defRPr>
             </a:pPr>
             <a:r>
-              <a:t>GET</a:t>
-            </a:r>
-          </a:p>
-          <a:p>
-            <a:pPr>
-              <a:lnSpc>
-                <a:spcPts val="1844"/>
-              </a:lnSpc>
-              <a:spcBef>
-                <a:spcPts val="0"/>
-              </a:spcBef>
-              <a:spcAft>
-                <a:spcPts val="0"/>
-              </a:spcAft>
-              <a:defRPr sz="1550" b="1">
-                <a:solidFill>
-                  <a:srgbClr val="008C7B"/>
-                </a:solidFill>
-                <a:latin typeface="DejaVu Sans"/>
-              </a:defRPr>
-            </a:pPr>
-            <a:r>
-              <a:t>/env/{id}/result</a:t>
+              <a:t>GET /env/{id}/result</a:t>
             </a:r>
           </a:p>
         </p:txBody>
@@ -24095,8 +23156,8 @@
         </p:nvSpPr>
         <p:spPr>
           <a:xfrm>
-            <a:off x="3302000" y="4549140"/>
-            <a:ext cx="3746500" cy="436880"/>
+            <a:off x="4254500" y="4549140"/>
+            <a:ext cx="2730500" cy="436880"/>
           </a:xfrm>
           <a:prstGeom prst="rect">
             <a:avLst/>
@@ -24140,8 +23201,8 @@
         </p:nvSpPr>
         <p:spPr>
           <a:xfrm>
-            <a:off x="7366000" y="4549140"/>
-            <a:ext cx="4013200" cy="436880"/>
+            <a:off x="7302500" y="4549140"/>
+            <a:ext cx="4076700" cy="436880"/>
           </a:xfrm>
           <a:prstGeom prst="rect">
             <a:avLst/>
@@ -24229,7 +23290,7 @@
         <p:spPr>
           <a:xfrm>
             <a:off x="825500" y="5163820"/>
-            <a:ext cx="2159000" cy="436880"/>
+            <a:ext cx="3111500" cy="436880"/>
           </a:xfrm>
           <a:prstGeom prst="rect">
             <a:avLst/>
@@ -24273,8 +23334,8 @@
         </p:nvSpPr>
         <p:spPr>
           <a:xfrm>
-            <a:off x="3302000" y="5163820"/>
-            <a:ext cx="3746500" cy="436880"/>
+            <a:off x="4254500" y="5163820"/>
+            <a:ext cx="2730500" cy="436880"/>
           </a:xfrm>
           <a:prstGeom prst="rect">
             <a:avLst/>
@@ -24318,8 +23379,8 @@
         </p:nvSpPr>
         <p:spPr>
           <a:xfrm>
-            <a:off x="7366000" y="5163820"/>
-            <a:ext cx="4013200" cy="436880"/>
+            <a:off x="7302500" y="5163820"/>
+            <a:ext cx="4076700" cy="436880"/>
           </a:xfrm>
           <a:prstGeom prst="rect">
             <a:avLst/>
@@ -30873,7 +29934,7 @@
               </a:defRPr>
             </a:pPr>
             <a:r>
-              <a:t>Reference defaults shown. Read the selected environment's public rules at startup.</a:t>
+              <a:t>Current practice configuration shown. Read the selected environment’s public rules at startup.</a:t>
             </a:r>
           </a:p>
         </p:txBody>
@@ -31372,7 +30433,7 @@
               </a:defRPr>
             </a:pPr>
             <a:r>
-              <a:t>Default: 2 hours from environment creation</a:t>
+              <a:t>Practice config: 1 hour from creation</a:t>
             </a:r>
           </a:p>
         </p:txBody>
@@ -31462,29 +30523,7 @@
               </a:defRPr>
             </a:pPr>
             <a:r>
-              <a:t>Thinking and network latency use this</a:t>
-            </a:r>
-          </a:p>
-          <a:p>
-            <a:pPr>
-              <a:lnSpc>
-                <a:spcPts val="2160"/>
-              </a:lnSpc>
-              <a:spcBef>
-                <a:spcPts val="0"/>
-              </a:spcBef>
-              <a:spcAft>
-                <a:spcPts val="0"/>
-              </a:spcAft>
-              <a:defRPr sz="1600" b="0">
-                <a:solidFill>
-                  <a:srgbClr val="173A42"/>
-                </a:solidFill>
-                <a:latin typeface="DejaVu Sans"/>
-              </a:defRPr>
-            </a:pPr>
-            <a:r>
-              <a:t>budget</a:t>
+              <a:t>Thinking and network latency use this time</a:t>
             </a:r>
           </a:p>
         </p:txBody>
@@ -31497,7 +30536,7 @@
         </p:nvSpPr>
         <p:spPr>
           <a:xfrm>
-            <a:off x="939800" y="4058920"/>
+            <a:off x="939800" y="3784600"/>
             <a:ext cx="63500" cy="63500"/>
           </a:xfrm>
           <a:prstGeom prst="roundRect">
@@ -31542,7 +30581,7 @@
         </p:nvSpPr>
         <p:spPr>
           <a:xfrm>
-            <a:off x="1168400" y="3982720"/>
+            <a:off x="1168400" y="3708400"/>
             <a:ext cx="4508500" cy="1397000"/>
           </a:xfrm>
           <a:prstGeom prst="rect">
@@ -31574,7 +30613,7 @@
               </a:defRPr>
             </a:pPr>
             <a:r>
-              <a:t>After expiry, actions are rejected</a:t>
+              <a:t>After expiry, business actions are rejected</a:t>
             </a:r>
           </a:p>
         </p:txBody>
@@ -31587,7 +30626,7 @@
         </p:nvSpPr>
         <p:spPr>
           <a:xfrm>
-            <a:off x="939800" y="4414520"/>
+            <a:off x="939800" y="4140200"/>
             <a:ext cx="63500" cy="63500"/>
           </a:xfrm>
           <a:prstGeom prst="roundRect">
@@ -31632,7 +30671,7 @@
         </p:nvSpPr>
         <p:spPr>
           <a:xfrm>
-            <a:off x="1168400" y="4338320"/>
+            <a:off x="1168400" y="4064000"/>
             <a:ext cx="4508500" cy="1397000"/>
           </a:xfrm>
           <a:prstGeom prst="rect">
@@ -31664,7 +30703,7 @@
               </a:defRPr>
             </a:pPr>
             <a:r>
-              <a:t>No automatic simulation of unplayed days</a:t>
+              <a:t>Unplayed days are not simulated</a:t>
             </a:r>
           </a:p>
         </p:txBody>
@@ -31887,7 +30926,7 @@
               </a:defRPr>
             </a:pPr>
             <a:r>
-              <a:t>Advances only through environment actions</a:t>
+              <a:t>Advances through business actions</a:t>
             </a:r>
           </a:p>
         </p:txBody>
@@ -31977,7 +31016,7 @@
               </a:defRPr>
             </a:pPr>
             <a:r>
-              <a:t>Sales resolve in fixed intervals</a:t>
+              <a:t>Sales and fees settle at midnight</a:t>
             </a:r>
           </a:p>
         </p:txBody>
@@ -32067,7 +31106,7 @@
               </a:defRPr>
             </a:pPr>
             <a:r>
-              <a:t>Midnight triggers fees and debt accounting</a:t>
+              <a:t>end_day advances to the next midnight</a:t>
             </a:r>
           </a:p>
         </p:txBody>
@@ -32157,7 +31196,7 @@
               </a:defRPr>
             </a:pPr>
             <a:r>
-              <a:t>end_day advances to the next midnight</a:t>
+              <a:t>Practice config: a 365-day cap</a:t>
             </a:r>
           </a:p>
         </p:txBody>
@@ -32247,7 +31286,7 @@
               </a:defRPr>
             </a:pPr>
             <a:r>
-              <a:t>Benchmark runs have no simulated-day cap. Practice smoke runs do.</a:t>
+              <a:t>The first real-time, simulated-day, or fee-failure limit ends the episode.</a:t>
             </a:r>
           </a:p>
         </p:txBody>
@@ -32748,7 +31787,7 @@
               </a:defRPr>
             </a:pPr>
             <a:r>
-              <a:t>Compare quotes</a:t>
+              <a:t>Check existing</a:t>
             </a:r>
           </a:p>
           <a:p>
@@ -32770,7 +31809,7 @@
               </a:defRPr>
             </a:pPr>
             <a:r>
-              <a:t>and submit an</a:t>
+              <a:t>stock, then buy</a:t>
             </a:r>
           </a:p>
           <a:p>
@@ -32792,7 +31831,7 @@
               </a:defRPr>
             </a:pPr>
             <a:r>
-              <a:t>offer.</a:t>
+              <a:t>any shortfall.</a:t>
             </a:r>
           </a:p>
         </p:txBody>
@@ -33690,7 +32729,7 @@
               </a:defRPr>
             </a:pPr>
             <a:r>
-              <a:t>Collect cash, pay</a:t>
+              <a:t>Collect cash,</a:t>
             </a:r>
           </a:p>
           <a:p>
@@ -33712,7 +32751,7 @@
               </a:defRPr>
             </a:pPr>
             <a:r>
-              <a:t>fees, and</a:t>
+              <a:t>reserve fees, and</a:t>
             </a:r>
           </a:p>
           <a:p>
@@ -35082,7 +34121,7 @@
               </a:defRPr>
             </a:pPr>
             <a:r>
-              <a:t>A suggestion for another product is optional; it never buys anything automatically.</a:t>
+              <a:t>Supplier-product pairs reshuffle every 30 days in the practice configuration.</a:t>
             </a:r>
           </a:p>
         </p:txBody>
